--- a/1-基础通识部分/第4课.pptx
+++ b/1-基础通识部分/第4课.pptx
@@ -5,31 +5,31 @@
     <p:sldMasterId id="2147483648" r:id="rId1"/>
   </p:sldMasterIdLst>
   <p:notesMasterIdLst>
-    <p:notesMasterId r:id="rId18"/>
+    <p:notesMasterId r:id="rId5"/>
   </p:notesMasterIdLst>
   <p:handoutMasterIdLst>
-    <p:handoutMasterId r:id="rId19"/>
+    <p:handoutMasterId r:id="rId20"/>
   </p:handoutMasterIdLst>
   <p:sldIdLst>
-    <p:sldId id="256" r:id="rId2"/>
-    <p:sldId id="294" r:id="rId3"/>
-    <p:sldId id="310" r:id="rId4"/>
-    <p:sldId id="311" r:id="rId5"/>
-    <p:sldId id="314" r:id="rId6"/>
-    <p:sldId id="312" r:id="rId7"/>
-    <p:sldId id="313" r:id="rId8"/>
-    <p:sldId id="315" r:id="rId9"/>
-    <p:sldId id="316" r:id="rId10"/>
-    <p:sldId id="318" r:id="rId11"/>
-    <p:sldId id="319" r:id="rId12"/>
-    <p:sldId id="322" r:id="rId13"/>
-    <p:sldId id="317" r:id="rId14"/>
-    <p:sldId id="320" r:id="rId15"/>
-    <p:sldId id="321" r:id="rId16"/>
-    <p:sldId id="274" r:id="rId17"/>
+    <p:sldId id="256" r:id="rId3"/>
+    <p:sldId id="294" r:id="rId4"/>
+    <p:sldId id="310" r:id="rId6"/>
+    <p:sldId id="311" r:id="rId7"/>
+    <p:sldId id="314" r:id="rId8"/>
+    <p:sldId id="312" r:id="rId9"/>
+    <p:sldId id="313" r:id="rId10"/>
+    <p:sldId id="315" r:id="rId11"/>
+    <p:sldId id="316" r:id="rId12"/>
+    <p:sldId id="318" r:id="rId13"/>
+    <p:sldId id="319" r:id="rId14"/>
+    <p:sldId id="322" r:id="rId15"/>
+    <p:sldId id="317" r:id="rId16"/>
+    <p:sldId id="320" r:id="rId17"/>
+    <p:sldId id="321" r:id="rId18"/>
+    <p:sldId id="274" r:id="rId19"/>
   </p:sldIdLst>
   <p:sldSz cx="12192000" cy="6858000"/>
-  <p:notesSz cx="7104063" cy="10234613"/>
+  <p:notesSz cx="7103745" cy="10234295"/>
   <p:defaultTextStyle>
     <a:defPPr>
       <a:defRPr lang="zh-CN"/>
@@ -226,7 +226,6 @@
           <a:p>
             <a:fld id="{0F9B84EA-7D68-4D60-9CB1-D50884785D1C}" type="datetimeFigureOut">
               <a:rPr lang="zh-CN" altLang="en-US" smtClean="0"/>
-              <a:t>2026/9/13</a:t>
             </a:fld>
             <a:endParaRPr lang="zh-CN" altLang="en-US"/>
           </a:p>
@@ -292,18 +291,12 @@
           <a:p>
             <a:fld id="{8D4E0FC9-F1F8-4FAE-9988-3BA365CFD46F}" type="slidenum">
               <a:rPr lang="zh-CN" altLang="en-US" smtClean="0"/>
-              <a:t>‹#›</a:t>
             </a:fld>
             <a:endParaRPr lang="zh-CN" altLang="en-US"/>
           </a:p>
         </p:txBody>
       </p:sp>
     </p:spTree>
-    <p:extLst>
-      <p:ext uri="{BB962C8B-B14F-4D97-AF65-F5344CB8AC3E}">
-        <p14:creationId xmlns:p14="http://schemas.microsoft.com/office/powerpoint/2010/main" val="1"/>
-      </p:ext>
-    </p:extLst>
   </p:cSld>
   <p:clrMap bg1="lt1" tx1="dk1" bg2="lt2" tx2="dk2" accent1="accent1" accent2="accent2" accent3="accent3" accent4="accent4" accent5="accent5" accent6="accent6" hlink="hlink" folHlink="folHlink"/>
 </p:handoutMaster>
@@ -391,7 +384,6 @@
           <a:p>
             <a:fld id="{D6C8D182-E4C8-4120-9249-FC9774456FFA}" type="datetimeFigureOut">
               <a:rPr lang="zh-CN" altLang="en-US" smtClean="0"/>
-              <a:t>2026/9/13</a:t>
             </a:fld>
             <a:endParaRPr lang="zh-CN" altLang="en-US"/>
           </a:p>
@@ -458,6 +450,7 @@
               <a:rPr lang="zh-CN" altLang="en-US"/>
               <a:t>编辑母版文本样式</a:t>
             </a:r>
+            <a:endParaRPr lang="zh-CN" altLang="en-US"/>
           </a:p>
           <a:p>
             <a:pPr lvl="1"/>
@@ -465,6 +458,7 @@
               <a:rPr lang="zh-CN" altLang="en-US"/>
               <a:t>第二级</a:t>
             </a:r>
+            <a:endParaRPr lang="zh-CN" altLang="en-US"/>
           </a:p>
           <a:p>
             <a:pPr lvl="2"/>
@@ -472,6 +466,7 @@
               <a:rPr lang="zh-CN" altLang="en-US"/>
               <a:t>第三级</a:t>
             </a:r>
+            <a:endParaRPr lang="zh-CN" altLang="en-US"/>
           </a:p>
           <a:p>
             <a:pPr lvl="3"/>
@@ -479,6 +474,7 @@
               <a:rPr lang="zh-CN" altLang="en-US"/>
               <a:t>第四级</a:t>
             </a:r>
+            <a:endParaRPr lang="zh-CN" altLang="en-US"/>
           </a:p>
           <a:p>
             <a:pPr lvl="4"/>
@@ -486,6 +482,7 @@
               <a:rPr lang="zh-CN" altLang="en-US"/>
               <a:t>第五级</a:t>
             </a:r>
+            <a:endParaRPr lang="zh-CN" altLang="en-US"/>
           </a:p>
         </p:txBody>
       </p:sp>
@@ -549,7 +546,6 @@
           <a:p>
             <a:fld id="{85D0DACE-38E0-42D2-9336-2B707D34BC6D}" type="slidenum">
               <a:rPr lang="zh-CN" altLang="en-US" smtClean="0"/>
-              <a:t>‹#›</a:t>
             </a:fld>
             <a:endParaRPr lang="zh-CN" altLang="en-US"/>
           </a:p>
@@ -773,13 +769,14 @@
               <a:rPr lang="zh-CN" altLang="en-US"/>
               <a:t>技术</a:t>
             </a:r>
+            <a:endParaRPr lang="zh-CN" altLang="en-US"/>
           </a:p>
           <a:p>
             <a:endParaRPr lang="zh-CN" altLang="en-US"/>
           </a:p>
           <a:p>
             <a:pPr marL="171450" indent="-171450">
-              <a:buFont typeface="Arial" panose="020B0604020202020204" pitchFamily="34" charset="0"/>
+              <a:buFont typeface="Arial" panose="02080604020202020204" pitchFamily="34" charset="0"/>
               <a:buChar char="•"/>
             </a:pPr>
             <a:r>
@@ -794,6 +791,7 @@
               <a:rPr lang="zh-CN" altLang="en-US"/>
               <a:t>的一部分信息有关</a:t>
             </a:r>
+            <a:endParaRPr lang="zh-CN" altLang="en-US"/>
           </a:p>
         </p:txBody>
       </p:sp>
@@ -850,7 +848,7 @@
           <a:lstStyle/>
           <a:p>
             <a:pPr marL="171450" indent="-171450">
-              <a:buFont typeface="Arial" panose="020B0604020202020204" pitchFamily="34" charset="0"/>
+              <a:buFont typeface="Arial" panose="02080604020202020204" pitchFamily="34" charset="0"/>
               <a:buChar char="•"/>
             </a:pPr>
             <a:r>
@@ -865,6 +863,7 @@
               <a:rPr lang="zh-CN" altLang="en-US"/>
               <a:t>从表现上模拟了人类思考和说话的过程，但本质上是否一致还存在争议，并且可以预见，这种争议还会存在很久</a:t>
             </a:r>
+            <a:endParaRPr lang="zh-CN" altLang="en-US"/>
           </a:p>
         </p:txBody>
       </p:sp>
@@ -921,24 +920,25 @@
           <a:lstStyle/>
           <a:p>
             <a:pPr indent="0">
-              <a:buFont typeface="Arial" panose="020B0604020202020204" pitchFamily="34" charset="0"/>
+              <a:buFont typeface="Arial" panose="02080604020202020204" pitchFamily="34" charset="0"/>
               <a:buNone/>
             </a:pPr>
             <a:r>
               <a:rPr lang="zh-CN" altLang="en-US" dirty="0"/>
               <a:t>所以在选择模型的时候，我们首先要考虑的是模型的大小</a:t>
             </a:r>
+            <a:endParaRPr lang="zh-CN" altLang="en-US" dirty="0"/>
           </a:p>
           <a:p>
             <a:pPr marL="171450" indent="-171450">
-              <a:buFont typeface="Arial" panose="020B0604020202020204" pitchFamily="34" charset="0"/>
+              <a:buFont typeface="Arial" panose="02080604020202020204" pitchFamily="34" charset="0"/>
               <a:buChar char="•"/>
             </a:pPr>
             <a:endParaRPr lang="zh-CN" altLang="en-US" dirty="0"/>
           </a:p>
           <a:p>
             <a:pPr marL="171450" indent="-171450">
-              <a:buFont typeface="Arial" panose="020B0604020202020204" pitchFamily="34" charset="0"/>
+              <a:buFont typeface="Arial" panose="02080604020202020204" pitchFamily="34" charset="0"/>
               <a:buChar char="•"/>
             </a:pPr>
             <a:r>
@@ -1009,27 +1009,29 @@
               <a:rPr lang="zh-CN" altLang="en-US" dirty="0"/>
               <a:t>几十亿</a:t>
             </a:r>
+            <a:endParaRPr lang="zh-CN" altLang="en-US" dirty="0"/>
           </a:p>
           <a:p>
             <a:pPr marL="171450" indent="-171450">
-              <a:buFont typeface="Arial" panose="020B0604020202020204" pitchFamily="34" charset="0"/>
+              <a:buFont typeface="Arial" panose="02080604020202020204" pitchFamily="34" charset="0"/>
               <a:buChar char="•"/>
             </a:pPr>
             <a:endParaRPr lang="zh-CN" altLang="en-US" dirty="0"/>
           </a:p>
           <a:p>
             <a:pPr marL="171450" indent="-171450">
-              <a:buFont typeface="Arial" panose="020B0604020202020204" pitchFamily="34" charset="0"/>
+              <a:buFont typeface="Arial" panose="02080604020202020204" pitchFamily="34" charset="0"/>
               <a:buChar char="•"/>
             </a:pPr>
             <a:r>
               <a:rPr lang="zh-CN" altLang="en-US" dirty="0"/>
               <a:t>数据格式转换、标记：小模型</a:t>
             </a:r>
+            <a:endParaRPr lang="zh-CN" altLang="en-US" dirty="0"/>
           </a:p>
           <a:p>
             <a:pPr marL="171450" indent="-171450">
-              <a:buFont typeface="Arial" panose="020B0604020202020204" pitchFamily="34" charset="0"/>
+              <a:buFont typeface="Arial" panose="02080604020202020204" pitchFamily="34" charset="0"/>
               <a:buChar char="•"/>
             </a:pPr>
             <a:r>
@@ -1040,14 +1042,14 @@
           </a:p>
           <a:p>
             <a:pPr marL="171450" indent="-171450">
-              <a:buFont typeface="Arial" panose="020B0604020202020204" pitchFamily="34" charset="0"/>
+              <a:buFont typeface="Arial" panose="02080604020202020204" pitchFamily="34" charset="0"/>
               <a:buChar char="•"/>
             </a:pPr>
             <a:endParaRPr lang="en-US" altLang="zh-CN" dirty="0"/>
           </a:p>
           <a:p>
             <a:pPr marL="0" indent="0">
-              <a:buFont typeface="Arial" panose="020B0604020202020204" pitchFamily="34" charset="0"/>
+              <a:buFont typeface="Arial" panose="02080604020202020204" pitchFamily="34" charset="0"/>
               <a:buNone/>
             </a:pPr>
             <a:r>
@@ -1058,7 +1060,7 @@
           </a:p>
           <a:p>
             <a:pPr marL="0" indent="0">
-              <a:buFont typeface="Arial" panose="020B0604020202020204" pitchFamily="34" charset="0"/>
+              <a:buFont typeface="Arial" panose="02080604020202020204" pitchFamily="34" charset="0"/>
               <a:buNone/>
             </a:pPr>
             <a:r>
@@ -1150,13 +1152,14 @@
           <a:lstStyle/>
           <a:p>
             <a:pPr marL="171450" indent="-171450">
-              <a:buFont typeface="Arial" panose="020B0604020202020204" pitchFamily="34" charset="0"/>
+              <a:buFont typeface="Arial" panose="02080604020202020204" pitchFamily="34" charset="0"/>
               <a:buChar char="•"/>
             </a:pPr>
             <a:r>
               <a:rPr lang="zh-CN" altLang="en-US" dirty="0"/>
               <a:t>当前的主流模型都是用的这一套相同的技术底座，为什么最终展现的技能各有侧重，实力也有强弱之分？</a:t>
             </a:r>
+            <a:endParaRPr lang="zh-CN" altLang="en-US" dirty="0"/>
           </a:p>
         </p:txBody>
       </p:sp>
@@ -1269,7 +1272,7 @@
           <a:lstStyle/>
           <a:p>
             <a:pPr marL="171450" indent="-171450">
-              <a:buFont typeface="Arial" panose="020B0604020202020204" pitchFamily="34" charset="0"/>
+              <a:buFont typeface="Arial" panose="02080604020202020204" pitchFamily="34" charset="0"/>
               <a:buChar char="•"/>
             </a:pPr>
             <a:r>
@@ -1284,10 +1287,11 @@
               <a:rPr lang="zh-CN" altLang="en-US"/>
               <a:t>的特殊架构搭建的</a:t>
             </a:r>
+            <a:endParaRPr lang="zh-CN" altLang="en-US"/>
           </a:p>
           <a:p>
             <a:pPr marL="171450" indent="-171450">
-              <a:buFont typeface="Arial" panose="020B0604020202020204" pitchFamily="34" charset="0"/>
+              <a:buFont typeface="Arial" panose="02080604020202020204" pitchFamily="34" charset="0"/>
               <a:buChar char="•"/>
             </a:pPr>
             <a:r>
@@ -1322,10 +1326,11 @@
               <a:rPr lang="zh-CN" altLang="en-US"/>
               <a:t>之间的关联关系</a:t>
             </a:r>
+            <a:endParaRPr lang="zh-CN" altLang="en-US"/>
           </a:p>
           <a:p>
             <a:pPr marL="171450" indent="-171450">
-              <a:buFont typeface="Arial" panose="020B0604020202020204" pitchFamily="34" charset="0"/>
+              <a:buFont typeface="Arial" panose="02080604020202020204" pitchFamily="34" charset="0"/>
               <a:buChar char="•"/>
             </a:pPr>
             <a:r>
@@ -1348,17 +1353,18 @@
               <a:rPr lang="zh-CN" altLang="en-US"/>
               <a:t>》</a:t>
             </a:r>
+            <a:endParaRPr lang="zh-CN" altLang="en-US"/>
           </a:p>
           <a:p>
             <a:pPr marL="171450" indent="-171450">
-              <a:buFont typeface="Arial" panose="020B0604020202020204" pitchFamily="34" charset="0"/>
+              <a:buFont typeface="Arial" panose="02080604020202020204" pitchFamily="34" charset="0"/>
               <a:buChar char="•"/>
             </a:pPr>
             <a:endParaRPr lang="zh-CN" altLang="en-US"/>
           </a:p>
           <a:p>
             <a:pPr marL="171450" indent="-171450">
-              <a:buFont typeface="Arial" panose="020B0604020202020204" pitchFamily="34" charset="0"/>
+              <a:buFont typeface="Arial" panose="02080604020202020204" pitchFamily="34" charset="0"/>
               <a:buChar char="•"/>
             </a:pPr>
             <a:r>
@@ -1369,37 +1375,40 @@
               <a:rPr lang="zh-CN" altLang="en-US"/>
               <a:t>是一种全局的、并行计算的模型</a:t>
             </a:r>
+            <a:endParaRPr lang="zh-CN" altLang="en-US"/>
           </a:p>
           <a:p>
             <a:pPr marL="171450" indent="-171450">
-              <a:buFont typeface="Arial" panose="020B0604020202020204" pitchFamily="34" charset="0"/>
+              <a:buFont typeface="Arial" panose="02080604020202020204" pitchFamily="34" charset="0"/>
               <a:buChar char="•"/>
             </a:pPr>
             <a:r>
               <a:rPr lang="zh-CN" altLang="en-US"/>
               <a:t>从实现注意力的这个结构可以看出，同一批计算被拆分为了好几个互相独立的部分。。。</a:t>
             </a:r>
+            <a:endParaRPr lang="zh-CN" altLang="en-US"/>
           </a:p>
           <a:p>
             <a:pPr marL="171450" indent="-171450">
-              <a:buFont typeface="Arial" panose="020B0604020202020204" pitchFamily="34" charset="0"/>
+              <a:buFont typeface="Arial" panose="02080604020202020204" pitchFamily="34" charset="0"/>
               <a:buChar char="•"/>
             </a:pPr>
             <a:r>
               <a:rPr lang="zh-CN" altLang="en-US"/>
               <a:t>当数据输入进来之后，这个部分同时拿到数据，同时进行彼此互相独立的计算，最后输出的计算结果再进行合并</a:t>
             </a:r>
+            <a:endParaRPr lang="zh-CN" altLang="en-US"/>
           </a:p>
           <a:p>
             <a:pPr marL="171450" indent="-171450">
-              <a:buFont typeface="Arial" panose="020B0604020202020204" pitchFamily="34" charset="0"/>
+              <a:buFont typeface="Arial" panose="02080604020202020204" pitchFamily="34" charset="0"/>
               <a:buChar char="•"/>
             </a:pPr>
             <a:endParaRPr lang="zh-CN" altLang="en-US"/>
           </a:p>
           <a:p>
             <a:pPr marL="171450" indent="-171450">
-              <a:buFont typeface="Arial" panose="020B0604020202020204" pitchFamily="34" charset="0"/>
+              <a:buFont typeface="Arial" panose="02080604020202020204" pitchFamily="34" charset="0"/>
               <a:buChar char="•"/>
             </a:pPr>
             <a:r>
@@ -1422,10 +1431,11 @@
               <a:rPr lang="zh-CN" altLang="en-US"/>
               <a:t>就是其中代表</a:t>
             </a:r>
+            <a:endParaRPr lang="zh-CN" altLang="en-US"/>
           </a:p>
           <a:p>
             <a:pPr marL="171450" indent="-171450">
-              <a:buFont typeface="Arial" panose="020B0604020202020204" pitchFamily="34" charset="0"/>
+              <a:buFont typeface="Arial" panose="02080604020202020204" pitchFamily="34" charset="0"/>
               <a:buChar char="•"/>
             </a:pPr>
             <a:r>
@@ -1448,10 +1458,11 @@
               <a:rPr lang="zh-CN" altLang="en-US"/>
               <a:t>呢？</a:t>
             </a:r>
+            <a:endParaRPr lang="zh-CN" altLang="en-US"/>
           </a:p>
           <a:p>
             <a:pPr indent="0">
-              <a:buFont typeface="Arial" panose="020B0604020202020204" pitchFamily="34" charset="0"/>
+              <a:buFont typeface="Arial" panose="02080604020202020204" pitchFamily="34" charset="0"/>
               <a:buNone/>
             </a:pPr>
             <a:endParaRPr lang="zh-CN" altLang="en-US"/>
@@ -1570,6 +1581,7 @@
               <a:rPr lang="en-US"/>
               <a:t>transformer explainer</a:t>
             </a:r>
+            <a:endParaRPr lang="en-US"/>
           </a:p>
         </p:txBody>
       </p:sp>
@@ -1626,7 +1638,7 @@
           <a:lstStyle/>
           <a:p>
             <a:pPr indent="0">
-              <a:buFont typeface="Arial" panose="020B0604020202020204" pitchFamily="34" charset="0"/>
+              <a:buFont typeface="Arial" panose="02080604020202020204" pitchFamily="34" charset="0"/>
               <a:buNone/>
             </a:pPr>
             <a:r>
@@ -1690,27 +1702,29 @@
           <a:lstStyle/>
           <a:p>
             <a:pPr marL="171450" indent="-171450">
-              <a:buFont typeface="Arial" panose="020B0604020202020204" pitchFamily="34" charset="0"/>
+              <a:buFont typeface="Arial" panose="02080604020202020204" pitchFamily="34" charset="0"/>
               <a:buChar char="•"/>
             </a:pPr>
             <a:r>
               <a:rPr lang="zh-CN" altLang="en-US"/>
               <a:t>参数量受限所以上下文长度会受限</a:t>
             </a:r>
+            <a:endParaRPr lang="zh-CN" altLang="en-US"/>
           </a:p>
           <a:p>
             <a:pPr marL="171450" indent="-171450">
-              <a:buFont typeface="Arial" panose="020B0604020202020204" pitchFamily="34" charset="0"/>
+              <a:buFont typeface="Arial" panose="02080604020202020204" pitchFamily="34" charset="0"/>
               <a:buChar char="•"/>
             </a:pPr>
             <a:r>
               <a:rPr lang="zh-CN" altLang="en-US"/>
               <a:t>大家可能觉得一百万字很长了，已经相当于一本《基督山伯爵》</a:t>
             </a:r>
+            <a:endParaRPr lang="zh-CN" altLang="en-US"/>
           </a:p>
           <a:p>
             <a:pPr marL="171450" indent="-171450">
-              <a:buFont typeface="Arial" panose="020B0604020202020204" pitchFamily="34" charset="0"/>
+              <a:buFont typeface="Arial" panose="02080604020202020204" pitchFamily="34" charset="0"/>
               <a:buChar char="•"/>
             </a:pPr>
             <a:r>
@@ -1721,6 +1735,7 @@
               <a:rPr lang="en-US" altLang="zh-CN"/>
               <a:t>K</a:t>
             </a:r>
+            <a:endParaRPr lang="en-US" altLang="zh-CN"/>
           </a:p>
         </p:txBody>
       </p:sp>
@@ -1796,10 +1811,11 @@
               <a:rPr lang="zh-CN" altLang="en-US" dirty="0"/>
               <a:t>年时间，这段时间里主要是在等什么呢？</a:t>
             </a:r>
+            <a:endParaRPr lang="zh-CN" altLang="en-US" dirty="0"/>
           </a:p>
           <a:p>
             <a:pPr marL="171450" indent="-171450">
-              <a:buFont typeface="Arial" panose="020B0604020202020204" pitchFamily="34" charset="0"/>
+              <a:buFont typeface="Arial" panose="02080604020202020204" pitchFamily="34" charset="0"/>
               <a:buChar char="•"/>
             </a:pPr>
             <a:r>
@@ -1824,6 +1840,7 @@
               <a:rPr lang="zh-CN" altLang="en-US" dirty="0"/>
               <a:t>只有基于这些设备搭建的“算力中心”才能真正承载当前最先进的大模型</a:t>
             </a:r>
+            <a:endParaRPr lang="zh-CN" altLang="en-US" dirty="0"/>
           </a:p>
         </p:txBody>
       </p:sp>
@@ -1883,6 +1900,7 @@
               <a:rPr lang="zh-CN" altLang="en-US"/>
               <a:t>以前硬件设备计算能力不足是制约大模型发展的瓶颈。</a:t>
             </a:r>
+            <a:endParaRPr lang="zh-CN" altLang="en-US"/>
           </a:p>
           <a:p>
             <a:endParaRPr lang="zh-CN" altLang="en-US"/>
@@ -1892,6 +1910,7 @@
               <a:rPr lang="zh-CN" altLang="en-US"/>
               <a:t>现在，支撑这些硬件进行计算的能源开始逐渐变为了新的发展瓶颈</a:t>
             </a:r>
+            <a:endParaRPr lang="zh-CN" altLang="en-US"/>
           </a:p>
         </p:txBody>
       </p:sp>
@@ -1965,7 +1984,6 @@
             <a:pPr algn="ctr">
               <a:defRPr/>
             </a:pPr>
-            <a:endParaRPr/>
           </a:p>
         </p:txBody>
       </p:sp>
@@ -2041,7 +2059,6 @@
             <a:pPr algn="ctr">
               <a:defRPr/>
             </a:pPr>
-            <a:endParaRPr/>
           </a:p>
         </p:txBody>
       </p:sp>
@@ -2117,7 +2134,6 @@
             <a:pPr algn="ctr">
               <a:defRPr/>
             </a:pPr>
-            <a:endParaRPr/>
           </a:p>
         </p:txBody>
       </p:sp>
@@ -2193,7 +2209,6 @@
             <a:pPr algn="ctr">
               <a:defRPr/>
             </a:pPr>
-            <a:endParaRPr/>
           </a:p>
         </p:txBody>
       </p:sp>
@@ -2265,7 +2280,6 @@
             <a:pPr algn="ctr">
               <a:defRPr/>
             </a:pPr>
-            <a:endParaRPr/>
           </a:p>
         </p:txBody>
       </p:sp>
@@ -2337,7 +2351,6 @@
             <a:pPr algn="ctr">
               <a:defRPr/>
             </a:pPr>
-            <a:endParaRPr/>
           </a:p>
         </p:txBody>
       </p:sp>
@@ -2419,7 +2432,6 @@
             <a:pPr algn="ctr">
               <a:defRPr/>
             </a:pPr>
-            <a:endParaRPr/>
           </a:p>
         </p:txBody>
       </p:sp>
@@ -2500,6 +2512,7 @@
               <a:rPr lang="zh-CN" altLang="en-US" dirty="0"/>
               <a:t>单击此处添加标题</a:t>
             </a:r>
+            <a:endParaRPr lang="zh-CN" altLang="en-US" dirty="0"/>
           </a:p>
         </p:txBody>
       </p:sp>
@@ -2520,7 +2533,6 @@
           <a:p>
             <a:fld id="{760FBDFE-C587-4B4C-A407-44438C67B59E}" type="datetimeFigureOut">
               <a:rPr lang="zh-CN" altLang="en-US" smtClean="0"/>
-              <a:t>2026/9/13</a:t>
             </a:fld>
             <a:endParaRPr lang="zh-CN" altLang="en-US"/>
           </a:p>
@@ -2562,7 +2574,6 @@
           <a:p>
             <a:fld id="{49AE70B2-8BF9-45C0-BB95-33D1B9D3A854}" type="slidenum">
               <a:rPr lang="zh-CN" altLang="en-US" smtClean="0"/>
-              <a:t>‹#›</a:t>
             </a:fld>
             <a:endParaRPr lang="zh-CN" altLang="en-US"/>
           </a:p>
@@ -2640,6 +2651,7 @@
               <a:rPr lang="zh-CN" altLang="en-US" dirty="0"/>
               <a:t>单击此处添加副标题</a:t>
             </a:r>
+            <a:endParaRPr lang="zh-CN" altLang="en-US" dirty="0"/>
           </a:p>
         </p:txBody>
       </p:sp>
@@ -2716,7 +2728,7 @@
                   <a:srgbClr val="BEBEBE"/>
                 </a:solidFill>
                 <a:latin typeface="Noto Sans SC" panose="020B0200000000000000" charset="-122"/>
-                <a:ea typeface="宋体" panose="02010600030101010101" pitchFamily="2" charset="-122"/>
+                <a:ea typeface="SimSun" pitchFamily="2" charset="-122"/>
                 <a:cs typeface="Noto Sans SC" panose="020B0200000000000000" charset="-122"/>
                 <a:sym typeface="Noto Sans SC" panose="020B0200000000000000" charset="-122"/>
               </a:defRPr>
@@ -2731,6 +2743,7 @@
               <a:rPr lang="zh-CN" altLang="en-US"/>
               <a:t>【日期】</a:t>
             </a:r>
+            <a:endParaRPr lang="zh-CN" altLang="en-US"/>
           </a:p>
           <a:p>
             <a:pPr lvl="0"/>
@@ -2781,7 +2794,6 @@
           <a:p>
             <a:fld id="{760FBDFE-C587-4B4C-A407-44438C67B59E}" type="datetimeFigureOut">
               <a:rPr lang="zh-CN" altLang="en-US" smtClean="0"/>
-              <a:t>2026/9/13</a:t>
             </a:fld>
             <a:endParaRPr lang="zh-CN" altLang="en-US"/>
           </a:p>
@@ -2823,7 +2835,6 @@
           <a:p>
             <a:fld id="{49AE70B2-8BF9-45C0-BB95-33D1B9D3A854}" type="slidenum">
               <a:rPr lang="zh-CN" altLang="en-US" smtClean="0"/>
-              <a:t>‹#›</a:t>
             </a:fld>
             <a:endParaRPr lang="zh-CN" altLang="en-US"/>
           </a:p>
@@ -2893,6 +2904,7 @@
               <a:rPr lang="zh-CN" altLang="en-US" dirty="0"/>
               <a:t>单击此处编辑标题</a:t>
             </a:r>
+            <a:endParaRPr lang="zh-CN" altLang="en-US" dirty="0"/>
           </a:p>
         </p:txBody>
       </p:sp>
@@ -3024,6 +3036,7 @@
               <a:rPr lang="zh-CN" altLang="en-US" dirty="0"/>
               <a:t>单击此处编辑母版文本样式</a:t>
             </a:r>
+            <a:endParaRPr lang="zh-CN" altLang="en-US" dirty="0"/>
           </a:p>
         </p:txBody>
       </p:sp>
@@ -3044,7 +3057,6 @@
           <a:p>
             <a:fld id="{9EFD9D74-47D9-4702-A33C-335B63B48DBF}" type="datetimeFigureOut">
               <a:rPr lang="zh-CN" altLang="en-US" smtClean="0"/>
-              <a:t>2026/9/13</a:t>
             </a:fld>
             <a:endParaRPr lang="zh-CN" altLang="en-US" dirty="0"/>
           </a:p>
@@ -3086,7 +3098,6 @@
           <a:p>
             <a:fld id="{FABC47A4-756D-490B-A52F-7D9E2C9FC05F}" type="slidenum">
               <a:rPr lang="zh-CN" altLang="en-US" smtClean="0"/>
-              <a:t>‹#›</a:t>
             </a:fld>
             <a:endParaRPr lang="zh-CN" altLang="en-US"/>
           </a:p>
@@ -3148,6 +3159,7 @@
               <a:rPr lang="zh-CN" altLang="en-US"/>
               <a:t>单击此处编辑母版标题样式</a:t>
             </a:r>
+            <a:endParaRPr lang="zh-CN" altLang="en-US"/>
           </a:p>
         </p:txBody>
       </p:sp>
@@ -3176,6 +3188,7 @@
               <a:rPr lang="zh-CN" altLang="en-US" dirty="0"/>
               <a:t>单击此处编辑母版文本样式</a:t>
             </a:r>
+            <a:endParaRPr lang="zh-CN" altLang="en-US" dirty="0"/>
           </a:p>
           <a:p>
             <a:pPr lvl="1"/>
@@ -3183,6 +3196,7 @@
               <a:rPr lang="zh-CN" altLang="en-US" dirty="0"/>
               <a:t>第二级</a:t>
             </a:r>
+            <a:endParaRPr lang="zh-CN" altLang="en-US" dirty="0"/>
           </a:p>
           <a:p>
             <a:pPr lvl="2"/>
@@ -3190,6 +3204,7 @@
               <a:rPr lang="zh-CN" altLang="en-US" dirty="0"/>
               <a:t>第三级</a:t>
             </a:r>
+            <a:endParaRPr lang="zh-CN" altLang="en-US" dirty="0"/>
           </a:p>
           <a:p>
             <a:pPr lvl="3"/>
@@ -3197,6 +3212,7 @@
               <a:rPr lang="zh-CN" altLang="en-US" dirty="0"/>
               <a:t>第四级</a:t>
             </a:r>
+            <a:endParaRPr lang="zh-CN" altLang="en-US" dirty="0"/>
           </a:p>
           <a:p>
             <a:pPr lvl="4"/>
@@ -3204,6 +3220,7 @@
               <a:rPr lang="zh-CN" altLang="en-US" dirty="0"/>
               <a:t>第五级</a:t>
             </a:r>
+            <a:endParaRPr lang="zh-CN" altLang="en-US" dirty="0"/>
           </a:p>
         </p:txBody>
       </p:sp>
@@ -3224,7 +3241,6 @@
           <a:p>
             <a:fld id="{760FBDFE-C587-4B4C-A407-44438C67B59E}" type="datetimeFigureOut">
               <a:rPr lang="zh-CN" altLang="en-US" smtClean="0"/>
-              <a:t>2026/9/13</a:t>
             </a:fld>
             <a:endParaRPr lang="zh-CN" altLang="en-US"/>
           </a:p>
@@ -3266,7 +3282,6 @@
           <a:p>
             <a:fld id="{49AE70B2-8BF9-45C0-BB95-33D1B9D3A854}" type="slidenum">
               <a:rPr lang="zh-CN" altLang="en-US" smtClean="0"/>
-              <a:t>‹#›</a:t>
             </a:fld>
             <a:endParaRPr lang="zh-CN" altLang="en-US"/>
           </a:p>
@@ -3315,7 +3330,6 @@
           <a:p>
             <a:fld id="{760FBDFE-C587-4B4C-A407-44438C67B59E}" type="datetimeFigureOut">
               <a:rPr lang="zh-CN" altLang="en-US" smtClean="0"/>
-              <a:t>2026/9/13</a:t>
             </a:fld>
             <a:endParaRPr lang="zh-CN" altLang="en-US"/>
           </a:p>
@@ -3357,7 +3371,6 @@
           <a:p>
             <a:fld id="{49AE70B2-8BF9-45C0-BB95-33D1B9D3A854}" type="slidenum">
               <a:rPr lang="zh-CN" altLang="en-US" smtClean="0"/>
-              <a:t>‹#›</a:t>
             </a:fld>
             <a:endParaRPr lang="zh-CN" altLang="en-US"/>
           </a:p>
@@ -3388,6 +3401,7 @@
               <a:rPr lang="zh-CN" altLang="en-US" dirty="0"/>
               <a:t>单击此处编辑母版文本样式</a:t>
             </a:r>
+            <a:endParaRPr lang="zh-CN" altLang="en-US" dirty="0"/>
           </a:p>
           <a:p>
             <a:pPr lvl="1"/>
@@ -3395,6 +3409,7 @@
               <a:rPr lang="zh-CN" altLang="en-US" dirty="0"/>
               <a:t>第二级</a:t>
             </a:r>
+            <a:endParaRPr lang="zh-CN" altLang="en-US" dirty="0"/>
           </a:p>
           <a:p>
             <a:pPr lvl="2"/>
@@ -3402,6 +3417,7 @@
               <a:rPr lang="zh-CN" altLang="en-US" dirty="0"/>
               <a:t>第三级</a:t>
             </a:r>
+            <a:endParaRPr lang="zh-CN" altLang="en-US" dirty="0"/>
           </a:p>
           <a:p>
             <a:pPr lvl="3"/>
@@ -3409,6 +3425,7 @@
               <a:rPr lang="zh-CN" altLang="en-US" dirty="0"/>
               <a:t>第四级</a:t>
             </a:r>
+            <a:endParaRPr lang="zh-CN" altLang="en-US" dirty="0"/>
           </a:p>
           <a:p>
             <a:pPr lvl="4"/>
@@ -3416,6 +3433,7 @@
               <a:rPr lang="zh-CN" altLang="en-US" dirty="0"/>
               <a:t>第五级</a:t>
             </a:r>
+            <a:endParaRPr lang="zh-CN" altLang="en-US" dirty="0"/>
           </a:p>
         </p:txBody>
       </p:sp>
@@ -3517,7 +3535,6 @@
             <a:pPr algn="ctr">
               <a:defRPr/>
             </a:pPr>
-            <a:endParaRPr/>
           </a:p>
         </p:txBody>
       </p:sp>
@@ -3593,7 +3610,6 @@
             <a:pPr algn="ctr">
               <a:defRPr/>
             </a:pPr>
-            <a:endParaRPr/>
           </a:p>
         </p:txBody>
       </p:sp>
@@ -3614,7 +3630,6 @@
           <a:p>
             <a:fld id="{760FBDFE-C587-4B4C-A407-44438C67B59E}" type="datetimeFigureOut">
               <a:rPr lang="zh-CN" altLang="en-US" smtClean="0"/>
-              <a:t>2026/9/13</a:t>
             </a:fld>
             <a:endParaRPr lang="zh-CN" altLang="en-US"/>
           </a:p>
@@ -3656,7 +3671,6 @@
           <a:p>
             <a:fld id="{49AE70B2-8BF9-45C0-BB95-33D1B9D3A854}" type="slidenum">
               <a:rPr lang="zh-CN" altLang="en-US" smtClean="0"/>
-              <a:t>‹#›</a:t>
             </a:fld>
             <a:endParaRPr lang="zh-CN" altLang="en-US"/>
           </a:p>
@@ -3799,13 +3813,13 @@
           <p:nvPr userDrawn="1"/>
         </p:nvPicPr>
         <p:blipFill>
-          <a:blip>
+          <a:blip r:embed="rId2">
             <a:extLst>
               <a:ext uri="{28A0092B-C50C-407E-A947-70E740481C1C}">
                 <a14:useLocalDpi xmlns:a14="http://schemas.microsoft.com/office/drawing/2010/main" val="0"/>
               </a:ext>
               <a:ext uri="{96DAC541-7B7A-43D3-8B79-37D633B846F1}">
-                <asvg:svgBlip xmlns:asvg="http://schemas.microsoft.com/office/drawing/2016/SVG/main" r:embed="rId2"/>
+                <asvg:svgBlip xmlns:asvg="http://schemas.microsoft.com/office/drawing/2016/SVG/main" r:embed="rId3"/>
               </a:ext>
             </a:extLst>
           </a:blip>
@@ -3864,13 +3878,13 @@
           <p:nvPr userDrawn="1"/>
         </p:nvPicPr>
         <p:blipFill>
-          <a:blip>
+          <a:blip r:embed="rId4">
             <a:extLst>
               <a:ext uri="{28A0092B-C50C-407E-A947-70E740481C1C}">
                 <a14:useLocalDpi xmlns:a14="http://schemas.microsoft.com/office/drawing/2010/main" val="0"/>
               </a:ext>
               <a:ext uri="{96DAC541-7B7A-43D3-8B79-37D633B846F1}">
-                <asvg:svgBlip xmlns:asvg="http://schemas.microsoft.com/office/drawing/2016/SVG/main" r:embed="rId3"/>
+                <asvg:svgBlip xmlns:asvg="http://schemas.microsoft.com/office/drawing/2016/SVG/main" r:embed="rId5"/>
               </a:ext>
             </a:extLst>
           </a:blip>
@@ -3929,13 +3943,13 @@
           <p:nvPr userDrawn="1"/>
         </p:nvPicPr>
         <p:blipFill>
-          <a:blip>
+          <a:blip r:embed="rId6">
             <a:extLst>
               <a:ext uri="{28A0092B-C50C-407E-A947-70E740481C1C}">
                 <a14:useLocalDpi xmlns:a14="http://schemas.microsoft.com/office/drawing/2010/main" val="0"/>
               </a:ext>
               <a:ext uri="{96DAC541-7B7A-43D3-8B79-37D633B846F1}">
-                <asvg:svgBlip xmlns:asvg="http://schemas.microsoft.com/office/drawing/2016/SVG/main" r:embed="rId4"/>
+                <asvg:svgBlip xmlns:asvg="http://schemas.microsoft.com/office/drawing/2016/SVG/main" r:embed="rId7"/>
               </a:ext>
             </a:extLst>
           </a:blip>
@@ -4053,6 +4067,7 @@
               <a:rPr altLang="zh-CN"/>
               <a:t>XXX</a:t>
             </a:r>
+            <a:endParaRPr altLang="zh-CN"/>
           </a:p>
         </p:txBody>
       </p:sp>
@@ -4084,7 +4099,7 @@
                   </a:srgbClr>
                 </a:solidFill>
                 <a:latin typeface="Noto Sans SC" panose="020B0200000000000000" charset="-122"/>
-                <a:ea typeface="宋体" panose="02010600030101010101" pitchFamily="2" charset="-122"/>
+                <a:ea typeface="SimSun" pitchFamily="2" charset="-122"/>
                 <a:cs typeface="Noto Sans SC" panose="020B0200000000000000" charset="-122"/>
                 <a:sym typeface="Noto Sans SC" panose="020B0200000000000000" charset="-122"/>
               </a:defRPr>
@@ -4109,6 +4124,7 @@
               <a:rPr lang="zh-CN" altLang="en-US"/>
               <a:t>事实</a:t>
             </a:r>
+            <a:endParaRPr lang="zh-CN" altLang="en-US"/>
           </a:p>
         </p:txBody>
       </p:sp>
@@ -4233,7 +4249,6 @@
             <a:pPr algn="ctr">
               <a:defRPr/>
             </a:pPr>
-            <a:endParaRPr/>
           </a:p>
         </p:txBody>
       </p:sp>
@@ -4282,7 +4297,6 @@
             <a:pPr algn="ctr">
               <a:defRPr/>
             </a:pPr>
-            <a:endParaRPr/>
           </a:p>
         </p:txBody>
       </p:sp>
@@ -4331,6 +4345,7 @@
               <a:rPr lang="zh-CN" altLang="en-US" dirty="0"/>
               <a:t>单击此处编辑母版标题样式</a:t>
             </a:r>
+            <a:endParaRPr lang="zh-CN" altLang="en-US" dirty="0"/>
           </a:p>
         </p:txBody>
       </p:sp>
@@ -4427,6 +4442,7 @@
               <a:rPr lang="zh-CN" altLang="en-US" dirty="0"/>
               <a:t>单击此处编辑母版文本样式</a:t>
             </a:r>
+            <a:endParaRPr lang="zh-CN" altLang="en-US" dirty="0"/>
           </a:p>
           <a:p>
             <a:pPr lvl="1"/>
@@ -4434,6 +4450,7 @@
               <a:rPr lang="zh-CN" altLang="en-US" dirty="0"/>
               <a:t>第二级</a:t>
             </a:r>
+            <a:endParaRPr lang="zh-CN" altLang="en-US" dirty="0"/>
           </a:p>
           <a:p>
             <a:pPr lvl="2"/>
@@ -4441,6 +4458,7 @@
               <a:rPr lang="zh-CN" altLang="en-US" dirty="0"/>
               <a:t>第三级</a:t>
             </a:r>
+            <a:endParaRPr lang="zh-CN" altLang="en-US" dirty="0"/>
           </a:p>
           <a:p>
             <a:pPr lvl="3"/>
@@ -4448,6 +4466,7 @@
               <a:rPr lang="zh-CN" altLang="en-US" dirty="0"/>
               <a:t>第四级</a:t>
             </a:r>
+            <a:endParaRPr lang="zh-CN" altLang="en-US" dirty="0"/>
           </a:p>
           <a:p>
             <a:pPr lvl="4"/>
@@ -4455,6 +4474,7 @@
               <a:rPr lang="zh-CN" altLang="en-US" dirty="0"/>
               <a:t>第五级</a:t>
             </a:r>
+            <a:endParaRPr lang="zh-CN" altLang="en-US" dirty="0"/>
           </a:p>
         </p:txBody>
       </p:sp>
@@ -4484,7 +4504,6 @@
           <a:p>
             <a:fld id="{760FBDFE-C587-4B4C-A407-44438C67B59E}" type="datetimeFigureOut">
               <a:rPr lang="zh-CN" altLang="en-US" smtClean="0"/>
-              <a:t>2026/9/13</a:t>
             </a:fld>
             <a:endParaRPr lang="zh-CN" altLang="en-US"/>
           </a:p>
@@ -4540,7 +4559,6 @@
           <a:p>
             <a:fld id="{49AE70B2-8BF9-45C0-BB95-33D1B9D3A854}" type="slidenum">
               <a:rPr lang="zh-CN" altLang="en-US" smtClean="0"/>
-              <a:t>‹#›</a:t>
             </a:fld>
             <a:endParaRPr lang="en-US" altLang="zh-CN"/>
           </a:p>
@@ -4580,7 +4598,6 @@
             <a:pPr algn="ctr">
               <a:defRPr/>
             </a:pPr>
-            <a:endParaRPr/>
           </a:p>
         </p:txBody>
       </p:sp>
@@ -4687,7 +4704,6 @@
             <a:pPr algn="ctr">
               <a:defRPr/>
             </a:pPr>
-            <a:endParaRPr/>
           </a:p>
         </p:txBody>
       </p:sp>
@@ -4736,7 +4752,6 @@
             <a:pPr algn="ctr">
               <a:defRPr/>
             </a:pPr>
-            <a:endParaRPr/>
           </a:p>
         </p:txBody>
       </p:sp>
@@ -4785,6 +4800,7 @@
               <a:rPr lang="zh-CN" altLang="en-US" dirty="0"/>
               <a:t>单击此处编辑母版标题样式</a:t>
             </a:r>
+            <a:endParaRPr lang="zh-CN" altLang="en-US" dirty="0"/>
           </a:p>
         </p:txBody>
       </p:sp>
@@ -4881,6 +4897,7 @@
               <a:rPr lang="zh-CN" altLang="en-US" dirty="0"/>
               <a:t>单击此处编辑母版文本样式</a:t>
             </a:r>
+            <a:endParaRPr lang="zh-CN" altLang="en-US" dirty="0"/>
           </a:p>
           <a:p>
             <a:pPr lvl="1"/>
@@ -4888,6 +4905,7 @@
               <a:rPr lang="zh-CN" altLang="en-US" dirty="0"/>
               <a:t>第二级</a:t>
             </a:r>
+            <a:endParaRPr lang="zh-CN" altLang="en-US" dirty="0"/>
           </a:p>
           <a:p>
             <a:pPr lvl="2"/>
@@ -4895,6 +4913,7 @@
               <a:rPr lang="zh-CN" altLang="en-US" dirty="0"/>
               <a:t>第三级</a:t>
             </a:r>
+            <a:endParaRPr lang="zh-CN" altLang="en-US" dirty="0"/>
           </a:p>
           <a:p>
             <a:pPr lvl="3"/>
@@ -4902,6 +4921,7 @@
               <a:rPr lang="zh-CN" altLang="en-US" dirty="0"/>
               <a:t>第四级</a:t>
             </a:r>
+            <a:endParaRPr lang="zh-CN" altLang="en-US" dirty="0"/>
           </a:p>
           <a:p>
             <a:pPr lvl="4"/>
@@ -4909,6 +4929,7 @@
               <a:rPr lang="zh-CN" altLang="en-US" dirty="0"/>
               <a:t>第五级</a:t>
             </a:r>
+            <a:endParaRPr lang="zh-CN" altLang="en-US" dirty="0"/>
           </a:p>
         </p:txBody>
       </p:sp>
@@ -4938,7 +4959,6 @@
           <a:p>
             <a:fld id="{760FBDFE-C587-4B4C-A407-44438C67B59E}" type="datetimeFigureOut">
               <a:rPr lang="zh-CN" altLang="en-US" smtClean="0"/>
-              <a:t>2026/9/13</a:t>
             </a:fld>
             <a:endParaRPr lang="zh-CN" altLang="en-US"/>
           </a:p>
@@ -4994,7 +5014,6 @@
           <a:p>
             <a:fld id="{49AE70B2-8BF9-45C0-BB95-33D1B9D3A854}" type="slidenum">
               <a:rPr lang="zh-CN" altLang="en-US" smtClean="0"/>
-              <a:t>‹#›</a:t>
             </a:fld>
             <a:endParaRPr lang="en-US" altLang="zh-CN"/>
           </a:p>
@@ -5034,7 +5053,6 @@
             <a:pPr algn="ctr">
               <a:defRPr/>
             </a:pPr>
-            <a:endParaRPr/>
           </a:p>
         </p:txBody>
       </p:sp>
@@ -5113,7 +5131,6 @@
             <a:pPr algn="ctr">
               <a:defRPr/>
             </a:pPr>
-            <a:endParaRPr/>
           </a:p>
         </p:txBody>
       </p:sp>
@@ -5147,6 +5164,7 @@
               <a:rPr lang="zh-CN" altLang="en-US"/>
               <a:t>插入定义文本</a:t>
             </a:r>
+            <a:endParaRPr lang="zh-CN" altLang="en-US"/>
           </a:p>
         </p:txBody>
       </p:sp>
@@ -5238,7 +5256,6 @@
             <a:pPr algn="ctr">
               <a:defRPr/>
             </a:pPr>
-            <a:endParaRPr/>
           </a:p>
         </p:txBody>
       </p:sp>
@@ -5304,7 +5321,6 @@
             <a:pPr algn="ctr">
               <a:defRPr/>
             </a:pPr>
-            <a:endParaRPr/>
           </a:p>
         </p:txBody>
       </p:sp>
@@ -5353,6 +5369,7 @@
               <a:rPr lang="zh-CN" altLang="en-US" dirty="0"/>
               <a:t>【思考与讨论】</a:t>
             </a:r>
+            <a:endParaRPr lang="zh-CN" altLang="en-US" dirty="0"/>
           </a:p>
         </p:txBody>
       </p:sp>
@@ -5454,6 +5471,7 @@
               <a:rPr lang="zh-CN" altLang="en-US" dirty="0"/>
               <a:t>【提出一个开放性问题,引导学生思考】</a:t>
             </a:r>
+            <a:endParaRPr lang="zh-CN" altLang="en-US" dirty="0"/>
           </a:p>
         </p:txBody>
       </p:sp>
@@ -5483,7 +5501,6 @@
           <a:p>
             <a:fld id="{760FBDFE-C587-4B4C-A407-44438C67B59E}" type="datetimeFigureOut">
               <a:rPr lang="zh-CN" altLang="en-US" smtClean="0"/>
-              <a:t>2026/9/13</a:t>
             </a:fld>
             <a:endParaRPr lang="zh-CN" altLang="en-US"/>
           </a:p>
@@ -5539,7 +5556,6 @@
           <a:p>
             <a:fld id="{49AE70B2-8BF9-45C0-BB95-33D1B9D3A854}" type="slidenum">
               <a:rPr lang="zh-CN" altLang="en-US" smtClean="0"/>
-              <a:t>‹#›</a:t>
             </a:fld>
             <a:endParaRPr lang="en-US" altLang="zh-CN"/>
           </a:p>
@@ -5655,7 +5671,6 @@
             <a:pPr algn="ctr">
               <a:defRPr/>
             </a:pPr>
-            <a:endParaRPr/>
           </a:p>
         </p:txBody>
       </p:sp>
@@ -5813,6 +5828,7 @@
               <a:rPr lang="zh-CN" altLang="en-US" dirty="0"/>
               <a:t>【提示:可以分组讨论 / 举手回答 / 课后思考】</a:t>
             </a:r>
+            <a:endParaRPr lang="zh-CN" altLang="en-US" dirty="0"/>
           </a:p>
         </p:txBody>
       </p:sp>
@@ -5880,6 +5896,7 @@
               <a:rPr lang="zh-CN" altLang="en-US" dirty="0"/>
               <a:t>单击此处编辑母版标题样式</a:t>
             </a:r>
+            <a:endParaRPr lang="zh-CN" altLang="en-US" dirty="0"/>
           </a:p>
         </p:txBody>
       </p:sp>
@@ -5999,6 +6016,7 @@
               <a:rPr lang="zh-CN" altLang="en-US" dirty="0"/>
               <a:t>单击此处编辑母版文本样式</a:t>
             </a:r>
+            <a:endParaRPr lang="zh-CN" altLang="en-US" dirty="0"/>
           </a:p>
         </p:txBody>
       </p:sp>
@@ -6019,7 +6037,6 @@
           <a:p>
             <a:fld id="{760FBDFE-C587-4B4C-A407-44438C67B59E}" type="datetimeFigureOut">
               <a:rPr lang="zh-CN" altLang="en-US" smtClean="0"/>
-              <a:t>2026/9/13</a:t>
             </a:fld>
             <a:endParaRPr lang="zh-CN" altLang="en-US"/>
           </a:p>
@@ -6061,7 +6078,6 @@
           <a:p>
             <a:fld id="{49AE70B2-8BF9-45C0-BB95-33D1B9D3A854}" type="slidenum">
               <a:rPr lang="zh-CN" altLang="en-US" smtClean="0"/>
-              <a:t>‹#›</a:t>
             </a:fld>
             <a:endParaRPr lang="zh-CN" altLang="en-US"/>
           </a:p>
@@ -6131,6 +6147,7 @@
               <a:rPr lang="zh-CN" altLang="en-US" dirty="0"/>
               <a:t>单击此处编辑母版标题样式</a:t>
             </a:r>
+            <a:endParaRPr lang="zh-CN" altLang="en-US" dirty="0"/>
           </a:p>
         </p:txBody>
       </p:sp>
@@ -6227,6 +6244,7 @@
               <a:rPr lang="zh-CN" altLang="en-US" dirty="0"/>
               <a:t>单击此处编辑母版文本样式</a:t>
             </a:r>
+            <a:endParaRPr lang="zh-CN" altLang="en-US" dirty="0"/>
           </a:p>
           <a:p>
             <a:pPr lvl="1"/>
@@ -6234,6 +6252,7 @@
               <a:rPr lang="zh-CN" altLang="en-US" dirty="0"/>
               <a:t>第二级</a:t>
             </a:r>
+            <a:endParaRPr lang="zh-CN" altLang="en-US" dirty="0"/>
           </a:p>
           <a:p>
             <a:pPr lvl="2"/>
@@ -6241,6 +6260,7 @@
               <a:rPr lang="zh-CN" altLang="en-US" dirty="0"/>
               <a:t>第三级</a:t>
             </a:r>
+            <a:endParaRPr lang="zh-CN" altLang="en-US" dirty="0"/>
           </a:p>
           <a:p>
             <a:pPr lvl="3"/>
@@ -6248,6 +6268,7 @@
               <a:rPr lang="zh-CN" altLang="en-US" dirty="0"/>
               <a:t>第四级</a:t>
             </a:r>
+            <a:endParaRPr lang="zh-CN" altLang="en-US" dirty="0"/>
           </a:p>
           <a:p>
             <a:pPr lvl="4"/>
@@ -6255,6 +6276,7 @@
               <a:rPr lang="zh-CN" altLang="en-US" dirty="0"/>
               <a:t>第五级</a:t>
             </a:r>
+            <a:endParaRPr lang="zh-CN" altLang="en-US" dirty="0"/>
           </a:p>
         </p:txBody>
       </p:sp>
@@ -6351,6 +6373,7 @@
               <a:rPr lang="zh-CN" altLang="en-US" dirty="0"/>
               <a:t>单击此处编辑母版文本样式</a:t>
             </a:r>
+            <a:endParaRPr lang="zh-CN" altLang="en-US" dirty="0"/>
           </a:p>
           <a:p>
             <a:pPr lvl="1"/>
@@ -6358,6 +6381,7 @@
               <a:rPr lang="zh-CN" altLang="en-US" dirty="0"/>
               <a:t>第二级</a:t>
             </a:r>
+            <a:endParaRPr lang="zh-CN" altLang="en-US" dirty="0"/>
           </a:p>
           <a:p>
             <a:pPr lvl="2"/>
@@ -6365,6 +6389,7 @@
               <a:rPr lang="zh-CN" altLang="en-US" dirty="0"/>
               <a:t>第三级</a:t>
             </a:r>
+            <a:endParaRPr lang="zh-CN" altLang="en-US" dirty="0"/>
           </a:p>
           <a:p>
             <a:pPr lvl="3"/>
@@ -6372,6 +6397,7 @@
               <a:rPr lang="zh-CN" altLang="en-US" dirty="0"/>
               <a:t>第四级</a:t>
             </a:r>
+            <a:endParaRPr lang="zh-CN" altLang="en-US" dirty="0"/>
           </a:p>
           <a:p>
             <a:pPr lvl="4"/>
@@ -6379,6 +6405,7 @@
               <a:rPr lang="zh-CN" altLang="en-US" dirty="0"/>
               <a:t>第五级</a:t>
             </a:r>
+            <a:endParaRPr lang="zh-CN" altLang="en-US" dirty="0"/>
           </a:p>
         </p:txBody>
       </p:sp>
@@ -6399,7 +6426,6 @@
           <a:p>
             <a:fld id="{760FBDFE-C587-4B4C-A407-44438C67B59E}" type="datetimeFigureOut">
               <a:rPr lang="zh-CN" altLang="en-US" smtClean="0"/>
-              <a:t>2026/9/13</a:t>
             </a:fld>
             <a:endParaRPr lang="zh-CN" altLang="en-US"/>
           </a:p>
@@ -6441,7 +6467,6 @@
           <a:p>
             <a:fld id="{49AE70B2-8BF9-45C0-BB95-33D1B9D3A854}" type="slidenum">
               <a:rPr lang="zh-CN" altLang="en-US" smtClean="0"/>
-              <a:t>‹#›</a:t>
             </a:fld>
             <a:endParaRPr lang="zh-CN" altLang="en-US"/>
           </a:p>
@@ -6525,6 +6550,7 @@
               <a:rPr lang="zh-CN" altLang="en-US"/>
               <a:t>单击此处编辑母版标题样式</a:t>
             </a:r>
+            <a:endParaRPr lang="zh-CN" altLang="en-US"/>
           </a:p>
         </p:txBody>
       </p:sp>
@@ -6598,6 +6624,7 @@
               <a:rPr lang="zh-CN" altLang="en-US" dirty="0"/>
               <a:t>单击此处编辑母版文本样式</a:t>
             </a:r>
+            <a:endParaRPr lang="zh-CN" altLang="en-US" dirty="0"/>
           </a:p>
         </p:txBody>
       </p:sp>
@@ -6672,6 +6699,7 @@
               <a:rPr lang="zh-CN" altLang="en-US" dirty="0"/>
               <a:t>单击此处编辑母版文本样式</a:t>
             </a:r>
+            <a:endParaRPr lang="zh-CN" altLang="en-US" dirty="0"/>
           </a:p>
           <a:p>
             <a:pPr lvl="1"/>
@@ -6679,6 +6707,7 @@
               <a:rPr lang="zh-CN" altLang="en-US" dirty="0"/>
               <a:t>第二级</a:t>
             </a:r>
+            <a:endParaRPr lang="zh-CN" altLang="en-US" dirty="0"/>
           </a:p>
           <a:p>
             <a:pPr lvl="2"/>
@@ -6686,6 +6715,7 @@
               <a:rPr lang="zh-CN" altLang="en-US" dirty="0"/>
               <a:t>第三级</a:t>
             </a:r>
+            <a:endParaRPr lang="zh-CN" altLang="en-US" dirty="0"/>
           </a:p>
           <a:p>
             <a:pPr lvl="3"/>
@@ -6693,6 +6723,7 @@
               <a:rPr lang="zh-CN" altLang="en-US" dirty="0"/>
               <a:t>第四级</a:t>
             </a:r>
+            <a:endParaRPr lang="zh-CN" altLang="en-US" dirty="0"/>
           </a:p>
           <a:p>
             <a:pPr lvl="4"/>
@@ -6700,6 +6731,7 @@
               <a:rPr lang="zh-CN" altLang="en-US" dirty="0"/>
               <a:t>第五级</a:t>
             </a:r>
+            <a:endParaRPr lang="zh-CN" altLang="en-US" dirty="0"/>
           </a:p>
         </p:txBody>
       </p:sp>
@@ -6773,6 +6805,7 @@
               <a:rPr lang="zh-CN" altLang="en-US" dirty="0"/>
               <a:t>单击此处编辑母版文本样式</a:t>
             </a:r>
+            <a:endParaRPr lang="zh-CN" altLang="en-US" dirty="0"/>
           </a:p>
         </p:txBody>
       </p:sp>
@@ -6847,6 +6880,7 @@
               <a:rPr lang="zh-CN" altLang="en-US" dirty="0"/>
               <a:t>单击此处编辑母版文本样式</a:t>
             </a:r>
+            <a:endParaRPr lang="zh-CN" altLang="en-US" dirty="0"/>
           </a:p>
           <a:p>
             <a:pPr lvl="1"/>
@@ -6854,6 +6888,7 @@
               <a:rPr lang="zh-CN" altLang="en-US" dirty="0"/>
               <a:t>第二级</a:t>
             </a:r>
+            <a:endParaRPr lang="zh-CN" altLang="en-US" dirty="0"/>
           </a:p>
           <a:p>
             <a:pPr lvl="2"/>
@@ -6861,6 +6896,7 @@
               <a:rPr lang="zh-CN" altLang="en-US" dirty="0"/>
               <a:t>第三级</a:t>
             </a:r>
+            <a:endParaRPr lang="zh-CN" altLang="en-US" dirty="0"/>
           </a:p>
           <a:p>
             <a:pPr lvl="3"/>
@@ -6868,6 +6904,7 @@
               <a:rPr lang="zh-CN" altLang="en-US" dirty="0"/>
               <a:t>第四级</a:t>
             </a:r>
+            <a:endParaRPr lang="zh-CN" altLang="en-US" dirty="0"/>
           </a:p>
           <a:p>
             <a:pPr lvl="4"/>
@@ -6875,6 +6912,7 @@
               <a:rPr lang="zh-CN" altLang="en-US" dirty="0"/>
               <a:t>第五级</a:t>
             </a:r>
+            <a:endParaRPr lang="zh-CN" altLang="en-US" dirty="0"/>
           </a:p>
         </p:txBody>
       </p:sp>
@@ -6923,7 +6961,6 @@
             <a:pPr algn="ctr">
               <a:defRPr/>
             </a:pPr>
-            <a:endParaRPr/>
           </a:p>
         </p:txBody>
       </p:sp>
@@ -6972,7 +7009,6 @@
             <a:pPr algn="ctr">
               <a:defRPr/>
             </a:pPr>
-            <a:endParaRPr/>
           </a:p>
         </p:txBody>
       </p:sp>
@@ -7012,7 +7048,6 @@
             <a:pPr algn="ctr">
               <a:defRPr/>
             </a:pPr>
-            <a:endParaRPr/>
           </a:p>
         </p:txBody>
       </p:sp>
@@ -7052,7 +7087,6 @@
             <a:pPr algn="ctr">
               <a:defRPr/>
             </a:pPr>
-            <a:endParaRPr/>
           </a:p>
         </p:txBody>
       </p:sp>
@@ -7094,7 +7128,6 @@
             <a:pPr algn="ctr">
               <a:defRPr/>
             </a:pPr>
-            <a:endParaRPr/>
           </a:p>
         </p:txBody>
       </p:sp>
@@ -7136,7 +7169,6 @@
             <a:pPr algn="ctr">
               <a:defRPr/>
             </a:pPr>
-            <a:endParaRPr/>
           </a:p>
         </p:txBody>
       </p:sp>
@@ -7221,7 +7253,6 @@
             <a:pPr algn="ctr">
               <a:defRPr/>
             </a:pPr>
-            <a:endParaRPr/>
           </a:p>
         </p:txBody>
       </p:sp>
@@ -7251,7 +7282,6 @@
           <a:p>
             <a:fld id="{49AE70B2-8BF9-45C0-BB95-33D1B9D3A854}" type="slidenum">
               <a:rPr lang="zh-CN" altLang="en-US" smtClean="0"/>
-              <a:t>‹#›</a:t>
             </a:fld>
             <a:endParaRPr lang="en-US" altLang="zh-CN"/>
           </a:p>
@@ -7335,6 +7365,7 @@
               <a:rPr lang="zh-CN" altLang="en-US"/>
               <a:t>单击此处编辑母版标题样式</a:t>
             </a:r>
+            <a:endParaRPr lang="zh-CN" altLang="en-US"/>
           </a:p>
         </p:txBody>
       </p:sp>
@@ -7383,7 +7414,6 @@
             <a:pPr algn="ctr">
               <a:defRPr/>
             </a:pPr>
-            <a:endParaRPr/>
           </a:p>
         </p:txBody>
       </p:sp>
@@ -7432,7 +7462,6 @@
             <a:pPr algn="ctr">
               <a:defRPr/>
             </a:pPr>
-            <a:endParaRPr/>
           </a:p>
         </p:txBody>
       </p:sp>
@@ -7485,7 +7514,6 @@
             <a:pPr algn="ctr">
               <a:defRPr/>
             </a:pPr>
-            <a:endParaRPr/>
           </a:p>
         </p:txBody>
       </p:sp>
@@ -7515,7 +7543,6 @@
           <a:p>
             <a:fld id="{49AE70B2-8BF9-45C0-BB95-33D1B9D3A854}" type="slidenum">
               <a:rPr lang="zh-CN" altLang="en-US" smtClean="0"/>
-              <a:t>‹#›</a:t>
             </a:fld>
             <a:endParaRPr lang="en-US" altLang="zh-CN"/>
           </a:p>
@@ -7649,6 +7676,7 @@
               <a:rPr lang="zh-CN" altLang="en-US" dirty="0"/>
               <a:t>单击此处编辑母版标题样式</a:t>
             </a:r>
+            <a:endParaRPr lang="zh-CN" altLang="en-US" dirty="0"/>
           </a:p>
         </p:txBody>
       </p:sp>
@@ -7669,7 +7697,6 @@
           <a:p>
             <a:fld id="{760FBDFE-C587-4B4C-A407-44438C67B59E}" type="datetimeFigureOut">
               <a:rPr lang="zh-CN" altLang="en-US" smtClean="0"/>
-              <a:t>2026/9/13</a:t>
             </a:fld>
             <a:endParaRPr lang="zh-CN" altLang="en-US"/>
           </a:p>
@@ -7711,7 +7738,6 @@
           <a:p>
             <a:fld id="{49AE70B2-8BF9-45C0-BB95-33D1B9D3A854}" type="slidenum">
               <a:rPr lang="zh-CN" altLang="en-US" smtClean="0"/>
-              <a:t>‹#›</a:t>
             </a:fld>
             <a:endParaRPr lang="zh-CN" altLang="en-US"/>
           </a:p>
@@ -7789,7 +7815,6 @@
             <a:pPr algn="ctr">
               <a:defRPr/>
             </a:pPr>
-            <a:endParaRPr/>
           </a:p>
         </p:txBody>
       </p:sp>
@@ -7855,7 +7880,6 @@
             <a:pPr algn="ctr">
               <a:defRPr/>
             </a:pPr>
-            <a:endParaRPr/>
           </a:p>
         </p:txBody>
       </p:sp>
@@ -7917,7 +7941,6 @@
             <a:pPr algn="ctr">
               <a:defRPr/>
             </a:pPr>
-            <a:endParaRPr/>
           </a:p>
         </p:txBody>
       </p:sp>
@@ -7960,6 +7983,7 @@
               <a:rPr lang="zh-CN" altLang="en-US"/>
               <a:t>编号</a:t>
             </a:r>
+            <a:endParaRPr lang="zh-CN" altLang="en-US"/>
           </a:p>
         </p:txBody>
       </p:sp>
@@ -8082,6 +8106,7 @@
               <a:rPr lang="zh-CN" altLang="en-US" dirty="0"/>
               <a:t>单击此处编辑母版标题样式</a:t>
             </a:r>
+            <a:endParaRPr lang="zh-CN" altLang="en-US" dirty="0"/>
           </a:p>
         </p:txBody>
       </p:sp>
@@ -8115,6 +8140,7 @@
               <a:rPr lang="zh-CN" altLang="en-US" dirty="0"/>
               <a:t>单击此处编辑母版文本样式</a:t>
             </a:r>
+            <a:endParaRPr lang="zh-CN" altLang="en-US" dirty="0"/>
           </a:p>
           <a:p>
             <a:pPr lvl="1"/>
@@ -8122,6 +8148,7 @@
               <a:rPr lang="zh-CN" altLang="en-US" dirty="0"/>
               <a:t>第二级</a:t>
             </a:r>
+            <a:endParaRPr lang="zh-CN" altLang="en-US" dirty="0"/>
           </a:p>
           <a:p>
             <a:pPr lvl="2"/>
@@ -8129,6 +8156,7 @@
               <a:rPr lang="zh-CN" altLang="en-US" dirty="0"/>
               <a:t>第三级</a:t>
             </a:r>
+            <a:endParaRPr lang="zh-CN" altLang="en-US" dirty="0"/>
           </a:p>
           <a:p>
             <a:pPr lvl="3"/>
@@ -8136,6 +8164,7 @@
               <a:rPr lang="zh-CN" altLang="en-US" dirty="0"/>
               <a:t>第四级</a:t>
             </a:r>
+            <a:endParaRPr lang="zh-CN" altLang="en-US" dirty="0"/>
           </a:p>
           <a:p>
             <a:pPr lvl="4"/>
@@ -8143,6 +8172,7 @@
               <a:rPr lang="zh-CN" altLang="en-US" dirty="0"/>
               <a:t>第五级</a:t>
             </a:r>
+            <a:endParaRPr lang="zh-CN" altLang="en-US" dirty="0"/>
           </a:p>
         </p:txBody>
       </p:sp>
@@ -8183,7 +8213,6 @@
           <a:p>
             <a:fld id="{760FBDFE-C587-4B4C-A407-44438C67B59E}" type="datetimeFigureOut">
               <a:rPr lang="zh-CN" altLang="en-US" smtClean="0"/>
-              <a:t>2026/9/13</a:t>
             </a:fld>
             <a:endParaRPr lang="zh-CN" altLang="en-US"/>
           </a:p>
@@ -8265,7 +8294,6 @@
           <a:p>
             <a:fld id="{49AE70B2-8BF9-45C0-BB95-33D1B9D3A854}" type="slidenum">
               <a:rPr lang="zh-CN" altLang="en-US" smtClean="0"/>
-              <a:t>‹#›</a:t>
             </a:fld>
             <a:endParaRPr lang="zh-CN" altLang="en-US"/>
           </a:p>
@@ -8280,7 +8308,7 @@
           <p:nvPr userDrawn="1"/>
         </p:nvPicPr>
         <p:blipFill>
-          <a:blip r:embed="rId16"/>
+          <a:blip r:embed="rId15"/>
           <a:stretch>
             <a:fillRect/>
           </a:stretch>
@@ -8343,7 +8371,7 @@
         <a:spcBef>
           <a:spcPts val="1000"/>
         </a:spcBef>
-        <a:buFont typeface="Arial" panose="020B0604020202020204" pitchFamily="34" charset="0"/>
+        <a:buFont typeface="Arial" panose="02080604020202020204" pitchFamily="34" charset="0"/>
         <a:buChar char="•"/>
         <a:defRPr sz="2400" kern="1200">
           <a:solidFill>
@@ -8361,7 +8389,7 @@
         <a:spcBef>
           <a:spcPts val="500"/>
         </a:spcBef>
-        <a:buFont typeface="Arial" panose="020B0604020202020204" pitchFamily="34" charset="0"/>
+        <a:buFont typeface="Arial" panose="02080604020202020204" pitchFamily="34" charset="0"/>
         <a:buChar char="•"/>
         <a:defRPr sz="2000" kern="1200">
           <a:solidFill>
@@ -8379,7 +8407,7 @@
         <a:spcBef>
           <a:spcPts val="500"/>
         </a:spcBef>
-        <a:buFont typeface="Arial" panose="020B0604020202020204" pitchFamily="34" charset="0"/>
+        <a:buFont typeface="Arial" panose="02080604020202020204" pitchFamily="34" charset="0"/>
         <a:buChar char="•"/>
         <a:defRPr sz="1800" kern="1200">
           <a:solidFill>
@@ -8397,7 +8425,7 @@
         <a:spcBef>
           <a:spcPts val="500"/>
         </a:spcBef>
-        <a:buFont typeface="Arial" panose="020B0604020202020204" pitchFamily="34" charset="0"/>
+        <a:buFont typeface="Arial" panose="02080604020202020204" pitchFamily="34" charset="0"/>
         <a:buChar char="•"/>
         <a:defRPr sz="1800" kern="1200">
           <a:solidFill>
@@ -8415,7 +8443,7 @@
         <a:spcBef>
           <a:spcPts val="500"/>
         </a:spcBef>
-        <a:buFont typeface="Arial" panose="020B0604020202020204" pitchFamily="34" charset="0"/>
+        <a:buFont typeface="Arial" panose="02080604020202020204" pitchFamily="34" charset="0"/>
         <a:buChar char="•"/>
         <a:defRPr sz="1800" kern="1200">
           <a:solidFill>
@@ -8433,7 +8461,7 @@
         <a:spcBef>
           <a:spcPts val="500"/>
         </a:spcBef>
-        <a:buFont typeface="Arial" panose="020B0604020202020204" pitchFamily="34" charset="0"/>
+        <a:buFont typeface="Arial" panose="02080604020202020204" pitchFamily="34" charset="0"/>
         <a:buChar char="•"/>
         <a:defRPr sz="1800" kern="1200">
           <a:solidFill>
@@ -8451,7 +8479,7 @@
         <a:spcBef>
           <a:spcPts val="500"/>
         </a:spcBef>
-        <a:buFont typeface="Arial" panose="020B0604020202020204" pitchFamily="34" charset="0"/>
+        <a:buFont typeface="Arial" panose="02080604020202020204" pitchFamily="34" charset="0"/>
         <a:buChar char="•"/>
         <a:defRPr sz="1800" kern="1200">
           <a:solidFill>
@@ -8469,7 +8497,7 @@
         <a:spcBef>
           <a:spcPts val="500"/>
         </a:spcBef>
-        <a:buFont typeface="Arial" panose="020B0604020202020204" pitchFamily="34" charset="0"/>
+        <a:buFont typeface="Arial" panose="02080604020202020204" pitchFamily="34" charset="0"/>
         <a:buChar char="•"/>
         <a:defRPr sz="1800" kern="1200">
           <a:solidFill>
@@ -8487,7 +8515,7 @@
         <a:spcBef>
           <a:spcPts val="500"/>
         </a:spcBef>
-        <a:buFont typeface="Arial" panose="020B0604020202020204" pitchFamily="34" charset="0"/>
+        <a:buFont typeface="Arial" panose="02080604020202020204" pitchFamily="34" charset="0"/>
         <a:buChar char="•"/>
         <a:defRPr sz="1800" kern="1200">
           <a:solidFill>
@@ -8651,6 +8679,7 @@
               <a:rPr lang="zh-CN" altLang="en-US" sz="6000"/>
               <a:t>有时聪明有时“蠢”</a:t>
             </a:r>
+            <a:endParaRPr lang="zh-CN" altLang="en-US" sz="6000"/>
           </a:p>
         </p:txBody>
       </p:sp>
@@ -8673,6 +8702,7 @@
               <a:rPr lang="zh-CN" altLang="en-US"/>
               <a:t>港科大人工智能前沿系列课程——大模型基础通识</a:t>
             </a:r>
+            <a:endParaRPr lang="zh-CN" altLang="en-US"/>
           </a:p>
           <a:p>
             <a:endParaRPr lang="zh-CN" altLang="en-US"/>
@@ -8698,6 +8728,7 @@
               <a:rPr lang="zh-CN" altLang="en-US"/>
               <a:t>授课人：王若愚</a:t>
             </a:r>
+            <a:endParaRPr lang="zh-CN" altLang="en-US"/>
           </a:p>
         </p:txBody>
       </p:sp>
@@ -8720,6 +8751,7 @@
               <a:rPr lang="en-US" altLang="zh-CN" dirty="0"/>
               <a:t>2026/09/01</a:t>
             </a:r>
+            <a:endParaRPr lang="en-US" altLang="zh-CN" dirty="0"/>
           </a:p>
         </p:txBody>
       </p:sp>
@@ -8769,6 +8801,7 @@
               <a:rPr lang="zh-CN" altLang="en-US"/>
               <a:t>Transformer 的基石：GPU 与算力</a:t>
             </a:r>
+            <a:endParaRPr lang="zh-CN" altLang="en-US"/>
           </a:p>
         </p:txBody>
       </p:sp>
@@ -8864,6 +8897,7 @@
               <a:rPr lang="zh-CN" altLang="en-US"/>
               <a:t>参数</a:t>
             </a:r>
+            <a:endParaRPr lang="zh-CN" altLang="en-US"/>
           </a:p>
           <a:p>
             <a:r>
@@ -8874,6 +8908,7 @@
               <a:rPr lang="zh-CN" altLang="en-US"/>
               <a:t>的纵向优化</a:t>
             </a:r>
+            <a:endParaRPr lang="zh-CN" altLang="en-US"/>
           </a:p>
           <a:p>
             <a:pPr lvl="1"/>
@@ -8885,6 +8920,7 @@
               <a:rPr lang="zh-CN" altLang="en-US" sz="1800"/>
               <a:t>计算框架：适配神经网络计算</a:t>
             </a:r>
+            <a:endParaRPr lang="zh-CN" altLang="en-US" sz="1800"/>
           </a:p>
           <a:p>
             <a:pPr lvl="1"/>
@@ -8904,6 +8940,7 @@
               <a:rPr lang="zh-CN" altLang="en-US"/>
               <a:t>）</a:t>
             </a:r>
+            <a:endParaRPr lang="zh-CN" altLang="en-US"/>
           </a:p>
           <a:p>
             <a:r>
@@ -8914,6 +8951,7 @@
               <a:rPr lang="zh-CN" altLang="en-US"/>
               <a:t>的横向扩展</a:t>
             </a:r>
+            <a:endParaRPr lang="zh-CN" altLang="en-US"/>
           </a:p>
           <a:p>
             <a:pPr lvl="1"/>
@@ -8923,20 +8961,25 @@
             </a:r>
             <a:r>
               <a:rPr lang="zh-CN" altLang="en-US" dirty="0" err="1">
-                <a:latin typeface="微软雅黑" panose="020B0503020204020204" charset="-122"/>
-                <a:ea typeface="微软雅黑" panose="020B0503020204020204" charset="-122"/>
+                <a:latin typeface="Microsoft YaHei" panose="020B0503020204020204" charset="-122"/>
+                <a:ea typeface="Microsoft YaHei" panose="020B0503020204020204" charset="-122"/>
                 <a:sym typeface="+mn-ea"/>
               </a:rPr>
               <a:t>：</a:t>
             </a:r>
             <a:r>
               <a:rPr lang="en-US" altLang="zh-CN" dirty="0" err="1">
-                <a:latin typeface="微软雅黑" panose="020B0503020204020204" charset="-122"/>
-                <a:ea typeface="微软雅黑" panose="020B0503020204020204" charset="-122"/>
+                <a:latin typeface="Microsoft YaHei" panose="020B0503020204020204" charset="-122"/>
+                <a:ea typeface="Microsoft YaHei" panose="020B0503020204020204" charset="-122"/>
                 <a:sym typeface="+mn-ea"/>
               </a:rPr>
               <a:t>K80 × 176 + CPU × 1202</a:t>
             </a:r>
+            <a:endParaRPr lang="en-US" altLang="zh-CN" dirty="0" err="1">
+              <a:latin typeface="Microsoft YaHei" panose="020B0503020204020204" charset="-122"/>
+              <a:ea typeface="Microsoft YaHei" panose="020B0503020204020204" charset="-122"/>
+              <a:sym typeface="+mn-ea"/>
+            </a:endParaRPr>
           </a:p>
           <a:p>
             <a:pPr lvl="1"/>
@@ -8964,6 +9007,7 @@
               <a:rPr lang="zh-CN" altLang="en-US"/>
               <a:t>张昇腾计算卡</a:t>
             </a:r>
+            <a:endParaRPr lang="zh-CN" altLang="en-US"/>
           </a:p>
         </p:txBody>
       </p:sp>
@@ -8984,7 +9028,6 @@
           <a:p>
             <a:fld id="{49AE70B2-8BF9-45C0-BB95-33D1B9D3A854}" type="slidenum">
               <a:rPr lang="zh-CN" altLang="en-US" smtClean="0"/>
-              <a:t>10</a:t>
             </a:fld>
             <a:endParaRPr lang="en-US" altLang="zh-CN"/>
           </a:p>
@@ -8999,7 +9042,7 @@
           <p:nvPr/>
         </p:nvPicPr>
         <p:blipFill rotWithShape="1">
-          <a:blip r:embed="rId3" cstate="print">
+          <a:blip r:embed="rId1" cstate="print">
             <a:extLst>
               <a:ext uri="{28A0092B-C50C-407E-A947-70E740481C1C}">
                 <a14:useLocalDpi xmlns:a14="http://schemas.microsoft.com/office/drawing/2010/main" val="0"/>
@@ -9052,7 +9095,7 @@
           <p:nvPr/>
         </p:nvPicPr>
         <p:blipFill rotWithShape="1">
-          <a:blip r:embed="rId4" cstate="print"/>
+          <a:blip r:embed="rId2" cstate="print"/>
           <a:stretch>
             <a:fillRect/>
           </a:stretch>
@@ -9684,11 +9727,12 @@
               <a:rPr lang="zh-CN" altLang="en-US"/>
               <a:t>大模型的能耗</a:t>
             </a:r>
+            <a:endParaRPr lang="zh-CN" altLang="en-US"/>
           </a:p>
         </p:txBody>
       </p:sp>
-      <mc:AlternateContent xmlns:mc="http://schemas.openxmlformats.org/markup-compatibility/2006" xmlns:a14="http://schemas.microsoft.com/office/drawing/2010/main">
-        <mc:Choice Requires="a14">
+      <mc:AlternateContent xmlns:mc="http://schemas.openxmlformats.org/markup-compatibility/2006">
+        <mc:Choice xmlns:a14="http://schemas.microsoft.com/office/drawing/2010/main" Requires="a14">
           <p:sp>
             <p:nvSpPr>
               <p:cNvPr id="3" name="内容占位符 2"/>
@@ -9712,12 +9756,14 @@
                   <a:rPr lang="en-US" altLang="zh-CN"/>
                   <a:t>kWh</a:t>
                 </a:r>
+                <a:endParaRPr lang="en-US" altLang="zh-CN"/>
               </a:p>
               <a:p>
                 <a:r>
                   <a:rPr lang="zh-CN" altLang="en-US"/>
                   <a:t>训练能耗：</a:t>
                 </a:r>
+                <a:endParaRPr lang="zh-CN" altLang="en-US"/>
               </a:p>
               <a:p>
                 <a:pPr lvl="1"/>
@@ -9745,6 +9791,7 @@
                   <a:rPr lang="zh-CN" altLang="en-US"/>
                   <a:t>≈ 358 户家庭一年</a:t>
                 </a:r>
+                <a:endParaRPr lang="zh-CN" altLang="en-US"/>
               </a:p>
               <a:p>
                 <a:pPr lvl="1"/>
@@ -9772,6 +9819,7 @@
                   <a:rPr lang="zh-CN" altLang="en-US"/>
                   <a:t>≈ 6,000 户家庭一年</a:t>
                 </a:r>
+                <a:endParaRPr lang="zh-CN" altLang="en-US"/>
               </a:p>
               <a:p>
                 <a:pPr lvl="0"/>
@@ -9779,6 +9827,7 @@
                   <a:rPr lang="zh-CN" altLang="en-US"/>
                   <a:t>推理能耗：</a:t>
                 </a:r>
+                <a:endParaRPr lang="zh-CN" altLang="en-US"/>
               </a:p>
               <a:p>
                 <a:pPr lvl="1"/>
@@ -9790,6 +9839,7 @@
                   <a:rPr lang="en-US" altLang="zh-CN"/>
                   <a:t>mWh/token</a:t>
                 </a:r>
+                <a:endParaRPr lang="en-US" altLang="zh-CN"/>
               </a:p>
               <a:p>
                 <a:pPr lvl="1"/>
@@ -9813,7 +9863,23 @@
                         <a:ea typeface="MS Mincho" charset="0"/>
                         <a:cs typeface="DejaVu Math TeX Gyre" panose="02000503000000000000" charset="0"/>
                       </a:rPr>
-                      <m:t>3×1</m:t>
+                      <m:t>3</m:t>
+                    </m:r>
+                    <m:r>
+                      <a:rPr lang="en-US" altLang="zh-CN" i="1">
+                        <a:latin typeface="DejaVu Math TeX Gyre" panose="02000503000000000000" charset="0"/>
+                        <a:ea typeface="MS Mincho" charset="0"/>
+                        <a:cs typeface="DejaVu Math TeX Gyre" panose="02000503000000000000" charset="0"/>
+                      </a:rPr>
+                      <m:t>×</m:t>
+                    </m:r>
+                    <m:r>
+                      <a:rPr lang="en-US" altLang="zh-CN" i="1">
+                        <a:latin typeface="DejaVu Math TeX Gyre" panose="02000503000000000000" charset="0"/>
+                        <a:ea typeface="MS Mincho" charset="0"/>
+                        <a:cs typeface="DejaVu Math TeX Gyre" panose="02000503000000000000" charset="0"/>
+                      </a:rPr>
+                      <m:t>1</m:t>
                     </m:r>
                     <m:sSup>
                       <m:sSupPr>
@@ -9883,7 +9949,7 @@
             </p:txBody>
           </p:sp>
         </mc:Choice>
-        <mc:Fallback xmlns="">
+        <mc:Fallback>
           <p:sp>
             <p:nvSpPr>
               <p:cNvPr id="3" name="内容占位符 2"/>
@@ -9896,7 +9962,7 @@
             </p:nvSpPr>
             <p:spPr>
               <a:blipFill rotWithShape="1">
-                <a:blip r:embed="rId3"/>
+                <a:blip r:embed="rId1"/>
                 <a:stretch>
                   <a:fillRect/>
                 </a:stretch>
@@ -9934,7 +10000,6 @@
           <a:p>
             <a:fld id="{49AE70B2-8BF9-45C0-BB95-33D1B9D3A854}" type="slidenum">
               <a:rPr lang="zh-CN" altLang="en-US" smtClean="0"/>
-              <a:t>11</a:t>
             </a:fld>
             <a:endParaRPr lang="en-US" altLang="zh-CN"/>
           </a:p>
@@ -10447,6 +10512,7 @@
               <a:rPr lang="zh-CN" altLang="en-US"/>
               <a:t>能省则省：提示缓存</a:t>
             </a:r>
+            <a:endParaRPr lang="zh-CN" altLang="en-US"/>
           </a:p>
         </p:txBody>
       </p:sp>
@@ -10474,18 +10540,21 @@
               <a:rPr lang="zh-CN" altLang="en-US"/>
               <a:t>自回归模式下，注意力的计算只与前文有关</a:t>
             </a:r>
+            <a:endParaRPr lang="zh-CN" altLang="en-US"/>
           </a:p>
           <a:p>
             <a:r>
               <a:rPr lang="zh-CN" altLang="en-US"/>
               <a:t>前文计算过的注意力可以重复使用</a:t>
             </a:r>
+            <a:endParaRPr lang="zh-CN" altLang="en-US"/>
           </a:p>
           <a:p>
             <a:r>
               <a:rPr lang="zh-CN" altLang="en-US"/>
               <a:t>把稳定不变的内容放前面、经常变的内容放后面，更容易命中缓存</a:t>
             </a:r>
+            <a:endParaRPr lang="zh-CN" altLang="en-US"/>
           </a:p>
         </p:txBody>
       </p:sp>
@@ -10506,7 +10575,6 @@
           <a:p>
             <a:fld id="{49AE70B2-8BF9-45C0-BB95-33D1B9D3A854}" type="slidenum">
               <a:rPr lang="zh-CN" altLang="en-US" smtClean="0"/>
-              <a:t>12</a:t>
             </a:fld>
             <a:endParaRPr lang="en-US" altLang="zh-CN"/>
           </a:p>
@@ -10529,76 +10597,16 @@
                 <a:tableStyleId>{5C22544A-7EE6-4342-B048-85BDC9FD1C3A}</a:tableStyleId>
               </a:tblPr>
               <a:tblGrid>
-                <a:gridCol w="432000">
-                  <a:extLst>
-                    <a:ext uri="{9D8B030D-6E8A-4147-A177-3AD203B41FA5}">
-                      <a16:colId xmlns:a16="http://schemas.microsoft.com/office/drawing/2014/main" val="20000"/>
-                    </a:ext>
-                  </a:extLst>
-                </a:gridCol>
-                <a:gridCol w="432000">
-                  <a:extLst>
-                    <a:ext uri="{9D8B030D-6E8A-4147-A177-3AD203B41FA5}">
-                      <a16:colId xmlns:a16="http://schemas.microsoft.com/office/drawing/2014/main" val="20001"/>
-                    </a:ext>
-                  </a:extLst>
-                </a:gridCol>
-                <a:gridCol w="432000">
-                  <a:extLst>
-                    <a:ext uri="{9D8B030D-6E8A-4147-A177-3AD203B41FA5}">
-                      <a16:colId xmlns:a16="http://schemas.microsoft.com/office/drawing/2014/main" val="20002"/>
-                    </a:ext>
-                  </a:extLst>
-                </a:gridCol>
-                <a:gridCol w="432000">
-                  <a:extLst>
-                    <a:ext uri="{9D8B030D-6E8A-4147-A177-3AD203B41FA5}">
-                      <a16:colId xmlns:a16="http://schemas.microsoft.com/office/drawing/2014/main" val="20003"/>
-                    </a:ext>
-                  </a:extLst>
-                </a:gridCol>
-                <a:gridCol w="432000">
-                  <a:extLst>
-                    <a:ext uri="{9D8B030D-6E8A-4147-A177-3AD203B41FA5}">
-                      <a16:colId xmlns:a16="http://schemas.microsoft.com/office/drawing/2014/main" val="20004"/>
-                    </a:ext>
-                  </a:extLst>
-                </a:gridCol>
-                <a:gridCol w="432000">
-                  <a:extLst>
-                    <a:ext uri="{9D8B030D-6E8A-4147-A177-3AD203B41FA5}">
-                      <a16:colId xmlns:a16="http://schemas.microsoft.com/office/drawing/2014/main" val="20005"/>
-                    </a:ext>
-                  </a:extLst>
-                </a:gridCol>
-                <a:gridCol w="432000">
-                  <a:extLst>
-                    <a:ext uri="{9D8B030D-6E8A-4147-A177-3AD203B41FA5}">
-                      <a16:colId xmlns:a16="http://schemas.microsoft.com/office/drawing/2014/main" val="20006"/>
-                    </a:ext>
-                  </a:extLst>
-                </a:gridCol>
-                <a:gridCol w="432000">
-                  <a:extLst>
-                    <a:ext uri="{9D8B030D-6E8A-4147-A177-3AD203B41FA5}">
-                      <a16:colId xmlns:a16="http://schemas.microsoft.com/office/drawing/2014/main" val="20007"/>
-                    </a:ext>
-                  </a:extLst>
-                </a:gridCol>
-                <a:gridCol w="432000">
-                  <a:extLst>
-                    <a:ext uri="{9D8B030D-6E8A-4147-A177-3AD203B41FA5}">
-                      <a16:colId xmlns:a16="http://schemas.microsoft.com/office/drawing/2014/main" val="20008"/>
-                    </a:ext>
-                  </a:extLst>
-                </a:gridCol>
-                <a:gridCol w="432000">
-                  <a:extLst>
-                    <a:ext uri="{9D8B030D-6E8A-4147-A177-3AD203B41FA5}">
-                      <a16:colId xmlns:a16="http://schemas.microsoft.com/office/drawing/2014/main" val="20009"/>
-                    </a:ext>
-                  </a:extLst>
-                </a:gridCol>
+                <a:gridCol w="432000"/>
+                <a:gridCol w="432000"/>
+                <a:gridCol w="432000"/>
+                <a:gridCol w="432000"/>
+                <a:gridCol w="432000"/>
+                <a:gridCol w="432000"/>
+                <a:gridCol w="432000"/>
+                <a:gridCol w="432000"/>
+                <a:gridCol w="432000"/>
+                <a:gridCol w="432000"/>
               </a:tblGrid>
               <a:tr h="432000">
                 <a:tc>
@@ -10660,6 +10668,11 @@
                         </a:rPr>
                         <a:t>港科大</a:t>
                       </a:r>
+                      <a:endParaRPr lang="zh-CN" altLang="en-US" sz="800" b="0">
+                        <a:solidFill>
+                          <a:schemeClr val="bg1"/>
+                        </a:solidFill>
+                      </a:endParaRPr>
                     </a:p>
                   </a:txBody>
                   <a:tcPr anchor="ctr">
@@ -10706,6 +10719,11 @@
                         </a:rPr>
                         <a:t>在</a:t>
                       </a:r>
+                      <a:endParaRPr lang="zh-CN" altLang="en-US" sz="800" b="0">
+                        <a:solidFill>
+                          <a:schemeClr val="bg1"/>
+                        </a:solidFill>
+                      </a:endParaRPr>
                     </a:p>
                   </a:txBody>
                   <a:tcPr anchor="ctr">
@@ -10752,6 +10770,11 @@
                         </a:rPr>
                         <a:t>今年</a:t>
                       </a:r>
+                      <a:endParaRPr lang="zh-CN" altLang="en-US" sz="800" b="0">
+                        <a:solidFill>
+                          <a:schemeClr val="bg1"/>
+                        </a:solidFill>
+                      </a:endParaRPr>
                     </a:p>
                   </a:txBody>
                   <a:tcPr anchor="ctr">
@@ -10798,6 +10821,11 @@
                         </a:rPr>
                         <a:t>排名</a:t>
                       </a:r>
+                      <a:endParaRPr lang="zh-CN" altLang="en-US" sz="800" b="0">
+                        <a:solidFill>
+                          <a:schemeClr val="bg1"/>
+                        </a:solidFill>
+                      </a:endParaRPr>
                     </a:p>
                   </a:txBody>
                   <a:tcPr anchor="ctr">
@@ -10844,6 +10872,11 @@
                         </a:rPr>
                         <a:t>第</a:t>
                       </a:r>
+                      <a:endParaRPr lang="zh-CN" altLang="en-US" sz="800" b="0">
+                        <a:solidFill>
+                          <a:schemeClr val="bg1"/>
+                        </a:solidFill>
+                      </a:endParaRPr>
                     </a:p>
                   </a:txBody>
                   <a:tcPr anchor="ctr">
@@ -10890,6 +10923,11 @@
                         </a:rPr>
                         <a:t>44</a:t>
                       </a:r>
+                      <a:endParaRPr lang="en-US" altLang="zh-CN" sz="800" b="0">
+                        <a:solidFill>
+                          <a:schemeClr val="bg1"/>
+                        </a:solidFill>
+                      </a:endParaRPr>
                     </a:p>
                   </a:txBody>
                   <a:tcPr anchor="ctr">
@@ -10936,6 +10974,11 @@
                         </a:rPr>
                         <a:t>位</a:t>
                       </a:r>
+                      <a:endParaRPr lang="zh-CN" altLang="en-US" sz="800" b="0">
+                        <a:solidFill>
+                          <a:schemeClr val="bg1"/>
+                        </a:solidFill>
+                      </a:endParaRPr>
                     </a:p>
                   </a:txBody>
                   <a:tcPr anchor="ctr">
@@ -10982,6 +11025,11 @@
                         </a:rPr>
                         <a:t>。</a:t>
                       </a:r>
+                      <a:endParaRPr lang="zh-CN" altLang="en-US" sz="800" b="0">
+                        <a:solidFill>
+                          <a:schemeClr val="bg1"/>
+                        </a:solidFill>
+                      </a:endParaRPr>
                     </a:p>
                   </a:txBody>
                   <a:tcPr anchor="ctr">
@@ -11028,6 +11076,11 @@
                         </a:rPr>
                         <a:t>&lt;|end&gt;</a:t>
                       </a:r>
+                      <a:endParaRPr lang="en-US" altLang="zh-CN" sz="800" b="0">
+                        <a:solidFill>
+                          <a:schemeClr val="bg1"/>
+                        </a:solidFill>
+                      </a:endParaRPr>
                     </a:p>
                   </a:txBody>
                   <a:tcPr anchor="ctr">
@@ -11058,11 +11111,6 @@
                     <a:noFill/>
                   </a:tcPr>
                 </a:tc>
-                <a:extLst>
-                  <a:ext uri="{0D108BD9-81ED-4DB2-BD59-A6C34878D82A}">
-                    <a16:rowId xmlns:a16="http://schemas.microsoft.com/office/drawing/2014/main" val="10000"/>
-                  </a:ext>
-                </a:extLst>
               </a:tr>
               <a:tr h="432000">
                 <a:tc>
@@ -11081,6 +11129,11 @@
                         </a:rPr>
                         <a:t>港科大</a:t>
                       </a:r>
+                      <a:endParaRPr lang="zh-CN" altLang="en-US" sz="800">
+                        <a:solidFill>
+                          <a:schemeClr val="bg1"/>
+                        </a:solidFill>
+                      </a:endParaRPr>
                     </a:p>
                   </a:txBody>
                   <a:tcPr anchor="ctr">
@@ -11502,11 +11555,6 @@
                     <a:noFill/>
                   </a:tcPr>
                 </a:tc>
-                <a:extLst>
-                  <a:ext uri="{0D108BD9-81ED-4DB2-BD59-A6C34878D82A}">
-                    <a16:rowId xmlns:a16="http://schemas.microsoft.com/office/drawing/2014/main" val="10001"/>
-                  </a:ext>
-                </a:extLst>
               </a:tr>
               <a:tr h="432000">
                 <a:tc>
@@ -11525,6 +11573,11 @@
                         </a:rPr>
                         <a:t>在</a:t>
                       </a:r>
+                      <a:endParaRPr lang="zh-CN" altLang="en-US" sz="800">
+                        <a:solidFill>
+                          <a:schemeClr val="bg1"/>
+                        </a:solidFill>
+                      </a:endParaRPr>
                     </a:p>
                   </a:txBody>
                   <a:tcPr anchor="ctr">
@@ -11950,11 +12003,6 @@
                     <a:noFill/>
                   </a:tcPr>
                 </a:tc>
-                <a:extLst>
-                  <a:ext uri="{0D108BD9-81ED-4DB2-BD59-A6C34878D82A}">
-                    <a16:rowId xmlns:a16="http://schemas.microsoft.com/office/drawing/2014/main" val="10002"/>
-                  </a:ext>
-                </a:extLst>
               </a:tr>
               <a:tr h="432000">
                 <a:tc>
@@ -11973,6 +12021,11 @@
                         </a:rPr>
                         <a:t>今年</a:t>
                       </a:r>
+                      <a:endParaRPr lang="zh-CN" altLang="en-US" sz="800">
+                        <a:solidFill>
+                          <a:schemeClr val="bg1"/>
+                        </a:solidFill>
+                      </a:endParaRPr>
                     </a:p>
                   </a:txBody>
                   <a:tcPr anchor="ctr">
@@ -12402,11 +12455,6 @@
                     <a:noFill/>
                   </a:tcPr>
                 </a:tc>
-                <a:extLst>
-                  <a:ext uri="{0D108BD9-81ED-4DB2-BD59-A6C34878D82A}">
-                    <a16:rowId xmlns:a16="http://schemas.microsoft.com/office/drawing/2014/main" val="10003"/>
-                  </a:ext>
-                </a:extLst>
               </a:tr>
               <a:tr h="432000">
                 <a:tc>
@@ -12425,6 +12473,11 @@
                         </a:rPr>
                         <a:t>排名</a:t>
                       </a:r>
+                      <a:endParaRPr lang="zh-CN" altLang="en-US" sz="800">
+                        <a:solidFill>
+                          <a:schemeClr val="bg1"/>
+                        </a:solidFill>
+                      </a:endParaRPr>
                     </a:p>
                   </a:txBody>
                   <a:tcPr anchor="ctr">
@@ -12858,11 +12911,6 @@
                     <a:noFill/>
                   </a:tcPr>
                 </a:tc>
-                <a:extLst>
-                  <a:ext uri="{0D108BD9-81ED-4DB2-BD59-A6C34878D82A}">
-                    <a16:rowId xmlns:a16="http://schemas.microsoft.com/office/drawing/2014/main" val="10004"/>
-                  </a:ext>
-                </a:extLst>
               </a:tr>
               <a:tr h="432000">
                 <a:tc>
@@ -12881,6 +12929,11 @@
                         </a:rPr>
                         <a:t>第</a:t>
                       </a:r>
+                      <a:endParaRPr lang="zh-CN" altLang="en-US" sz="800">
+                        <a:solidFill>
+                          <a:schemeClr val="bg1"/>
+                        </a:solidFill>
+                      </a:endParaRPr>
                     </a:p>
                   </a:txBody>
                   <a:tcPr anchor="ctr">
@@ -13318,11 +13371,6 @@
                     <a:noFill/>
                   </a:tcPr>
                 </a:tc>
-                <a:extLst>
-                  <a:ext uri="{0D108BD9-81ED-4DB2-BD59-A6C34878D82A}">
-                    <a16:rowId xmlns:a16="http://schemas.microsoft.com/office/drawing/2014/main" val="10005"/>
-                  </a:ext>
-                </a:extLst>
               </a:tr>
               <a:tr h="432000">
                 <a:tc>
@@ -13341,6 +13389,11 @@
                         </a:rPr>
                         <a:t>44</a:t>
                       </a:r>
+                      <a:endParaRPr lang="en-US" altLang="zh-CN" sz="800">
+                        <a:solidFill>
+                          <a:schemeClr val="bg1"/>
+                        </a:solidFill>
+                      </a:endParaRPr>
                     </a:p>
                   </a:txBody>
                   <a:tcPr anchor="ctr">
@@ -13782,11 +13835,6 @@
                     <a:noFill/>
                   </a:tcPr>
                 </a:tc>
-                <a:extLst>
-                  <a:ext uri="{0D108BD9-81ED-4DB2-BD59-A6C34878D82A}">
-                    <a16:rowId xmlns:a16="http://schemas.microsoft.com/office/drawing/2014/main" val="10006"/>
-                  </a:ext>
-                </a:extLst>
               </a:tr>
               <a:tr h="432000">
                 <a:tc>
@@ -13805,6 +13853,11 @@
                         </a:rPr>
                         <a:t>位</a:t>
                       </a:r>
+                      <a:endParaRPr lang="zh-CN" altLang="en-US" sz="800">
+                        <a:solidFill>
+                          <a:schemeClr val="bg1"/>
+                        </a:solidFill>
+                      </a:endParaRPr>
                     </a:p>
                   </a:txBody>
                   <a:tcPr anchor="ctr">
@@ -14250,11 +14303,6 @@
                     <a:noFill/>
                   </a:tcPr>
                 </a:tc>
-                <a:extLst>
-                  <a:ext uri="{0D108BD9-81ED-4DB2-BD59-A6C34878D82A}">
-                    <a16:rowId xmlns:a16="http://schemas.microsoft.com/office/drawing/2014/main" val="10007"/>
-                  </a:ext>
-                </a:extLst>
               </a:tr>
               <a:tr h="432000">
                 <a:tc>
@@ -14273,6 +14321,11 @@
                         </a:rPr>
                         <a:t>。</a:t>
                       </a:r>
+                      <a:endParaRPr lang="zh-CN" altLang="en-US" sz="800">
+                        <a:solidFill>
+                          <a:schemeClr val="bg1"/>
+                        </a:solidFill>
+                      </a:endParaRPr>
                     </a:p>
                   </a:txBody>
                   <a:tcPr anchor="ctr">
@@ -14722,11 +14775,6 @@
                     <a:noFill/>
                   </a:tcPr>
                 </a:tc>
-                <a:extLst>
-                  <a:ext uri="{0D108BD9-81ED-4DB2-BD59-A6C34878D82A}">
-                    <a16:rowId xmlns:a16="http://schemas.microsoft.com/office/drawing/2014/main" val="10008"/>
-                  </a:ext>
-                </a:extLst>
               </a:tr>
               <a:tr h="432000">
                 <a:tc>
@@ -14745,6 +14793,11 @@
                         </a:rPr>
                         <a:t>&lt;|end|&gt;</a:t>
                       </a:r>
+                      <a:endParaRPr lang="en-US" altLang="zh-CN" sz="800">
+                        <a:solidFill>
+                          <a:schemeClr val="bg1"/>
+                        </a:solidFill>
+                      </a:endParaRPr>
                     </a:p>
                   </a:txBody>
                   <a:tcPr anchor="ctr">
@@ -15198,11 +15251,6 @@
                     </a:solidFill>
                   </a:tcPr>
                 </a:tc>
-                <a:extLst>
-                  <a:ext uri="{0D108BD9-81ED-4DB2-BD59-A6C34878D82A}">
-                    <a16:rowId xmlns:a16="http://schemas.microsoft.com/office/drawing/2014/main" val="10009"/>
-                  </a:ext>
-                </a:extLst>
               </a:tr>
             </a:tbl>
           </a:graphicData>
@@ -15276,7 +15324,7 @@
                     <a:srgbClr val="FFFFFF"/>
                   </a:solidFill>
                   <a:latin typeface="Noto Sans SC" panose="020B0200000000000000" charset="-122"/>
-                  <a:ea typeface="宋体" panose="02010600030101010101" pitchFamily="2" charset="-122"/>
+                  <a:ea typeface="SimSun" pitchFamily="2" charset="-122"/>
                   <a:cs typeface="Noto Sans SC" panose="020B0200000000000000" charset="-122"/>
                   <a:sym typeface="Noto Sans SC" panose="020B0200000000000000" charset="-122"/>
                 </a:rPr>
@@ -15288,12 +15336,21 @@
                     <a:srgbClr val="FFFFFF"/>
                   </a:solidFill>
                   <a:latin typeface="Noto Sans SC" panose="020B0200000000000000" charset="-122"/>
-                  <a:ea typeface="宋体" panose="02010600030101010101" pitchFamily="2" charset="-122"/>
+                  <a:ea typeface="SimSun" pitchFamily="2" charset="-122"/>
                   <a:cs typeface="Noto Sans SC" panose="020B0200000000000000" charset="-122"/>
                   <a:sym typeface="Noto Sans SC" panose="020B0200000000000000" charset="-122"/>
                 </a:rPr>
                 <a:t>1</a:t>
               </a:r>
+              <a:endParaRPr lang="en-US" altLang="zh-CN" i="0" u="none" strike="noStrike">
+                <a:solidFill>
+                  <a:srgbClr val="FFFFFF"/>
+                </a:solidFill>
+                <a:latin typeface="Noto Sans SC" panose="020B0200000000000000" charset="-122"/>
+                <a:ea typeface="SimSun" pitchFamily="2" charset="-122"/>
+                <a:cs typeface="Noto Sans SC" panose="020B0200000000000000" charset="-122"/>
+                <a:sym typeface="Noto Sans SC" panose="020B0200000000000000" charset="-122"/>
+              </a:endParaRPr>
             </a:p>
           </p:txBody>
         </p:sp>
@@ -15306,7 +15363,7 @@
             <p:nvPr/>
           </p:nvPicPr>
           <p:blipFill>
-            <a:blip r:embed="rId3"/>
+            <a:blip r:embed="rId1"/>
             <a:stretch>
               <a:fillRect/>
             </a:stretch>
@@ -15390,7 +15447,7 @@
                     <a:srgbClr val="FFFFFF"/>
                   </a:solidFill>
                   <a:latin typeface="Noto Sans SC" panose="020B0200000000000000" charset="-122"/>
-                  <a:ea typeface="宋体" panose="02010600030101010101" pitchFamily="2" charset="-122"/>
+                  <a:ea typeface="SimSun" pitchFamily="2" charset="-122"/>
                   <a:cs typeface="Noto Sans SC" panose="020B0200000000000000" charset="-122"/>
                   <a:sym typeface="Noto Sans SC" panose="020B0200000000000000" charset="-122"/>
                 </a:rPr>
@@ -15402,12 +15459,21 @@
                     <a:srgbClr val="FFFFFF"/>
                   </a:solidFill>
                   <a:latin typeface="Noto Sans SC" panose="020B0200000000000000" charset="-122"/>
-                  <a:ea typeface="宋体" panose="02010600030101010101" pitchFamily="2" charset="-122"/>
+                  <a:ea typeface="SimSun" pitchFamily="2" charset="-122"/>
                   <a:cs typeface="Noto Sans SC" panose="020B0200000000000000" charset="-122"/>
                   <a:sym typeface="Noto Sans SC" panose="020B0200000000000000" charset="-122"/>
                 </a:rPr>
                 <a:t>2</a:t>
               </a:r>
+              <a:endParaRPr lang="en-US" altLang="zh-CN" i="0" u="none" strike="noStrike">
+                <a:solidFill>
+                  <a:srgbClr val="FFFFFF"/>
+                </a:solidFill>
+                <a:latin typeface="Noto Sans SC" panose="020B0200000000000000" charset="-122"/>
+                <a:ea typeface="SimSun" pitchFamily="2" charset="-122"/>
+                <a:cs typeface="Noto Sans SC" panose="020B0200000000000000" charset="-122"/>
+                <a:sym typeface="Noto Sans SC" panose="020B0200000000000000" charset="-122"/>
+              </a:endParaRPr>
             </a:p>
           </p:txBody>
         </p:sp>
@@ -15420,7 +15486,7 @@
             <p:nvPr/>
           </p:nvPicPr>
           <p:blipFill>
-            <a:blip r:embed="rId3"/>
+            <a:blip r:embed="rId1"/>
             <a:stretch>
               <a:fillRect/>
             </a:stretch>
@@ -15504,7 +15570,7 @@
                     <a:srgbClr val="FFFFFF"/>
                   </a:solidFill>
                   <a:latin typeface="Noto Sans SC" panose="020B0200000000000000" charset="-122"/>
-                  <a:ea typeface="宋体" panose="02010600030101010101" pitchFamily="2" charset="-122"/>
+                  <a:ea typeface="SimSun" pitchFamily="2" charset="-122"/>
                   <a:cs typeface="Noto Sans SC" panose="020B0200000000000000" charset="-122"/>
                   <a:sym typeface="Noto Sans SC" panose="020B0200000000000000" charset="-122"/>
                 </a:rPr>
@@ -15516,12 +15582,21 @@
                     <a:srgbClr val="FFFFFF"/>
                   </a:solidFill>
                   <a:latin typeface="Noto Sans SC" panose="020B0200000000000000" charset="-122"/>
-                  <a:ea typeface="宋体" panose="02010600030101010101" pitchFamily="2" charset="-122"/>
+                  <a:ea typeface="SimSun" pitchFamily="2" charset="-122"/>
                   <a:cs typeface="Noto Sans SC" panose="020B0200000000000000" charset="-122"/>
                   <a:sym typeface="Noto Sans SC" panose="020B0200000000000000" charset="-122"/>
                 </a:rPr>
                 <a:t>1</a:t>
               </a:r>
+              <a:endParaRPr lang="en-US" altLang="zh-CN" i="0" u="none" strike="noStrike">
+                <a:solidFill>
+                  <a:srgbClr val="FFFFFF"/>
+                </a:solidFill>
+                <a:latin typeface="Noto Sans SC" panose="020B0200000000000000" charset="-122"/>
+                <a:ea typeface="SimSun" pitchFamily="2" charset="-122"/>
+                <a:cs typeface="Noto Sans SC" panose="020B0200000000000000" charset="-122"/>
+                <a:sym typeface="Noto Sans SC" panose="020B0200000000000000" charset="-122"/>
+              </a:endParaRPr>
             </a:p>
           </p:txBody>
         </p:sp>
@@ -15534,7 +15609,7 @@
             <p:nvPr/>
           </p:nvPicPr>
           <p:blipFill>
-            <a:blip r:embed="rId4"/>
+            <a:blip r:embed="rId2"/>
             <a:stretch>
               <a:fillRect/>
             </a:stretch>
@@ -15634,6 +15709,11 @@
               </a:rPr>
               <a:t>注意力</a:t>
             </a:r>
+            <a:endParaRPr lang="zh-CN" altLang="en-US">
+              <a:solidFill>
+                <a:srgbClr val="00E5FF"/>
+              </a:solidFill>
+            </a:endParaRPr>
           </a:p>
           <a:p>
             <a:pPr algn="ctr"/>
@@ -15645,6 +15725,11 @@
               </a:rPr>
               <a:t>复用</a:t>
             </a:r>
+            <a:endParaRPr lang="zh-CN" altLang="en-US">
+              <a:solidFill>
+                <a:srgbClr val="00E5FF"/>
+              </a:solidFill>
+            </a:endParaRPr>
           </a:p>
         </p:txBody>
       </p:sp>
@@ -16231,6 +16316,7 @@
               <a:rPr lang="zh-CN" altLang="en-US"/>
               <a:t>模型本身原因</a:t>
             </a:r>
+            <a:endParaRPr lang="zh-CN" altLang="en-US"/>
           </a:p>
         </p:txBody>
       </p:sp>
@@ -16253,6 +16339,7 @@
               <a:rPr lang="zh-CN" altLang="en-US"/>
               <a:t>上下文较长</a:t>
             </a:r>
+            <a:endParaRPr lang="zh-CN" altLang="en-US"/>
           </a:p>
           <a:p>
             <a:pPr lvl="1"/>
@@ -16260,6 +16347,7 @@
               <a:rPr lang="zh-CN" altLang="en-US"/>
               <a:t>关键条件被淹没，注意力没有能够正确捕捉相关信息</a:t>
             </a:r>
+            <a:endParaRPr lang="zh-CN" altLang="en-US"/>
           </a:p>
           <a:p>
             <a:pPr lvl="0"/>
@@ -16267,6 +16355,7 @@
               <a:rPr lang="zh-CN" altLang="en-US"/>
               <a:t>注意力 ≠ 意识</a:t>
             </a:r>
+            <a:endParaRPr lang="zh-CN" altLang="en-US"/>
           </a:p>
           <a:p>
             <a:pPr lvl="1"/>
@@ -16274,6 +16363,7 @@
               <a:rPr lang="zh-CN" altLang="en-US"/>
               <a:t>可以类比为人类思维，但本质上还存在争论</a:t>
             </a:r>
+            <a:endParaRPr lang="zh-CN" altLang="en-US"/>
           </a:p>
         </p:txBody>
       </p:sp>
@@ -16296,6 +16386,7 @@
               <a:rPr lang="zh-CN" altLang="en-US"/>
               <a:t>算力原因</a:t>
             </a:r>
+            <a:endParaRPr lang="zh-CN" altLang="en-US"/>
           </a:p>
         </p:txBody>
       </p:sp>
@@ -16318,6 +16409,7 @@
               <a:rPr lang="zh-CN" altLang="en-US"/>
               <a:t>后台模型被运营商偷偷替换成了小版本或低精度模型</a:t>
             </a:r>
+            <a:endParaRPr lang="zh-CN" altLang="en-US"/>
           </a:p>
           <a:p>
             <a:pPr lvl="1"/>
@@ -16329,6 +16421,7 @@
               <a:rPr lang="zh-CN" altLang="en-US"/>
               <a:t>在北京时间的傍晚开始“变傻”</a:t>
             </a:r>
+            <a:endParaRPr lang="zh-CN" altLang="en-US"/>
           </a:p>
         </p:txBody>
       </p:sp>
@@ -16349,7 +16442,6 @@
           <a:p>
             <a:fld id="{49AE70B2-8BF9-45C0-BB95-33D1B9D3A854}" type="slidenum">
               <a:rPr lang="zh-CN" altLang="en-US" smtClean="0"/>
-              <a:t>13</a:t>
             </a:fld>
             <a:endParaRPr lang="en-US" altLang="zh-CN"/>
           </a:p>
@@ -16893,6 +16985,7 @@
               <a:rPr lang="zh-CN" altLang="en-US"/>
               <a:t>模型输出的错误排查</a:t>
             </a:r>
+            <a:endParaRPr lang="zh-CN" altLang="en-US"/>
           </a:p>
         </p:txBody>
       </p:sp>
@@ -16918,6 +17011,7 @@
               <a:rPr lang="zh-CN" altLang="en-US"/>
               <a:t>问题是否太模糊？</a:t>
             </a:r>
+            <a:endParaRPr lang="zh-CN" altLang="en-US"/>
           </a:p>
           <a:p>
             <a:pPr marL="457200" indent="-457200">
@@ -16927,6 +17021,7 @@
               <a:rPr lang="zh-CN" altLang="en-US"/>
               <a:t>关键上下文是否缺失？</a:t>
             </a:r>
+            <a:endParaRPr lang="zh-CN" altLang="en-US"/>
           </a:p>
           <a:p>
             <a:pPr marL="457200" indent="-457200">
@@ -16936,6 +17031,7 @@
               <a:rPr lang="zh-CN" altLang="en-US"/>
               <a:t>关键条件是否被淹没或放得太后？</a:t>
             </a:r>
+            <a:endParaRPr lang="zh-CN" altLang="en-US"/>
           </a:p>
           <a:p>
             <a:pPr marL="457200" indent="-457200">
@@ -16945,6 +17041,7 @@
               <a:rPr lang="zh-CN" altLang="en-US"/>
               <a:t>材料是否太长，要分段、摘要或检索？</a:t>
             </a:r>
+            <a:endParaRPr lang="zh-CN" altLang="en-US"/>
           </a:p>
           <a:p>
             <a:pPr marL="457200" indent="-457200">
@@ -16958,6 +17055,7 @@
               <a:rPr lang="en-US" altLang="zh-CN"/>
               <a:t>RAG？</a:t>
             </a:r>
+            <a:endParaRPr lang="en-US" altLang="zh-CN"/>
           </a:p>
           <a:p>
             <a:pPr marL="457200" indent="-457200">
@@ -16967,6 +17065,7 @@
               <a:rPr lang="zh-CN" altLang="en-US"/>
               <a:t>模型是否不适合这个任务？</a:t>
             </a:r>
+            <a:endParaRPr lang="zh-CN" altLang="en-US"/>
           </a:p>
           <a:p>
             <a:pPr marL="457200" indent="-457200">
@@ -16976,6 +17075,7 @@
               <a:rPr lang="zh-CN" altLang="en-US"/>
               <a:t>是否涉及事实、隐私、安全或正式评价，需要人工确认？</a:t>
             </a:r>
+            <a:endParaRPr lang="zh-CN" altLang="en-US"/>
           </a:p>
         </p:txBody>
       </p:sp>
@@ -16996,7 +17096,6 @@
           <a:p>
             <a:fld id="{49AE70B2-8BF9-45C0-BB95-33D1B9D3A854}" type="slidenum">
               <a:rPr lang="zh-CN" altLang="en-US" smtClean="0"/>
-              <a:t>14</a:t>
             </a:fld>
             <a:endParaRPr lang="en-US" altLang="zh-CN"/>
           </a:p>
@@ -17516,6 +17615,7 @@
               <a:rPr lang="zh-CN" altLang="en-US"/>
               <a:t>小模型</a:t>
             </a:r>
+            <a:endParaRPr lang="zh-CN" altLang="en-US"/>
           </a:p>
         </p:txBody>
       </p:sp>
@@ -17538,6 +17638,7 @@
               <a:rPr lang="zh-CN" altLang="en-US"/>
               <a:t>大模型</a:t>
             </a:r>
+            <a:endParaRPr lang="zh-CN" altLang="en-US"/>
           </a:p>
         </p:txBody>
       </p:sp>
@@ -17560,6 +17661,7 @@
               <a:rPr lang="zh-CN" altLang="en-US"/>
               <a:t>优点</a:t>
             </a:r>
+            <a:endParaRPr lang="zh-CN" altLang="en-US"/>
           </a:p>
           <a:p>
             <a:pPr lvl="1"/>
@@ -17567,6 +17669,7 @@
               <a:rPr lang="zh-CN" altLang="en-US"/>
               <a:t>复杂推理、长文本、泛化更强</a:t>
             </a:r>
+            <a:endParaRPr lang="zh-CN" altLang="en-US"/>
           </a:p>
           <a:p>
             <a:pPr lvl="1"/>
@@ -17574,6 +17677,7 @@
               <a:rPr lang="zh-CN" altLang="en-US"/>
               <a:t>适合复杂、约束多、风险高的任务</a:t>
             </a:r>
+            <a:endParaRPr lang="zh-CN" altLang="en-US"/>
           </a:p>
           <a:p>
             <a:pPr lvl="0"/>
@@ -17581,6 +17685,7 @@
               <a:rPr lang="zh-CN" altLang="en-US"/>
               <a:t>缺点</a:t>
             </a:r>
+            <a:endParaRPr lang="zh-CN" altLang="en-US"/>
           </a:p>
           <a:p>
             <a:pPr lvl="1"/>
@@ -17588,6 +17693,7 @@
               <a:rPr lang="zh-CN" altLang="en-US"/>
               <a:t>更贵、更慢</a:t>
             </a:r>
+            <a:endParaRPr lang="zh-CN" altLang="en-US"/>
           </a:p>
         </p:txBody>
       </p:sp>
@@ -17610,6 +17716,7 @@
               <a:rPr lang="zh-CN" altLang="en-US"/>
               <a:t>小模型</a:t>
             </a:r>
+            <a:endParaRPr lang="zh-CN" altLang="en-US"/>
           </a:p>
         </p:txBody>
       </p:sp>
@@ -17632,6 +17739,7 @@
               <a:rPr lang="zh-CN" altLang="en-US"/>
               <a:t>优点</a:t>
             </a:r>
+            <a:endParaRPr lang="zh-CN" altLang="en-US"/>
           </a:p>
           <a:p>
             <a:pPr lvl="1"/>
@@ -17639,6 +17747,7 @@
               <a:rPr lang="zh-CN" altLang="en-US"/>
               <a:t>更快、更便宜</a:t>
             </a:r>
+            <a:endParaRPr lang="zh-CN" altLang="en-US"/>
           </a:p>
           <a:p>
             <a:pPr lvl="1"/>
@@ -17646,12 +17755,14 @@
               <a:rPr lang="zh-CN" altLang="en-US"/>
               <a:t>适合固定、低风险、高频任务</a:t>
             </a:r>
+            <a:endParaRPr lang="zh-CN" altLang="en-US"/>
           </a:p>
           <a:p>
             <a:r>
               <a:rPr lang="zh-CN" altLang="en-US"/>
               <a:t>缺点</a:t>
             </a:r>
+            <a:endParaRPr lang="zh-CN" altLang="en-US"/>
           </a:p>
           <a:p>
             <a:pPr lvl="1"/>
@@ -17659,6 +17770,7 @@
               <a:rPr lang="zh-CN" altLang="en-US"/>
               <a:t>复杂推理和长上下文可能更弱</a:t>
             </a:r>
+            <a:endParaRPr lang="zh-CN" altLang="en-US"/>
           </a:p>
         </p:txBody>
       </p:sp>
@@ -17679,7 +17791,6 @@
           <a:p>
             <a:fld id="{49AE70B2-8BF9-45C0-BB95-33D1B9D3A854}" type="slidenum">
               <a:rPr lang="zh-CN" altLang="en-US" smtClean="0"/>
-              <a:t>15</a:t>
             </a:fld>
             <a:endParaRPr lang="en-US" altLang="zh-CN"/>
           </a:p>
@@ -18449,6 +18560,7 @@
               <a:rPr lang="zh-CN" altLang="en-US"/>
               <a:t>总结</a:t>
             </a:r>
+            <a:endParaRPr lang="zh-CN" altLang="en-US"/>
           </a:p>
         </p:txBody>
       </p:sp>
@@ -18607,6 +18719,11 @@
               </a:rPr>
               <a:t>下一节课：</a:t>
             </a:r>
+            <a:endParaRPr lang="zh-CN" altLang="en-US" sz="2800" dirty="0">
+              <a:solidFill>
+                <a:schemeClr val="bg1"/>
+              </a:solidFill>
+            </a:endParaRPr>
           </a:p>
           <a:p>
             <a:pPr lvl="1"/>
@@ -18634,6 +18751,11 @@
               </a:rPr>
               <a:t>为什么表现不同？</a:t>
             </a:r>
+            <a:endParaRPr lang="zh-CN" altLang="en-US" sz="2400" dirty="0">
+              <a:solidFill>
+                <a:schemeClr val="bg1"/>
+              </a:solidFill>
+            </a:endParaRPr>
           </a:p>
         </p:txBody>
       </p:sp>
@@ -18654,7 +18776,6 @@
           <a:p>
             <a:fld id="{49AE70B2-8BF9-45C0-BB95-33D1B9D3A854}" type="slidenum">
               <a:rPr lang="zh-CN" altLang="en-US" smtClean="0"/>
-              <a:t>16</a:t>
             </a:fld>
             <a:endParaRPr lang="en-US" altLang="zh-CN"/>
           </a:p>
@@ -19036,6 +19157,7 @@
               <a:rPr lang="zh-CN" altLang="en-US" sz="3200" dirty="0"/>
               <a:t>回顾</a:t>
             </a:r>
+            <a:endParaRPr lang="zh-CN" altLang="en-US" sz="3200" dirty="0"/>
           </a:p>
         </p:txBody>
       </p:sp>
@@ -19167,6 +19289,12 @@
               </a:rPr>
               <a:t>相似度查询</a:t>
             </a:r>
+            <a:endParaRPr lang="zh-CN" altLang="en-US" sz="2800" b="1" dirty="0">
+              <a:solidFill>
+                <a:srgbClr val="00E5FF"/>
+              </a:solidFill>
+              <a:sym typeface="+mn-ea"/>
+            </a:endParaRPr>
           </a:p>
           <a:p>
             <a:pPr lvl="1"/>
@@ -19188,6 +19316,12 @@
               </a:rPr>
               <a:t>RAG</a:t>
             </a:r>
+            <a:endParaRPr lang="en-US" altLang="zh-CN" sz="2520" dirty="0">
+              <a:solidFill>
+                <a:schemeClr val="bg1"/>
+              </a:solidFill>
+              <a:sym typeface="+mn-ea"/>
+            </a:endParaRPr>
           </a:p>
         </p:txBody>
       </p:sp>
@@ -19208,7 +19342,6 @@
           <a:p>
             <a:fld id="{49AE70B2-8BF9-45C0-BB95-33D1B9D3A854}" type="slidenum">
               <a:rPr lang="zh-CN" altLang="en-US" smtClean="0"/>
-              <a:t>2</a:t>
             </a:fld>
             <a:endParaRPr lang="en-US" altLang="zh-CN"/>
           </a:p>
@@ -19619,7 +19752,6 @@
           <a:p>
             <a:fld id="{49AE70B2-8BF9-45C0-BB95-33D1B9D3A854}" type="slidenum">
               <a:rPr lang="zh-CN" altLang="en-US" smtClean="0"/>
-              <a:t>3</a:t>
             </a:fld>
             <a:endParaRPr lang="en-US" altLang="zh-CN"/>
           </a:p>
@@ -19671,6 +19803,7 @@
               <a:rPr lang="zh-CN" altLang="en-US" sz="3200" dirty="0"/>
               <a:t>课程路线图</a:t>
             </a:r>
+            <a:endParaRPr lang="zh-CN" altLang="en-US" sz="3200" dirty="0"/>
           </a:p>
         </p:txBody>
       </p:sp>
@@ -19691,7 +19824,6 @@
           <a:p>
             <a:fld id="{49AE70B2-8BF9-45C0-BB95-33D1B9D3A854}" type="slidenum">
               <a:rPr lang="zh-CN" altLang="en-US" smtClean="0"/>
-              <a:t>4</a:t>
             </a:fld>
             <a:endParaRPr lang="en-US" altLang="zh-CN"/>
           </a:p>
@@ -19751,12 +19883,21 @@
                   <a:srgbClr val="FFFFFF"/>
                 </a:solidFill>
                 <a:latin typeface="Noto Sans SC" panose="020B0200000000000000" charset="-122"/>
-                <a:ea typeface="宋体" panose="02010600030101010101" pitchFamily="2" charset="-122"/>
+                <a:ea typeface="SimSun" pitchFamily="2" charset="-122"/>
                 <a:cs typeface="Noto Sans SC" panose="020B0200000000000000" charset="-122"/>
                 <a:sym typeface="Noto Sans SC" panose="020B0200000000000000" charset="-122"/>
               </a:rPr>
               <a:t>大</a:t>
             </a:r>
+            <a:endParaRPr lang="zh-CN" altLang="en-US" sz="3200" b="1" i="0" u="none" strike="noStrike">
+              <a:solidFill>
+                <a:srgbClr val="FFFFFF"/>
+              </a:solidFill>
+              <a:latin typeface="Noto Sans SC" panose="020B0200000000000000" charset="-122"/>
+              <a:ea typeface="SimSun" pitchFamily="2" charset="-122"/>
+              <a:cs typeface="Noto Sans SC" panose="020B0200000000000000" charset="-122"/>
+              <a:sym typeface="Noto Sans SC" panose="020B0200000000000000" charset="-122"/>
+            </a:endParaRPr>
           </a:p>
           <a:p>
             <a:pPr marL="0" indent="0" algn="ctr">
@@ -19771,12 +19912,21 @@
                   <a:srgbClr val="FFFFFF"/>
                 </a:solidFill>
                 <a:latin typeface="Noto Sans SC" panose="020B0200000000000000" charset="-122"/>
-                <a:ea typeface="宋体" panose="02010600030101010101" pitchFamily="2" charset="-122"/>
+                <a:ea typeface="SimSun" pitchFamily="2" charset="-122"/>
                 <a:cs typeface="Noto Sans SC" panose="020B0200000000000000" charset="-122"/>
                 <a:sym typeface="Noto Sans SC" panose="020B0200000000000000" charset="-122"/>
               </a:rPr>
               <a:t>模</a:t>
             </a:r>
+            <a:endParaRPr lang="zh-CN" altLang="en-US" sz="3200" b="1" i="0" u="none" strike="noStrike">
+              <a:solidFill>
+                <a:srgbClr val="FFFFFF"/>
+              </a:solidFill>
+              <a:latin typeface="Noto Sans SC" panose="020B0200000000000000" charset="-122"/>
+              <a:ea typeface="SimSun" pitchFamily="2" charset="-122"/>
+              <a:cs typeface="Noto Sans SC" panose="020B0200000000000000" charset="-122"/>
+              <a:sym typeface="Noto Sans SC" panose="020B0200000000000000" charset="-122"/>
+            </a:endParaRPr>
           </a:p>
           <a:p>
             <a:pPr marL="0" indent="0" algn="ctr">
@@ -19791,12 +19941,21 @@
                   <a:srgbClr val="FFFFFF"/>
                 </a:solidFill>
                 <a:latin typeface="Noto Sans SC" panose="020B0200000000000000" charset="-122"/>
-                <a:ea typeface="宋体" panose="02010600030101010101" pitchFamily="2" charset="-122"/>
+                <a:ea typeface="SimSun" pitchFamily="2" charset="-122"/>
                 <a:cs typeface="Noto Sans SC" panose="020B0200000000000000" charset="-122"/>
                 <a:sym typeface="Noto Sans SC" panose="020B0200000000000000" charset="-122"/>
               </a:rPr>
               <a:t>型</a:t>
             </a:r>
+            <a:endParaRPr lang="zh-CN" altLang="en-US" sz="3200" b="1" i="0" u="none" strike="noStrike">
+              <a:solidFill>
+                <a:srgbClr val="FFFFFF"/>
+              </a:solidFill>
+              <a:latin typeface="Noto Sans SC" panose="020B0200000000000000" charset="-122"/>
+              <a:ea typeface="SimSun" pitchFamily="2" charset="-122"/>
+              <a:cs typeface="Noto Sans SC" panose="020B0200000000000000" charset="-122"/>
+              <a:sym typeface="Noto Sans SC" panose="020B0200000000000000" charset="-122"/>
+            </a:endParaRPr>
           </a:p>
           <a:p>
             <a:pPr marL="0" indent="0" algn="ctr">
@@ -19811,12 +19970,21 @@
                   <a:srgbClr val="FFFFFF"/>
                 </a:solidFill>
                 <a:latin typeface="Noto Sans SC" panose="020B0200000000000000" charset="-122"/>
-                <a:ea typeface="宋体" panose="02010600030101010101" pitchFamily="2" charset="-122"/>
+                <a:ea typeface="SimSun" pitchFamily="2" charset="-122"/>
                 <a:cs typeface="Noto Sans SC" panose="020B0200000000000000" charset="-122"/>
                 <a:sym typeface="Noto Sans SC" panose="020B0200000000000000" charset="-122"/>
               </a:rPr>
               <a:t>产</a:t>
             </a:r>
+            <a:endParaRPr lang="zh-CN" altLang="en-US" sz="3200" b="1" i="0" u="none" strike="noStrike">
+              <a:solidFill>
+                <a:srgbClr val="FFFFFF"/>
+              </a:solidFill>
+              <a:latin typeface="Noto Sans SC" panose="020B0200000000000000" charset="-122"/>
+              <a:ea typeface="SimSun" pitchFamily="2" charset="-122"/>
+              <a:cs typeface="Noto Sans SC" panose="020B0200000000000000" charset="-122"/>
+              <a:sym typeface="Noto Sans SC" panose="020B0200000000000000" charset="-122"/>
+            </a:endParaRPr>
           </a:p>
           <a:p>
             <a:pPr marL="0" indent="0" algn="ctr">
@@ -19831,277 +19999,21 @@
                   <a:srgbClr val="FFFFFF"/>
                 </a:solidFill>
                 <a:latin typeface="Noto Sans SC" panose="020B0200000000000000" charset="-122"/>
-                <a:ea typeface="宋体" panose="02010600030101010101" pitchFamily="2" charset="-122"/>
+                <a:ea typeface="SimSun" pitchFamily="2" charset="-122"/>
                 <a:cs typeface="Noto Sans SC" panose="020B0200000000000000" charset="-122"/>
                 <a:sym typeface="Noto Sans SC" panose="020B0200000000000000" charset="-122"/>
               </a:rPr>
               <a:t>品</a:t>
             </a:r>
-          </a:p>
-        </p:txBody>
-      </p:sp>
-      <p:sp>
-        <p:nvSpPr>
-          <p:cNvPr id="5" name="AutoShape 6"/>
-          <p:cNvSpPr/>
-          <p:nvPr/>
-        </p:nvSpPr>
-        <p:spPr>
-          <a:xfrm>
-            <a:off x="3395980" y="1753235"/>
-            <a:ext cx="899795" cy="1543050"/>
-          </a:xfrm>
-          <a:prstGeom prst="roundRect">
-            <a:avLst>
-              <a:gd name="adj" fmla="val 0"/>
-            </a:avLst>
-          </a:prstGeom>
-          <a:solidFill>
-            <a:srgbClr val="B388FF">
-              <a:alpha val="8000"/>
-            </a:srgbClr>
-          </a:solidFill>
-          <a:ln w="25400" cap="flat" cmpd="sng">
-            <a:solidFill>
-              <a:srgbClr val="B388FF">
-                <a:alpha val="100000"/>
-              </a:srgbClr>
-            </a:solidFill>
-            <a:prstDash val="solid"/>
-            <a:round/>
-          </a:ln>
-          <a:effectLst>
-            <a:outerShdw blurRad="152400" dir="2700000" algn="tl" rotWithShape="0">
-              <a:srgbClr val="06F0D2">
-                <a:alpha val="40000"/>
-              </a:srgbClr>
-            </a:outerShdw>
-          </a:effectLst>
-        </p:spPr>
-        <p:txBody>
-          <a:bodyPr vert="horz" wrap="square" lIns="0" tIns="0" rIns="0" bIns="0" rtlCol="0" anchor="ctr" anchorCtr="0"/>
-          <a:lstStyle/>
-          <a:p>
-            <a:pPr marL="0" indent="0" algn="ctr">
-              <a:lnSpc>
-                <a:spcPct val="125000"/>
-              </a:lnSpc>
-              <a:defRPr/>
-            </a:pPr>
-            <a:r>
-              <a:rPr lang="zh-CN" altLang="en-US" sz="2400" b="1" i="0" u="none" strike="noStrike">
-                <a:solidFill>
-                  <a:srgbClr val="FFFFFF"/>
-                </a:solidFill>
-                <a:latin typeface="Noto Sans SC" panose="020B0200000000000000" charset="-122"/>
-                <a:ea typeface="宋体" panose="02010600030101010101" pitchFamily="2" charset="-122"/>
-                <a:cs typeface="Noto Sans SC" panose="020B0200000000000000" charset="-122"/>
-                <a:sym typeface="Noto Sans SC" panose="020B0200000000000000" charset="-122"/>
-              </a:rPr>
-              <a:t>模型</a:t>
-            </a:r>
-          </a:p>
-          <a:p>
-            <a:pPr marL="0" indent="0" algn="ctr">
-              <a:lnSpc>
-                <a:spcPct val="125000"/>
-              </a:lnSpc>
-              <a:defRPr/>
-            </a:pPr>
-            <a:r>
-              <a:rPr lang="zh-CN" altLang="en-US" sz="2400" b="1" i="0" u="none" strike="noStrike">
-                <a:solidFill>
-                  <a:srgbClr val="FFFFFF"/>
-                </a:solidFill>
-                <a:latin typeface="Noto Sans SC" panose="020B0200000000000000" charset="-122"/>
-                <a:ea typeface="宋体" panose="02010600030101010101" pitchFamily="2" charset="-122"/>
-                <a:cs typeface="Noto Sans SC" panose="020B0200000000000000" charset="-122"/>
-                <a:sym typeface="Noto Sans SC" panose="020B0200000000000000" charset="-122"/>
-              </a:rPr>
-              <a:t>原理</a:t>
-            </a:r>
-          </a:p>
-        </p:txBody>
-      </p:sp>
-      <p:sp>
-        <p:nvSpPr>
-          <p:cNvPr id="7" name="AutoShape 6"/>
-          <p:cNvSpPr/>
-          <p:nvPr/>
-        </p:nvSpPr>
-        <p:spPr>
-          <a:xfrm>
-            <a:off x="3395980" y="3416935"/>
-            <a:ext cx="899795" cy="1547495"/>
-          </a:xfrm>
-          <a:prstGeom prst="roundRect">
-            <a:avLst>
-              <a:gd name="adj" fmla="val 0"/>
-            </a:avLst>
-          </a:prstGeom>
-          <a:solidFill>
-            <a:srgbClr val="B388FF">
-              <a:alpha val="8000"/>
-            </a:srgbClr>
-          </a:solidFill>
-          <a:ln w="25400" cap="flat" cmpd="sng">
-            <a:solidFill>
-              <a:srgbClr val="B388FF">
-                <a:alpha val="100000"/>
-              </a:srgbClr>
-            </a:solidFill>
-            <a:prstDash val="solid"/>
-            <a:round/>
-          </a:ln>
-          <a:effectLst>
-            <a:outerShdw blurRad="152400" dir="2700000" algn="tl" rotWithShape="0">
-              <a:srgbClr val="06F0D2">
-                <a:alpha val="40000"/>
-              </a:srgbClr>
-            </a:outerShdw>
-          </a:effectLst>
-        </p:spPr>
-        <p:txBody>
-          <a:bodyPr vert="horz" wrap="square" lIns="0" tIns="0" rIns="0" bIns="0" rtlCol="0" anchor="ctr" anchorCtr="0">
-            <a:noAutofit/>
-          </a:bodyPr>
-          <a:lstStyle/>
-          <a:p>
-            <a:pPr lvl="0" algn="ctr">
-              <a:lnSpc>
-                <a:spcPct val="125000"/>
-              </a:lnSpc>
-              <a:buClrTx/>
-              <a:buSzTx/>
-              <a:buFontTx/>
-              <a:defRPr/>
-            </a:pPr>
-            <a:r>
-              <a:rPr lang="zh-CN" altLang="en-US" sz="2400" b="1">
-                <a:solidFill>
-                  <a:srgbClr val="FFFFFF"/>
-                </a:solidFill>
-                <a:latin typeface="Noto Sans SC" panose="020B0200000000000000" charset="-122"/>
-                <a:ea typeface="宋体" panose="02010600030101010101" pitchFamily="2" charset="-122"/>
-                <a:cs typeface="Noto Sans SC" panose="020B0200000000000000" charset="-122"/>
-                <a:sym typeface="Noto Sans SC" panose="020B0200000000000000" charset="-122"/>
-              </a:rPr>
-              <a:t>模型</a:t>
-            </a:r>
-          </a:p>
-          <a:p>
-            <a:pPr lvl="0" algn="ctr">
-              <a:lnSpc>
-                <a:spcPct val="125000"/>
-              </a:lnSpc>
-              <a:buClrTx/>
-              <a:buSzTx/>
-              <a:buFontTx/>
-              <a:defRPr/>
-            </a:pPr>
-            <a:r>
-              <a:rPr lang="zh-CN" altLang="en-US" sz="2400" b="1">
-                <a:solidFill>
-                  <a:srgbClr val="FFFFFF"/>
-                </a:solidFill>
-                <a:latin typeface="Noto Sans SC" panose="020B0200000000000000" charset="-122"/>
-                <a:ea typeface="宋体" panose="02010600030101010101" pitchFamily="2" charset="-122"/>
-                <a:cs typeface="Noto Sans SC" panose="020B0200000000000000" charset="-122"/>
-                <a:sym typeface="Noto Sans SC" panose="020B0200000000000000" charset="-122"/>
-              </a:rPr>
-              <a:t>应用</a:t>
-            </a:r>
-          </a:p>
-        </p:txBody>
-      </p:sp>
-      <p:sp>
-        <p:nvSpPr>
-          <p:cNvPr id="8" name="AutoShape 6"/>
-          <p:cNvSpPr/>
-          <p:nvPr/>
-        </p:nvSpPr>
-        <p:spPr>
-          <a:xfrm>
-            <a:off x="3395980" y="5086985"/>
-            <a:ext cx="899795" cy="989330"/>
-          </a:xfrm>
-          <a:prstGeom prst="roundRect">
-            <a:avLst>
-              <a:gd name="adj" fmla="val 0"/>
-            </a:avLst>
-          </a:prstGeom>
-          <a:solidFill>
-            <a:srgbClr val="B388FF">
-              <a:alpha val="8000"/>
-            </a:srgbClr>
-          </a:solidFill>
-          <a:ln w="25400" cap="flat" cmpd="sng">
-            <a:solidFill>
-              <a:srgbClr val="B388FF">
-                <a:alpha val="100000"/>
-              </a:srgbClr>
-            </a:solidFill>
-            <a:prstDash val="solid"/>
-            <a:round/>
-          </a:ln>
-          <a:effectLst>
-            <a:outerShdw blurRad="152400" dir="2700000" algn="tl" rotWithShape="0">
-              <a:srgbClr val="06F0D2">
-                <a:alpha val="40000"/>
-              </a:srgbClr>
-            </a:outerShdw>
-          </a:effectLst>
-        </p:spPr>
-        <p:txBody>
-          <a:bodyPr vert="horz" wrap="square" lIns="0" tIns="0" rIns="0" bIns="0" rtlCol="0" anchor="ctr" anchorCtr="0">
-            <a:noAutofit/>
-          </a:bodyPr>
-          <a:lstStyle/>
-          <a:p>
-            <a:pPr lvl="0" algn="ctr">
-              <a:lnSpc>
-                <a:spcPct val="125000"/>
-              </a:lnSpc>
-              <a:buClrTx/>
-              <a:buSzTx/>
-              <a:buFontTx/>
-              <a:defRPr/>
-            </a:pPr>
-            <a:r>
-              <a:rPr lang="zh-CN" altLang="en-US" sz="2400" b="1">
-                <a:solidFill>
-                  <a:srgbClr val="FFFFFF"/>
-                </a:solidFill>
-                <a:latin typeface="Noto Sans SC" panose="020B0200000000000000" charset="-122"/>
-                <a:ea typeface="宋体" panose="02010600030101010101" pitchFamily="2" charset="-122"/>
-                <a:cs typeface="Noto Sans SC" panose="020B0200000000000000" charset="-122"/>
-                <a:sym typeface="Noto Sans SC" panose="020B0200000000000000" charset="-122"/>
-              </a:rPr>
-              <a:t>智</a:t>
-            </a:r>
-          </a:p>
-          <a:p>
-            <a:pPr lvl="0" algn="ctr">
-              <a:lnSpc>
-                <a:spcPct val="125000"/>
-              </a:lnSpc>
-              <a:buClrTx/>
-              <a:buSzTx/>
-              <a:buFontTx/>
-              <a:defRPr/>
-            </a:pPr>
-            <a:r>
-              <a:rPr lang="zh-CN" altLang="en-US" sz="2400" b="1">
-                <a:solidFill>
-                  <a:srgbClr val="FFFFFF"/>
-                </a:solidFill>
-                <a:latin typeface="Noto Sans SC" panose="020B0200000000000000" charset="-122"/>
-                <a:ea typeface="宋体" panose="02010600030101010101" pitchFamily="2" charset="-122"/>
-                <a:cs typeface="Noto Sans SC" panose="020B0200000000000000" charset="-122"/>
-                <a:sym typeface="Noto Sans SC" panose="020B0200000000000000" charset="-122"/>
-              </a:rPr>
-              <a:t>能体</a:t>
-            </a:r>
+            <a:endParaRPr lang="zh-CN" altLang="en-US" sz="3200" b="1" i="0" u="none" strike="noStrike">
+              <a:solidFill>
+                <a:srgbClr val="FFFFFF"/>
+              </a:solidFill>
+              <a:latin typeface="Noto Sans SC" panose="020B0200000000000000" charset="-122"/>
+              <a:ea typeface="SimSun" pitchFamily="2" charset="-122"/>
+              <a:cs typeface="Noto Sans SC" panose="020B0200000000000000" charset="-122"/>
+              <a:sym typeface="Noto Sans SC" panose="020B0200000000000000" charset="-122"/>
+            </a:endParaRPr>
           </a:p>
         </p:txBody>
       </p:sp>
@@ -20157,7 +20069,6 @@
               <a:pPr algn="ctr">
                 <a:defRPr/>
               </a:pPr>
-              <a:endParaRPr/>
             </a:p>
           </p:txBody>
         </p:sp>
@@ -20193,7 +20104,6 @@
               <a:pPr algn="ctr">
                 <a:defRPr/>
               </a:pPr>
-              <a:endParaRPr/>
             </a:p>
           </p:txBody>
         </p:sp>
@@ -20231,6 +20141,14 @@
                 </a:rPr>
                 <a:t>01</a:t>
               </a:r>
+              <a:endParaRPr lang="en-US" b="1" kern="0">
+                <a:solidFill>
+                  <a:srgbClr val="69F0AE"/>
+                </a:solidFill>
+                <a:latin typeface="Noto Sans SC" panose="020B0200000000000000" charset="-122"/>
+                <a:ea typeface="Noto Sans SC" panose="020B0200000000000000" charset="-122"/>
+                <a:cs typeface="Noto Sans SC" panose="020B0200000000000000" charset="-122"/>
+              </a:endParaRPr>
             </a:p>
           </p:txBody>
         </p:sp>
@@ -20266,8 +20184,16 @@
                   <a:ea typeface="Noto Sans SC" panose="020B0200000000000000" charset="-122"/>
                   <a:cs typeface="Noto Sans SC" panose="020B0200000000000000" charset="-122"/>
                 </a:rPr>
-                <a:t>模型定位和介绍</a:t>
+                <a:t>AI产品定位和介绍</a:t>
               </a:r>
+              <a:endParaRPr lang="zh-CN" altLang="en-US" b="1" kern="0">
+                <a:solidFill>
+                  <a:srgbClr val="69F0AE"/>
+                </a:solidFill>
+                <a:latin typeface="Noto Sans SC" panose="020B0200000000000000" charset="-122"/>
+                <a:ea typeface="Noto Sans SC" panose="020B0200000000000000" charset="-122"/>
+                <a:cs typeface="Noto Sans SC" panose="020B0200000000000000" charset="-122"/>
+              </a:endParaRPr>
             </a:p>
           </p:txBody>
         </p:sp>
@@ -20416,6 +20342,16 @@
                 </a:rPr>
                 <a:t>05</a:t>
               </a:r>
+              <a:endParaRPr lang="en-US" b="1" kern="0">
+                <a:solidFill>
+                  <a:schemeClr val="bg1">
+                    <a:lumMod val="50000"/>
+                  </a:schemeClr>
+                </a:solidFill>
+                <a:latin typeface="Noto Sans SC" panose="020B0200000000000000" charset="-122"/>
+                <a:ea typeface="Noto Sans SC" panose="020B0200000000000000" charset="-122"/>
+                <a:cs typeface="Noto Sans SC" panose="020B0200000000000000" charset="-122"/>
+              </a:endParaRPr>
             </a:p>
           </p:txBody>
         </p:sp>
@@ -20453,8 +20389,18 @@
                   <a:ea typeface="Noto Sans SC" panose="020B0200000000000000" charset="-122"/>
                   <a:cs typeface="Noto Sans SC" panose="020B0200000000000000" charset="-122"/>
                 </a:rPr>
-                <a:t>模型训练、选型与评估</a:t>
+                <a:t>大模型的训练、选型与评估</a:t>
               </a:r>
+              <a:endParaRPr lang="zh-CN" altLang="en-US" b="1" kern="0">
+                <a:solidFill>
+                  <a:schemeClr val="bg1">
+                    <a:lumMod val="50000"/>
+                  </a:schemeClr>
+                </a:solidFill>
+                <a:latin typeface="Noto Sans SC" panose="020B0200000000000000" charset="-122"/>
+                <a:ea typeface="Noto Sans SC" panose="020B0200000000000000" charset="-122"/>
+                <a:cs typeface="Noto Sans SC" panose="020B0200000000000000" charset="-122"/>
+              </a:endParaRPr>
             </a:p>
           </p:txBody>
         </p:sp>
@@ -20603,6 +20549,16 @@
                 </a:rPr>
                 <a:t>07</a:t>
               </a:r>
+              <a:endParaRPr lang="en-US" b="1" kern="0">
+                <a:solidFill>
+                  <a:schemeClr val="bg1">
+                    <a:lumMod val="50000"/>
+                  </a:schemeClr>
+                </a:solidFill>
+                <a:latin typeface="Noto Sans SC" panose="020B0200000000000000" charset="-122"/>
+                <a:ea typeface="Noto Sans SC" panose="020B0200000000000000" charset="-122"/>
+                <a:cs typeface="Noto Sans SC" panose="020B0200000000000000" charset="-122"/>
+              </a:endParaRPr>
             </a:p>
           </p:txBody>
         </p:sp>
@@ -20640,8 +20596,18 @@
                   <a:ea typeface="Noto Sans SC" panose="020B0200000000000000" charset="-122"/>
                   <a:cs typeface="Noto Sans SC" panose="020B0200000000000000" charset="-122"/>
                 </a:rPr>
-                <a:t>智能体框架与工具使用</a:t>
+                <a:t>大模型的思维提示、智能体与工具</a:t>
               </a:r>
+              <a:endParaRPr lang="zh-CN" altLang="en-US" b="1" kern="0">
+                <a:solidFill>
+                  <a:schemeClr val="bg1">
+                    <a:lumMod val="50000"/>
+                  </a:schemeClr>
+                </a:solidFill>
+                <a:latin typeface="Noto Sans SC" panose="020B0200000000000000" charset="-122"/>
+                <a:ea typeface="Noto Sans SC" panose="020B0200000000000000" charset="-122"/>
+                <a:cs typeface="Noto Sans SC" panose="020B0200000000000000" charset="-122"/>
+              </a:endParaRPr>
             </a:p>
           </p:txBody>
         </p:sp>
@@ -20698,7 +20664,6 @@
               <a:pPr algn="ctr">
                 <a:defRPr/>
               </a:pPr>
-              <a:endParaRPr/>
             </a:p>
           </p:txBody>
         </p:sp>
@@ -20734,7 +20699,6 @@
               <a:pPr algn="ctr">
                 <a:defRPr/>
               </a:pPr>
-              <a:endParaRPr/>
             </a:p>
           </p:txBody>
         </p:sp>
@@ -20772,6 +20736,14 @@
                 </a:rPr>
                 <a:t>02</a:t>
               </a:r>
+              <a:endParaRPr lang="en-US" b="1" kern="0">
+                <a:solidFill>
+                  <a:srgbClr val="69F0AE"/>
+                </a:solidFill>
+                <a:latin typeface="Noto Sans SC" panose="020B0200000000000000" charset="-122"/>
+                <a:ea typeface="Noto Sans SC" panose="020B0200000000000000" charset="-122"/>
+                <a:cs typeface="Noto Sans SC" panose="020B0200000000000000" charset="-122"/>
+              </a:endParaRPr>
             </a:p>
           </p:txBody>
         </p:sp>
@@ -20807,8 +20779,16 @@
                   <a:ea typeface="Noto Sans SC" panose="020B0200000000000000" charset="-122"/>
                   <a:cs typeface="Noto Sans SC" panose="020B0200000000000000" charset="-122"/>
                 </a:rPr>
-                <a:t>生成机制</a:t>
+                <a:t>大模型的生成机制</a:t>
               </a:r>
+              <a:endParaRPr lang="zh-CN" altLang="en-US" b="1" kern="0">
+                <a:solidFill>
+                  <a:srgbClr val="69F0AE"/>
+                </a:solidFill>
+                <a:latin typeface="Noto Sans SC" panose="020B0200000000000000" charset="-122"/>
+                <a:ea typeface="Noto Sans SC" panose="020B0200000000000000" charset="-122"/>
+                <a:cs typeface="Noto Sans SC" panose="020B0200000000000000" charset="-122"/>
+              </a:endParaRPr>
             </a:p>
           </p:txBody>
         </p:sp>
@@ -20865,7 +20845,6 @@
               <a:pPr algn="ctr">
                 <a:defRPr/>
               </a:pPr>
-              <a:endParaRPr/>
             </a:p>
           </p:txBody>
         </p:sp>
@@ -20901,7 +20880,6 @@
               <a:pPr algn="ctr">
                 <a:defRPr/>
               </a:pPr>
-              <a:endParaRPr/>
             </a:p>
           </p:txBody>
         </p:sp>
@@ -20939,6 +20917,14 @@
                 </a:rPr>
                 <a:t>03</a:t>
               </a:r>
+              <a:endParaRPr lang="en-US" b="1" kern="0">
+                <a:solidFill>
+                  <a:srgbClr val="69F0AE"/>
+                </a:solidFill>
+                <a:latin typeface="Noto Sans SC" panose="020B0200000000000000" charset="-122"/>
+                <a:ea typeface="Noto Sans SC" panose="020B0200000000000000" charset="-122"/>
+                <a:cs typeface="Noto Sans SC" panose="020B0200000000000000" charset="-122"/>
+              </a:endParaRPr>
             </a:p>
           </p:txBody>
         </p:sp>
@@ -20974,7 +20960,7 @@
                   <a:ea typeface="Noto Sans SC" panose="020B0200000000000000" charset="-122"/>
                   <a:cs typeface="Noto Sans SC" panose="020B0200000000000000" charset="-122"/>
                 </a:rPr>
-                <a:t>token </a:t>
+                <a:t>Token</a:t>
               </a:r>
               <a:r>
                 <a:rPr lang="zh-CN" altLang="en-US" b="1" kern="0">
@@ -20982,10 +20968,21 @@
                     <a:srgbClr val="69F0AE"/>
                   </a:solidFill>
                   <a:latin typeface="Noto Sans SC" panose="020B0200000000000000" charset="-122"/>
-                  <a:ea typeface="宋体" panose="02010600030101010101" pitchFamily="2" charset="-122"/>
+                  <a:ea typeface="Noto Sans SC" panose="020B0200000000000000" charset="-122"/>
                   <a:cs typeface="Noto Sans SC" panose="020B0200000000000000" charset="-122"/>
                 </a:rPr>
-                <a:t>和</a:t>
+                <a:t>、</a:t>
+              </a:r>
+              <a:r>
+                <a:rPr lang="zh-CN" altLang="en-US" b="1" kern="0">
+                  <a:solidFill>
+                    <a:srgbClr val="69F0AE"/>
+                  </a:solidFill>
+                  <a:latin typeface="Noto Sans SC" panose="020B0200000000000000" charset="-122"/>
+                  <a:ea typeface="SimSun" pitchFamily="2" charset="-122"/>
+                  <a:cs typeface="Noto Sans SC" panose="020B0200000000000000" charset="-122"/>
+                </a:rPr>
+                <a:t>E</a:t>
               </a:r>
               <a:r>
                 <a:rPr lang="en-US" altLang="zh-CN" b="1" kern="0">
@@ -20993,10 +20990,10 @@
                     <a:srgbClr val="69F0AE"/>
                   </a:solidFill>
                   <a:latin typeface="Noto Sans SC" panose="020B0200000000000000" charset="-122"/>
-                  <a:ea typeface="宋体" panose="02010600030101010101" pitchFamily="2" charset="-122"/>
+                  <a:ea typeface="SimSun" pitchFamily="2" charset="-122"/>
                   <a:cs typeface="Noto Sans SC" panose="020B0200000000000000" charset="-122"/>
                 </a:rPr>
-                <a:t> </a:t>
+                <a:t>m</a:t>
               </a:r>
               <a:r>
                 <a:rPr lang="en-US" altLang="zh-CN" b="1" kern="0">
@@ -21007,8 +21004,16 @@
                   <a:ea typeface="Noto Sans SC" panose="020B0200000000000000" charset="-122"/>
                   <a:cs typeface="Noto Sans SC" panose="020B0200000000000000" charset="-122"/>
                 </a:rPr>
-                <a:t>embedding</a:t>
+                <a:t>bedding 和 RAG</a:t>
               </a:r>
+              <a:endParaRPr lang="en-US" altLang="zh-CN" b="1" kern="0">
+                <a:solidFill>
+                  <a:srgbClr val="69F0AE"/>
+                </a:solidFill>
+                <a:latin typeface="Noto Sans SC" panose="020B0200000000000000" charset="-122"/>
+                <a:ea typeface="Noto Sans SC" panose="020B0200000000000000" charset="-122"/>
+                <a:cs typeface="Noto Sans SC" panose="020B0200000000000000" charset="-122"/>
+              </a:endParaRPr>
             </a:p>
           </p:txBody>
         </p:sp>
@@ -21151,6 +21156,14 @@
                 </a:rPr>
                 <a:t>04</a:t>
               </a:r>
+              <a:endParaRPr lang="en-US" b="1" kern="0">
+                <a:solidFill>
+                  <a:srgbClr val="FFE3B1"/>
+                </a:solidFill>
+                <a:latin typeface="Noto Sans SC" panose="020B0200000000000000" charset="-122"/>
+                <a:ea typeface="Noto Sans SC" panose="020B0200000000000000" charset="-122"/>
+                <a:cs typeface="Noto Sans SC" panose="020B0200000000000000" charset="-122"/>
+              </a:endParaRPr>
             </a:p>
           </p:txBody>
         </p:sp>
@@ -21186,8 +21199,16 @@
                   <a:ea typeface="Noto Sans SC" panose="020B0200000000000000" charset="-122"/>
                   <a:cs typeface="Noto Sans SC" panose="020B0200000000000000" charset="-122"/>
                 </a:rPr>
-                <a:t>注意力、算力和模型大小</a:t>
+                <a:t>Transformer、注意力、算力与缓存机制</a:t>
               </a:r>
+              <a:endParaRPr lang="zh-CN" altLang="en-US" b="1" kern="0">
+                <a:solidFill>
+                  <a:srgbClr val="FFE3B1"/>
+                </a:solidFill>
+                <a:latin typeface="Noto Sans SC" panose="020B0200000000000000" charset="-122"/>
+                <a:ea typeface="Noto Sans SC" panose="020B0200000000000000" charset="-122"/>
+                <a:cs typeface="Noto Sans SC" panose="020B0200000000000000" charset="-122"/>
+              </a:endParaRPr>
             </a:p>
           </p:txBody>
         </p:sp>
@@ -21336,6 +21357,16 @@
                 </a:rPr>
                 <a:t>06</a:t>
               </a:r>
+              <a:endParaRPr lang="en-US" b="1" kern="0">
+                <a:solidFill>
+                  <a:schemeClr val="bg1">
+                    <a:lumMod val="50000"/>
+                  </a:schemeClr>
+                </a:solidFill>
+                <a:latin typeface="Noto Sans SC" panose="020B0200000000000000" charset="-122"/>
+                <a:ea typeface="Noto Sans SC" panose="020B0200000000000000" charset="-122"/>
+                <a:cs typeface="Noto Sans SC" panose="020B0200000000000000" charset="-122"/>
+              </a:endParaRPr>
             </a:p>
           </p:txBody>
         </p:sp>
@@ -21373,8 +21404,18 @@
                   <a:ea typeface="Noto Sans SC" panose="020B0200000000000000" charset="-122"/>
                   <a:cs typeface="Noto Sans SC" panose="020B0200000000000000" charset="-122"/>
                 </a:rPr>
-                <a:t>提示词技术</a:t>
+                <a:t>提示词与提示词工程</a:t>
               </a:r>
+              <a:endParaRPr lang="zh-CN" altLang="en-US" b="1" kern="0">
+                <a:solidFill>
+                  <a:schemeClr val="bg1">
+                    <a:lumMod val="50000"/>
+                  </a:schemeClr>
+                </a:solidFill>
+                <a:latin typeface="Noto Sans SC" panose="020B0200000000000000" charset="-122"/>
+                <a:ea typeface="Noto Sans SC" panose="020B0200000000000000" charset="-122"/>
+                <a:cs typeface="Noto Sans SC" panose="020B0200000000000000" charset="-122"/>
+              </a:endParaRPr>
             </a:p>
           </p:txBody>
         </p:sp>
@@ -21523,6 +21564,16 @@
                 </a:rPr>
                 <a:t>08</a:t>
               </a:r>
+              <a:endParaRPr lang="en-US" b="1" kern="0">
+                <a:solidFill>
+                  <a:schemeClr val="bg1">
+                    <a:lumMod val="50000"/>
+                  </a:schemeClr>
+                </a:solidFill>
+                <a:latin typeface="Noto Sans SC" panose="020B0200000000000000" charset="-122"/>
+                <a:ea typeface="Noto Sans SC" panose="020B0200000000000000" charset="-122"/>
+                <a:cs typeface="Noto Sans SC" panose="020B0200000000000000" charset="-122"/>
+              </a:endParaRPr>
             </a:p>
           </p:txBody>
         </p:sp>
@@ -21560,12 +21611,264 @@
                   <a:ea typeface="Noto Sans SC" panose="020B0200000000000000" charset="-122"/>
                   <a:cs typeface="Noto Sans SC" panose="020B0200000000000000" charset="-122"/>
                 </a:rPr>
-                <a:t>智能体记忆与案例剖析</a:t>
+                <a:t>智能体记忆、技能与案例</a:t>
               </a:r>
+              <a:endParaRPr lang="zh-CN" altLang="en-US" b="1" kern="0">
+                <a:solidFill>
+                  <a:schemeClr val="bg1">
+                    <a:lumMod val="50000"/>
+                  </a:schemeClr>
+                </a:solidFill>
+                <a:latin typeface="Noto Sans SC" panose="020B0200000000000000" charset="-122"/>
+                <a:ea typeface="Noto Sans SC" panose="020B0200000000000000" charset="-122"/>
+                <a:cs typeface="Noto Sans SC" panose="020B0200000000000000" charset="-122"/>
+              </a:endParaRPr>
             </a:p>
           </p:txBody>
         </p:sp>
       </p:grpSp>
+      <p:sp>
+        <p:nvSpPr>
+          <p:cNvPr id="3" name="AutoShape 6"/>
+          <p:cNvSpPr/>
+          <p:nvPr/>
+        </p:nvSpPr>
+        <p:spPr>
+          <a:xfrm>
+            <a:off x="3395980" y="1753235"/>
+            <a:ext cx="899795" cy="2653665"/>
+          </a:xfrm>
+          <a:prstGeom prst="roundRect">
+            <a:avLst>
+              <a:gd name="adj" fmla="val 0"/>
+            </a:avLst>
+          </a:prstGeom>
+          <a:solidFill>
+            <a:srgbClr val="B388FF">
+              <a:alpha val="8000"/>
+            </a:srgbClr>
+          </a:solidFill>
+          <a:ln w="25400" cap="flat" cmpd="sng">
+            <a:solidFill>
+              <a:srgbClr val="B388FF">
+                <a:alpha val="100000"/>
+              </a:srgbClr>
+            </a:solidFill>
+            <a:prstDash val="solid"/>
+            <a:round/>
+          </a:ln>
+          <a:effectLst>
+            <a:outerShdw blurRad="152400" dir="2700000" algn="tl" rotWithShape="0">
+              <a:srgbClr val="06F0D2">
+                <a:alpha val="40000"/>
+              </a:srgbClr>
+            </a:outerShdw>
+          </a:effectLst>
+        </p:spPr>
+        <p:txBody>
+          <a:bodyPr vert="horz" wrap="square" lIns="0" tIns="0" rIns="0" bIns="0" rtlCol="0" anchor="ctr" anchorCtr="0"/>
+          <a:lstStyle/>
+          <a:p>
+            <a:pPr marL="0" indent="0" algn="ctr">
+              <a:lnSpc>
+                <a:spcPct val="125000"/>
+              </a:lnSpc>
+              <a:defRPr/>
+            </a:pPr>
+            <a:r>
+              <a:rPr lang="zh-CN" altLang="en-US" sz="2400" b="1" i="0" u="none" strike="noStrike">
+                <a:solidFill>
+                  <a:srgbClr val="FFFFFF"/>
+                </a:solidFill>
+                <a:latin typeface="Noto Sans SC"/>
+                <a:ea typeface="SimSun" charset="0"/>
+                <a:cs typeface="Noto Sans SC"/>
+                <a:sym typeface="Noto Sans SC"/>
+              </a:rPr>
+              <a:t>模型</a:t>
+            </a:r>
+            <a:endParaRPr lang="zh-CN" altLang="en-US" sz="2400" b="1" i="0" u="none" strike="noStrike">
+              <a:solidFill>
+                <a:srgbClr val="FFFFFF"/>
+              </a:solidFill>
+              <a:latin typeface="Noto Sans SC"/>
+              <a:ea typeface="SimSun" charset="0"/>
+              <a:cs typeface="Noto Sans SC"/>
+              <a:sym typeface="Noto Sans SC"/>
+            </a:endParaRPr>
+          </a:p>
+          <a:p>
+            <a:pPr marL="0" indent="0" algn="ctr">
+              <a:lnSpc>
+                <a:spcPct val="125000"/>
+              </a:lnSpc>
+              <a:defRPr/>
+            </a:pPr>
+            <a:r>
+              <a:rPr lang="zh-CN" altLang="en-US" sz="2400" b="1" i="0" u="none" strike="noStrike">
+                <a:solidFill>
+                  <a:srgbClr val="FFFFFF"/>
+                </a:solidFill>
+                <a:latin typeface="Noto Sans SC"/>
+                <a:ea typeface="SimSun" charset="0"/>
+                <a:cs typeface="Noto Sans SC"/>
+                <a:sym typeface="Noto Sans SC"/>
+              </a:rPr>
+              <a:t>原理</a:t>
+            </a:r>
+            <a:endParaRPr lang="zh-CN" altLang="en-US" sz="2400" b="1" i="0" u="none" strike="noStrike">
+              <a:solidFill>
+                <a:srgbClr val="FFFFFF"/>
+              </a:solidFill>
+              <a:latin typeface="Noto Sans SC"/>
+              <a:ea typeface="SimSun" charset="0"/>
+              <a:cs typeface="Noto Sans SC"/>
+              <a:sym typeface="Noto Sans SC"/>
+            </a:endParaRPr>
+          </a:p>
+        </p:txBody>
+      </p:sp>
+      <p:sp>
+        <p:nvSpPr>
+          <p:cNvPr id="9" name="AutoShape 6"/>
+          <p:cNvSpPr/>
+          <p:nvPr/>
+        </p:nvSpPr>
+        <p:spPr>
+          <a:xfrm>
+            <a:off x="3395980" y="4530725"/>
+            <a:ext cx="899795" cy="1545590"/>
+          </a:xfrm>
+          <a:prstGeom prst="roundRect">
+            <a:avLst>
+              <a:gd name="adj" fmla="val 0"/>
+            </a:avLst>
+          </a:prstGeom>
+          <a:solidFill>
+            <a:srgbClr val="B388FF">
+              <a:alpha val="8000"/>
+            </a:srgbClr>
+          </a:solidFill>
+          <a:ln w="25400" cap="flat" cmpd="sng">
+            <a:solidFill>
+              <a:srgbClr val="B388FF">
+                <a:alpha val="100000"/>
+              </a:srgbClr>
+            </a:solidFill>
+            <a:prstDash val="solid"/>
+            <a:round/>
+          </a:ln>
+          <a:effectLst>
+            <a:outerShdw blurRad="152400" dir="2700000" algn="tl" rotWithShape="0">
+              <a:srgbClr val="06F0D2">
+                <a:alpha val="40000"/>
+              </a:srgbClr>
+            </a:outerShdw>
+          </a:effectLst>
+        </p:spPr>
+        <p:txBody>
+          <a:bodyPr vert="horz" wrap="square" lIns="0" tIns="0" rIns="0" bIns="0" rtlCol="0" anchor="ctr" anchorCtr="0">
+            <a:noAutofit/>
+          </a:bodyPr>
+          <a:lstStyle/>
+          <a:p>
+            <a:pPr lvl="0" algn="ctr">
+              <a:lnSpc>
+                <a:spcPct val="100000"/>
+              </a:lnSpc>
+              <a:buClrTx/>
+              <a:buSzTx/>
+              <a:buFontTx/>
+              <a:defRPr/>
+            </a:pPr>
+            <a:r>
+              <a:rPr lang="zh-CN" altLang="en-US" sz="2400" b="1">
+                <a:solidFill>
+                  <a:srgbClr val="FFFFFF"/>
+                </a:solidFill>
+                <a:latin typeface="Noto Sans SC"/>
+                <a:ea typeface="SimSun" charset="0"/>
+                <a:cs typeface="Noto Sans SC"/>
+                <a:sym typeface="Noto Sans SC"/>
+              </a:rPr>
+              <a:t>应用</a:t>
+            </a:r>
+            <a:endParaRPr lang="zh-CN" altLang="en-US" sz="2400" b="1">
+              <a:solidFill>
+                <a:srgbClr val="FFFFFF"/>
+              </a:solidFill>
+              <a:latin typeface="Noto Sans SC"/>
+              <a:ea typeface="SimSun" charset="0"/>
+              <a:cs typeface="Noto Sans SC"/>
+              <a:sym typeface="Noto Sans SC"/>
+            </a:endParaRPr>
+          </a:p>
+          <a:p>
+            <a:pPr lvl="0" algn="ctr">
+              <a:lnSpc>
+                <a:spcPct val="100000"/>
+              </a:lnSpc>
+              <a:buClrTx/>
+              <a:buSzTx/>
+              <a:buFontTx/>
+              <a:defRPr/>
+            </a:pPr>
+            <a:r>
+              <a:rPr lang="zh-CN" altLang="en-US" sz="2400" b="1">
+                <a:solidFill>
+                  <a:srgbClr val="FFFFFF"/>
+                </a:solidFill>
+                <a:latin typeface="Noto Sans SC"/>
+                <a:ea typeface="SimSun" charset="0"/>
+                <a:cs typeface="Noto Sans SC"/>
+                <a:sym typeface="Noto Sans SC"/>
+              </a:rPr>
+              <a:t>与智</a:t>
+            </a:r>
+            <a:endParaRPr lang="zh-CN" altLang="en-US" sz="2400" b="1">
+              <a:solidFill>
+                <a:srgbClr val="FFFFFF"/>
+              </a:solidFill>
+              <a:latin typeface="Noto Sans SC"/>
+              <a:ea typeface="SimSun" charset="0"/>
+              <a:cs typeface="Noto Sans SC"/>
+              <a:sym typeface="Noto Sans SC"/>
+            </a:endParaRPr>
+          </a:p>
+          <a:p>
+            <a:pPr lvl="0" algn="ctr">
+              <a:lnSpc>
+                <a:spcPct val="100000"/>
+              </a:lnSpc>
+              <a:buClrTx/>
+              <a:buSzTx/>
+              <a:buFontTx/>
+              <a:defRPr/>
+            </a:pPr>
+            <a:r>
+              <a:rPr lang="zh-CN" altLang="en-US" sz="2400" b="1">
+                <a:solidFill>
+                  <a:srgbClr val="FFFFFF"/>
+                </a:solidFill>
+                <a:latin typeface="Noto Sans SC"/>
+                <a:ea typeface="SimSun" charset="0"/>
+                <a:cs typeface="Noto Sans SC"/>
+                <a:sym typeface="Noto Sans SC"/>
+              </a:rPr>
+              <a:t>能体</a:t>
+            </a:r>
+            <a:endParaRPr lang="zh-CN" altLang="en-US" sz="2400" b="1">
+              <a:solidFill>
+                <a:srgbClr val="FFFFFF"/>
+              </a:solidFill>
+              <a:latin typeface="Noto Sans SC"/>
+              <a:ea typeface="SimSun" charset="0"/>
+              <a:cs typeface="Noto Sans SC"/>
+              <a:sym typeface="Noto Sans SC"/>
+            </a:endParaRPr>
+          </a:p>
+        </p:txBody>
+      </p:sp>
     </p:spTree>
   </p:cSld>
   <p:clrMapOvr>
@@ -21631,7 +21934,7 @@
                                 </p:cTn>
                               </p:par>
                               <p:par>
-                                <p:cTn id="8" presetID="10" presetClass="entr" presetSubtype="0" fill="hold" grpId="0" nodeType="withEffect">
+                                <p:cTn id="8" presetID="10" presetClass="entr" presetSubtype="0" fill="hold" nodeType="withEffect">
                                   <p:stCondLst>
                                     <p:cond delay="0"/>
                                   </p:stCondLst>
@@ -21644,7 +21947,7 @@
                                           </p:stCondLst>
                                         </p:cTn>
                                         <p:tgtEl>
-                                          <p:spTgt spid="5"/>
+                                          <p:spTgt spid="17"/>
                                         </p:tgtEl>
                                         <p:attrNameLst>
                                           <p:attrName>style.visibility</p:attrName>
@@ -21658,7 +21961,7 @@
                                       <p:cBhvr>
                                         <p:cTn id="10" dur="500"/>
                                         <p:tgtEl>
-                                          <p:spTgt spid="5"/>
+                                          <p:spTgt spid="17"/>
                                         </p:tgtEl>
                                       </p:cBhvr>
                                     </p:animEffect>
@@ -21666,7 +21969,7 @@
                                 </p:cTn>
                               </p:par>
                               <p:par>
-                                <p:cTn id="11" presetID="10" presetClass="entr" presetSubtype="0" fill="hold" grpId="0" nodeType="withEffect">
+                                <p:cTn id="11" presetID="10" presetClass="entr" presetSubtype="0" fill="hold" nodeType="withEffect">
                                   <p:stCondLst>
                                     <p:cond delay="0"/>
                                   </p:stCondLst>
@@ -21679,7 +21982,7 @@
                                           </p:stCondLst>
                                         </p:cTn>
                                         <p:tgtEl>
-                                          <p:spTgt spid="7"/>
+                                          <p:spTgt spid="28"/>
                                         </p:tgtEl>
                                         <p:attrNameLst>
                                           <p:attrName>style.visibility</p:attrName>
@@ -21693,7 +21996,7 @@
                                       <p:cBhvr>
                                         <p:cTn id="13" dur="500"/>
                                         <p:tgtEl>
-                                          <p:spTgt spid="7"/>
+                                          <p:spTgt spid="28"/>
                                         </p:tgtEl>
                                       </p:cBhvr>
                                     </p:animEffect>
@@ -21701,7 +22004,7 @@
                                 </p:cTn>
                               </p:par>
                               <p:par>
-                                <p:cTn id="14" presetID="10" presetClass="entr" presetSubtype="0" fill="hold" grpId="0" nodeType="withEffect">
+                                <p:cTn id="14" presetID="10" presetClass="entr" presetSubtype="0" fill="hold" nodeType="withEffect">
                                   <p:stCondLst>
                                     <p:cond delay="0"/>
                                   </p:stCondLst>
@@ -21714,7 +22017,7 @@
                                           </p:stCondLst>
                                         </p:cTn>
                                         <p:tgtEl>
-                                          <p:spTgt spid="8"/>
+                                          <p:spTgt spid="33"/>
                                         </p:tgtEl>
                                         <p:attrNameLst>
                                           <p:attrName>style.visibility</p:attrName>
@@ -21728,7 +22031,7 @@
                                       <p:cBhvr>
                                         <p:cTn id="16" dur="500"/>
                                         <p:tgtEl>
-                                          <p:spTgt spid="8"/>
+                                          <p:spTgt spid="33"/>
                                         </p:tgtEl>
                                       </p:cBhvr>
                                     </p:animEffect>
@@ -21749,7 +22052,7 @@
                                           </p:stCondLst>
                                         </p:cTn>
                                         <p:tgtEl>
-                                          <p:spTgt spid="17"/>
+                                          <p:spTgt spid="38"/>
                                         </p:tgtEl>
                                         <p:attrNameLst>
                                           <p:attrName>style.visibility</p:attrName>
@@ -21763,7 +22066,7 @@
                                       <p:cBhvr>
                                         <p:cTn id="19" dur="500"/>
                                         <p:tgtEl>
-                                          <p:spTgt spid="17"/>
+                                          <p:spTgt spid="38"/>
                                         </p:tgtEl>
                                       </p:cBhvr>
                                     </p:animEffect>
@@ -21784,7 +22087,7 @@
                                           </p:stCondLst>
                                         </p:cTn>
                                         <p:tgtEl>
-                                          <p:spTgt spid="28"/>
+                                          <p:spTgt spid="18"/>
                                         </p:tgtEl>
                                         <p:attrNameLst>
                                           <p:attrName>style.visibility</p:attrName>
@@ -21798,7 +22101,7 @@
                                       <p:cBhvr>
                                         <p:cTn id="22" dur="500"/>
                                         <p:tgtEl>
-                                          <p:spTgt spid="28"/>
+                                          <p:spTgt spid="18"/>
                                         </p:tgtEl>
                                       </p:cBhvr>
                                     </p:animEffect>
@@ -21819,7 +22122,7 @@
                                           </p:stCondLst>
                                         </p:cTn>
                                         <p:tgtEl>
-                                          <p:spTgt spid="33"/>
+                                          <p:spTgt spid="43"/>
                                         </p:tgtEl>
                                         <p:attrNameLst>
                                           <p:attrName>style.visibility</p:attrName>
@@ -21833,7 +22136,7 @@
                                       <p:cBhvr>
                                         <p:cTn id="25" dur="500"/>
                                         <p:tgtEl>
-                                          <p:spTgt spid="33"/>
+                                          <p:spTgt spid="43"/>
                                         </p:tgtEl>
                                       </p:cBhvr>
                                     </p:animEffect>
@@ -21854,7 +22157,7 @@
                                           </p:stCondLst>
                                         </p:cTn>
                                         <p:tgtEl>
-                                          <p:spTgt spid="38"/>
+                                          <p:spTgt spid="23"/>
                                         </p:tgtEl>
                                         <p:attrNameLst>
                                           <p:attrName>style.visibility</p:attrName>
@@ -21868,7 +22171,7 @@
                                       <p:cBhvr>
                                         <p:cTn id="28" dur="500"/>
                                         <p:tgtEl>
-                                          <p:spTgt spid="38"/>
+                                          <p:spTgt spid="23"/>
                                         </p:tgtEl>
                                       </p:cBhvr>
                                     </p:animEffect>
@@ -21889,7 +22192,7 @@
                                           </p:stCondLst>
                                         </p:cTn>
                                         <p:tgtEl>
-                                          <p:spTgt spid="18"/>
+                                          <p:spTgt spid="48"/>
                                         </p:tgtEl>
                                         <p:attrNameLst>
                                           <p:attrName>style.visibility</p:attrName>
@@ -21903,7 +22206,7 @@
                                       <p:cBhvr>
                                         <p:cTn id="31" dur="500"/>
                                         <p:tgtEl>
-                                          <p:spTgt spid="18"/>
+                                          <p:spTgt spid="48"/>
                                         </p:tgtEl>
                                       </p:cBhvr>
                                     </p:animEffect>
@@ -21911,7 +22214,7 @@
                                 </p:cTn>
                               </p:par>
                               <p:par>
-                                <p:cTn id="32" presetID="10" presetClass="entr" presetSubtype="0" fill="hold" nodeType="withEffect">
+                                <p:cTn id="32" presetID="10" presetClass="entr" presetSubtype="0" fill="hold" grpId="0" nodeType="withEffect">
                                   <p:stCondLst>
                                     <p:cond delay="0"/>
                                   </p:stCondLst>
@@ -21924,7 +22227,7 @@
                                           </p:stCondLst>
                                         </p:cTn>
                                         <p:tgtEl>
-                                          <p:spTgt spid="43"/>
+                                          <p:spTgt spid="3"/>
                                         </p:tgtEl>
                                         <p:attrNameLst>
                                           <p:attrName>style.visibility</p:attrName>
@@ -21938,7 +22241,7 @@
                                       <p:cBhvr>
                                         <p:cTn id="34" dur="500"/>
                                         <p:tgtEl>
-                                          <p:spTgt spid="43"/>
+                                          <p:spTgt spid="3"/>
                                         </p:tgtEl>
                                       </p:cBhvr>
                                     </p:animEffect>
@@ -21946,7 +22249,7 @@
                                 </p:cTn>
                               </p:par>
                               <p:par>
-                                <p:cTn id="35" presetID="10" presetClass="entr" presetSubtype="0" fill="hold" nodeType="withEffect">
+                                <p:cTn id="35" presetID="10" presetClass="entr" presetSubtype="0" fill="hold" grpId="0" nodeType="withEffect">
                                   <p:stCondLst>
                                     <p:cond delay="0"/>
                                   </p:stCondLst>
@@ -21959,7 +22262,7 @@
                                           </p:stCondLst>
                                         </p:cTn>
                                         <p:tgtEl>
-                                          <p:spTgt spid="23"/>
+                                          <p:spTgt spid="9"/>
                                         </p:tgtEl>
                                         <p:attrNameLst>
                                           <p:attrName>style.visibility</p:attrName>
@@ -21973,42 +22276,7 @@
                                       <p:cBhvr>
                                         <p:cTn id="37" dur="500"/>
                                         <p:tgtEl>
-                                          <p:spTgt spid="23"/>
-                                        </p:tgtEl>
-                                      </p:cBhvr>
-                                    </p:animEffect>
-                                  </p:childTnLst>
-                                </p:cTn>
-                              </p:par>
-                              <p:par>
-                                <p:cTn id="38" presetID="10" presetClass="entr" presetSubtype="0" fill="hold" nodeType="withEffect">
-                                  <p:stCondLst>
-                                    <p:cond delay="0"/>
-                                  </p:stCondLst>
-                                  <p:childTnLst>
-                                    <p:set>
-                                      <p:cBhvr>
-                                        <p:cTn id="39" dur="1" fill="hold">
-                                          <p:stCondLst>
-                                            <p:cond delay="0"/>
-                                          </p:stCondLst>
-                                        </p:cTn>
-                                        <p:tgtEl>
-                                          <p:spTgt spid="48"/>
-                                        </p:tgtEl>
-                                        <p:attrNameLst>
-                                          <p:attrName>style.visibility</p:attrName>
-                                        </p:attrNameLst>
-                                      </p:cBhvr>
-                                      <p:to>
-                                        <p:strVal val="visible"/>
-                                      </p:to>
-                                    </p:set>
-                                    <p:animEffect transition="in" filter="fade">
-                                      <p:cBhvr>
-                                        <p:cTn id="40" dur="500"/>
-                                        <p:tgtEl>
-                                          <p:spTgt spid="48"/>
+                                          <p:spTgt spid="9"/>
                                         </p:tgtEl>
                                       </p:cBhvr>
                                     </p:animEffect>
@@ -22045,12 +22313,10 @@
     <p:bldLst>
       <p:bldP spid="6" grpId="0" bldLvl="0" animBg="1"/>
       <p:bldP spid="6" grpId="1" animBg="1"/>
-      <p:bldP spid="5" grpId="0" bldLvl="0" animBg="1"/>
-      <p:bldP spid="5" grpId="1" animBg="1"/>
-      <p:bldP spid="7" grpId="0" bldLvl="0" animBg="1"/>
-      <p:bldP spid="7" grpId="1" animBg="1"/>
-      <p:bldP spid="8" grpId="0" bldLvl="0" animBg="1"/>
-      <p:bldP spid="8" grpId="1" animBg="1"/>
+      <p:bldP spid="3" grpId="0" bldLvl="0" animBg="1"/>
+      <p:bldP spid="3" grpId="1" animBg="1"/>
+      <p:bldP spid="9" grpId="0" bldLvl="0" animBg="1"/>
+      <p:bldP spid="9" grpId="1" animBg="1"/>
     </p:bldLst>
   </p:timing>
 </p:sld>
@@ -22082,7 +22348,7 @@
           <p:nvPr/>
         </p:nvPicPr>
         <p:blipFill>
-          <a:blip r:embed="rId3"/>
+          <a:blip r:embed="rId1"/>
           <a:stretch>
             <a:fillRect/>
           </a:stretch>
@@ -22141,7 +22407,6 @@
           <a:p>
             <a:fld id="{49AE70B2-8BF9-45C0-BB95-33D1B9D3A854}" type="slidenum">
               <a:rPr lang="zh-CN" altLang="en-US" smtClean="0"/>
-              <a:t>5</a:t>
             </a:fld>
             <a:endParaRPr lang="en-US" altLang="zh-CN"/>
           </a:p>
@@ -22201,8 +22466,8 @@
                   </a:schemeClr>
                 </a:solidFill>
                 <a:uFillTx/>
-                <a:latin typeface="微软雅黑" panose="020B0503020204020204" charset="-122"/>
-                <a:ea typeface="微软雅黑" panose="020B0503020204020204" charset="-122"/>
+                <a:latin typeface="Microsoft YaHei" panose="020B0503020204020204" charset="-122"/>
+                <a:ea typeface="Microsoft YaHei" panose="020B0503020204020204" charset="-122"/>
               </a:rPr>
               <a:t>RNN/LSTM——</a:t>
             </a:r>
@@ -22214,8 +22479,8 @@
                     <a:lumOff val="40000"/>
                   </a:schemeClr>
                 </a:solidFill>
-                <a:latin typeface="微软雅黑" panose="020B0503020204020204" charset="-122"/>
-                <a:ea typeface="微软雅黑" panose="020B0503020204020204" charset="-122"/>
+                <a:latin typeface="Microsoft YaHei" panose="020B0503020204020204" charset="-122"/>
+                <a:ea typeface="Microsoft YaHei" panose="020B0503020204020204" charset="-122"/>
               </a:rPr>
               <a:t>线性计算</a:t>
             </a:r>
@@ -22226,8 +22491,8 @@
                   <a:lumOff val="40000"/>
                 </a:schemeClr>
               </a:solidFill>
-              <a:latin typeface="微软雅黑" panose="020B0503020204020204" charset="-122"/>
-              <a:ea typeface="微软雅黑" panose="020B0503020204020204" charset="-122"/>
+              <a:latin typeface="Microsoft YaHei" panose="020B0503020204020204" charset="-122"/>
+              <a:ea typeface="Microsoft YaHei" panose="020B0503020204020204" charset="-122"/>
             </a:endParaRPr>
           </a:p>
           <a:p>
@@ -22235,7 +22500,7 @@
               <a:lnSpc>
                 <a:spcPct val="150000"/>
               </a:lnSpc>
-              <a:buFont typeface="Arial" panose="020B0604020202020204" pitchFamily="34" charset="0"/>
+              <a:buFont typeface="Arial" panose="02080604020202020204" pitchFamily="34" charset="0"/>
               <a:buChar char="•"/>
               <a:tabLst>
                 <a:tab pos="0" algn="l"/>
@@ -22246,18 +22511,25 @@
                 <a:solidFill>
                   <a:schemeClr val="bg1"/>
                 </a:solidFill>
-                <a:latin typeface="微软雅黑" panose="020B0503020204020204" charset="-122"/>
-                <a:ea typeface="微软雅黑" panose="020B0503020204020204" charset="-122"/>
+                <a:latin typeface="Microsoft YaHei" panose="020B0503020204020204" charset="-122"/>
+                <a:ea typeface="Microsoft YaHei" panose="020B0503020204020204" charset="-122"/>
               </a:rPr>
               <a:t>信息线性运算，早期处理的信息会有明显衰减问题</a:t>
             </a:r>
+            <a:endParaRPr lang="zh-CN" altLang="en-US" sz="1400" b="1" dirty="0">
+              <a:solidFill>
+                <a:schemeClr val="bg1"/>
+              </a:solidFill>
+              <a:latin typeface="Microsoft YaHei" panose="020B0503020204020204" charset="-122"/>
+              <a:ea typeface="Microsoft YaHei" panose="020B0503020204020204" charset="-122"/>
+            </a:endParaRPr>
           </a:p>
           <a:p>
             <a:pPr marL="285750" indent="-285750" defTabSz="914400">
               <a:lnSpc>
                 <a:spcPct val="150000"/>
               </a:lnSpc>
-              <a:buFont typeface="Arial" panose="020B0604020202020204" pitchFamily="34" charset="0"/>
+              <a:buFont typeface="Arial" panose="02080604020202020204" pitchFamily="34" charset="0"/>
               <a:buChar char="•"/>
               <a:tabLst>
                 <a:tab pos="0" algn="l"/>
@@ -22268,11 +22540,18 @@
                 <a:solidFill>
                   <a:schemeClr val="bg1"/>
                 </a:solidFill>
-                <a:latin typeface="微软雅黑" panose="020B0503020204020204" charset="-122"/>
-                <a:ea typeface="微软雅黑" panose="020B0503020204020204" charset="-122"/>
+                <a:latin typeface="Microsoft YaHei" panose="020B0503020204020204" charset="-122"/>
+                <a:ea typeface="Microsoft YaHei" panose="020B0503020204020204" charset="-122"/>
               </a:rPr>
               <a:t>每一步计算依赖上一步结果，只能顺序处理</a:t>
             </a:r>
+            <a:endParaRPr lang="zh-CN" altLang="en-US" sz="1400" b="1" dirty="0">
+              <a:solidFill>
+                <a:schemeClr val="bg1"/>
+              </a:solidFill>
+              <a:latin typeface="Microsoft YaHei" panose="020B0503020204020204" charset="-122"/>
+              <a:ea typeface="Microsoft YaHei" panose="020B0503020204020204" charset="-122"/>
+            </a:endParaRPr>
           </a:p>
         </p:txBody>
       </p:sp>
@@ -22327,8 +22606,8 @@
                   <a:srgbClr val="00E5FF"/>
                 </a:solidFill>
                 <a:uFillTx/>
-                <a:latin typeface="微软雅黑" panose="020B0503020204020204" charset="-122"/>
-                <a:ea typeface="微软雅黑" panose="020B0503020204020204" charset="-122"/>
+                <a:latin typeface="Microsoft YaHei" panose="020B0503020204020204" charset="-122"/>
+                <a:ea typeface="Microsoft YaHei" panose="020B0503020204020204" charset="-122"/>
               </a:rPr>
               <a:t>Transformer——</a:t>
             </a:r>
@@ -22337,8 +22616,8 @@
                 <a:solidFill>
                   <a:srgbClr val="00E5FF"/>
                 </a:solidFill>
-                <a:latin typeface="微软雅黑" panose="020B0503020204020204" charset="-122"/>
-                <a:ea typeface="微软雅黑" panose="020B0503020204020204" charset="-122"/>
+                <a:latin typeface="Microsoft YaHei" panose="020B0503020204020204" charset="-122"/>
+                <a:ea typeface="Microsoft YaHei" panose="020B0503020204020204" charset="-122"/>
               </a:rPr>
               <a:t>并行计算</a:t>
             </a:r>
@@ -22346,8 +22625,8 @@
               <a:solidFill>
                 <a:srgbClr val="00E5FF"/>
               </a:solidFill>
-              <a:latin typeface="微软雅黑" panose="020B0503020204020204" charset="-122"/>
-              <a:ea typeface="微软雅黑" panose="020B0503020204020204" charset="-122"/>
+              <a:latin typeface="Microsoft YaHei" panose="020B0503020204020204" charset="-122"/>
+              <a:ea typeface="Microsoft YaHei" panose="020B0503020204020204" charset="-122"/>
             </a:endParaRPr>
           </a:p>
           <a:p>
@@ -22355,7 +22634,7 @@
               <a:lnSpc>
                 <a:spcPct val="150000"/>
               </a:lnSpc>
-              <a:buFont typeface="Arial" panose="020B0604020202020204" pitchFamily="34" charset="0"/>
+              <a:buFont typeface="Arial" panose="02080604020202020204" pitchFamily="34" charset="0"/>
               <a:buChar char="•"/>
               <a:tabLst>
                 <a:tab pos="0" algn="l"/>
@@ -22366,18 +22645,25 @@
                 <a:solidFill>
                   <a:schemeClr val="bg1"/>
                 </a:solidFill>
-                <a:latin typeface="微软雅黑" panose="020B0503020204020204" charset="-122"/>
-                <a:ea typeface="微软雅黑" panose="020B0503020204020204" charset="-122"/>
+                <a:latin typeface="Microsoft YaHei" panose="020B0503020204020204" charset="-122"/>
+                <a:ea typeface="Microsoft YaHei" panose="020B0503020204020204" charset="-122"/>
               </a:rPr>
               <a:t>同一时刻的全局信息同时参与计算，无信息衰减</a:t>
             </a:r>
+            <a:endParaRPr lang="zh-CN" altLang="en-US" sz="1400" b="1" dirty="0">
+              <a:solidFill>
+                <a:schemeClr val="bg1"/>
+              </a:solidFill>
+              <a:latin typeface="Microsoft YaHei" panose="020B0503020204020204" charset="-122"/>
+              <a:ea typeface="Microsoft YaHei" panose="020B0503020204020204" charset="-122"/>
+            </a:endParaRPr>
           </a:p>
           <a:p>
             <a:pPr marL="285750" indent="-285750" defTabSz="914400">
               <a:lnSpc>
                 <a:spcPct val="150000"/>
               </a:lnSpc>
-              <a:buFont typeface="Arial" panose="020B0604020202020204" pitchFamily="34" charset="0"/>
+              <a:buFont typeface="Arial" panose="02080604020202020204" pitchFamily="34" charset="0"/>
               <a:buChar char="•"/>
               <a:tabLst>
                 <a:tab pos="0" algn="l"/>
@@ -22388,18 +22674,25 @@
                 <a:solidFill>
                   <a:schemeClr val="bg1"/>
                 </a:solidFill>
-                <a:latin typeface="微软雅黑" panose="020B0503020204020204" charset="-122"/>
-                <a:ea typeface="微软雅黑" panose="020B0503020204020204" charset="-122"/>
+                <a:latin typeface="Microsoft YaHei" panose="020B0503020204020204" charset="-122"/>
+                <a:ea typeface="Microsoft YaHei" panose="020B0503020204020204" charset="-122"/>
               </a:rPr>
               <a:t>注意力机制的计算可以拆分为多个互不干扰的过程，这些过程可以并行计算</a:t>
             </a:r>
+            <a:endParaRPr lang="zh-CN" altLang="en-US" sz="1400" b="1" dirty="0">
+              <a:solidFill>
+                <a:schemeClr val="bg1"/>
+              </a:solidFill>
+              <a:latin typeface="Microsoft YaHei" panose="020B0503020204020204" charset="-122"/>
+              <a:ea typeface="Microsoft YaHei" panose="020B0503020204020204" charset="-122"/>
+            </a:endParaRPr>
           </a:p>
           <a:p>
             <a:pPr marL="285750" indent="-285750" defTabSz="914400">
               <a:lnSpc>
                 <a:spcPct val="150000"/>
               </a:lnSpc>
-              <a:buFont typeface="Arial" panose="020B0604020202020204" pitchFamily="34" charset="0"/>
+              <a:buFont typeface="Arial" panose="02080604020202020204" pitchFamily="34" charset="0"/>
               <a:buChar char="•"/>
               <a:tabLst>
                 <a:tab pos="0" algn="l"/>
@@ -22409,8 +22702,8 @@
               <a:solidFill>
                 <a:schemeClr val="bg1"/>
               </a:solidFill>
-              <a:latin typeface="微软雅黑" panose="020B0503020204020204" charset="-122"/>
-              <a:ea typeface="微软雅黑" panose="020B0503020204020204" charset="-122"/>
+              <a:latin typeface="Microsoft YaHei" panose="020B0503020204020204" charset="-122"/>
+              <a:ea typeface="Microsoft YaHei" panose="020B0503020204020204" charset="-122"/>
             </a:endParaRPr>
           </a:p>
         </p:txBody>
@@ -22507,7 +22800,7 @@
           <p:nvPr/>
         </p:nvPicPr>
         <p:blipFill>
-          <a:blip r:embed="rId4"/>
+          <a:blip r:embed="rId2"/>
           <a:stretch>
             <a:fillRect/>
           </a:stretch>
@@ -22594,7 +22887,7 @@
             <p:nvPr/>
           </p:nvPicPr>
           <p:blipFill>
-            <a:blip r:embed="rId5"/>
+            <a:blip r:embed="rId3"/>
             <a:stretch>
               <a:fillRect/>
             </a:stretch>
@@ -23269,9 +23562,9 @@
       </p:par>
     </p:tnLst>
     <p:bldLst>
-      <p:bldP spid="14" grpId="0" uiExpand="1" build="p" animBg="1"/>
+      <p:bldP spid="14" grpId="0" animBg="1" uiExpand="1" build="p"/>
       <p:bldP spid="14" grpId="1" animBg="1"/>
-      <p:bldP spid="17" grpId="0" uiExpand="1" build="p" animBg="1"/>
+      <p:bldP spid="17" grpId="0" animBg="1" uiExpand="1" build="p"/>
       <p:bldP spid="17" grpId="1" animBg="1"/>
       <p:bldP spid="21" grpId="0" animBg="1"/>
       <p:bldP spid="21" grpId="1" animBg="1"/>
@@ -23318,6 +23611,7 @@
               <a:rPr lang="zh-CN" altLang="en-US"/>
               <a:t>注意力机制</a:t>
             </a:r>
+            <a:endParaRPr lang="zh-CN" altLang="en-US"/>
           </a:p>
         </p:txBody>
       </p:sp>
@@ -23340,12 +23634,14 @@
               <a:rPr lang="zh-CN" altLang="en-US"/>
               <a:t>注意力机制是一种让模型在处理每个词时，能同时“关注”所有其他词，</a:t>
             </a:r>
+            <a:endParaRPr lang="zh-CN" altLang="en-US"/>
           </a:p>
           <a:p>
             <a:r>
               <a:rPr lang="zh-CN" altLang="en-US"/>
               <a:t>并根据相关性动态分配权重来聚合全局信息的计算方式。</a:t>
             </a:r>
+            <a:endParaRPr lang="zh-CN" altLang="en-US"/>
           </a:p>
         </p:txBody>
       </p:sp>
@@ -23366,7 +23662,6 @@
           <a:p>
             <a:fld id="{49AE70B2-8BF9-45C0-BB95-33D1B9D3A854}" type="slidenum">
               <a:rPr lang="zh-CN" altLang="en-US" smtClean="0"/>
-              <a:t>6</a:t>
             </a:fld>
             <a:endParaRPr lang="en-US" altLang="zh-CN"/>
           </a:p>
@@ -23396,34 +23691,10 @@
                 <a:tableStyleId>{2D5ABB26-0587-4C30-8999-92F81FD0307C}</a:tableStyleId>
               </a:tblPr>
               <a:tblGrid>
-                <a:gridCol w="749300">
-                  <a:extLst>
-                    <a:ext uri="{9D8B030D-6E8A-4147-A177-3AD203B41FA5}">
-                      <a16:colId xmlns:a16="http://schemas.microsoft.com/office/drawing/2014/main" val="20000"/>
-                    </a:ext>
-                  </a:extLst>
-                </a:gridCol>
-                <a:gridCol w="540000">
-                  <a:extLst>
-                    <a:ext uri="{9D8B030D-6E8A-4147-A177-3AD203B41FA5}">
-                      <a16:colId xmlns:a16="http://schemas.microsoft.com/office/drawing/2014/main" val="20001"/>
-                    </a:ext>
-                  </a:extLst>
-                </a:gridCol>
-                <a:gridCol w="540000">
-                  <a:extLst>
-                    <a:ext uri="{9D8B030D-6E8A-4147-A177-3AD203B41FA5}">
-                      <a16:colId xmlns:a16="http://schemas.microsoft.com/office/drawing/2014/main" val="20002"/>
-                    </a:ext>
-                  </a:extLst>
-                </a:gridCol>
-                <a:gridCol w="540000">
-                  <a:extLst>
-                    <a:ext uri="{9D8B030D-6E8A-4147-A177-3AD203B41FA5}">
-                      <a16:colId xmlns:a16="http://schemas.microsoft.com/office/drawing/2014/main" val="20003"/>
-                    </a:ext>
-                  </a:extLst>
-                </a:gridCol>
+                <a:gridCol w="749300"/>
+                <a:gridCol w="540000"/>
+                <a:gridCol w="540000"/>
+                <a:gridCol w="540000"/>
               </a:tblGrid>
               <a:tr h="540000">
                 <a:tc>
@@ -23438,8 +23709,8 @@
                         <a:solidFill>
                           <a:schemeClr val="bg1"/>
                         </a:solidFill>
-                        <a:latin typeface="微软雅黑" panose="020B0503020204020204" charset="-122"/>
-                        <a:ea typeface="微软雅黑" panose="020B0503020204020204" charset="-122"/>
+                        <a:latin typeface="Microsoft YaHei" panose="020B0503020204020204" charset="-122"/>
+                        <a:ea typeface="Microsoft YaHei" panose="020B0503020204020204" charset="-122"/>
                       </a:endParaRPr>
                     </a:p>
                   </a:txBody>
@@ -23458,11 +23729,18 @@
                           <a:solidFill>
                             <a:schemeClr val="bg1"/>
                           </a:solidFill>
-                          <a:latin typeface="微软雅黑" panose="020B0503020204020204" charset="-122"/>
-                          <a:ea typeface="微软雅黑" panose="020B0503020204020204" charset="-122"/>
+                          <a:latin typeface="Microsoft YaHei" panose="020B0503020204020204" charset="-122"/>
+                          <a:ea typeface="Microsoft YaHei" panose="020B0503020204020204" charset="-122"/>
                         </a:rPr>
                         <a:t>我</a:t>
                       </a:r>
+                      <a:endParaRPr lang="en-US" altLang="en-US" sz="1400" dirty="0">
+                        <a:solidFill>
+                          <a:schemeClr val="bg1"/>
+                        </a:solidFill>
+                        <a:latin typeface="Microsoft YaHei" panose="020B0503020204020204" charset="-122"/>
+                        <a:ea typeface="Microsoft YaHei" panose="020B0503020204020204" charset="-122"/>
+                      </a:endParaRPr>
                     </a:p>
                   </a:txBody>
                   <a:tcPr anchor="ctr"/>
@@ -23480,11 +23758,18 @@
                           <a:solidFill>
                             <a:schemeClr val="bg1"/>
                           </a:solidFill>
-                          <a:latin typeface="微软雅黑" panose="020B0503020204020204" charset="-122"/>
-                          <a:ea typeface="微软雅黑" panose="020B0503020204020204" charset="-122"/>
+                          <a:latin typeface="Microsoft YaHei" panose="020B0503020204020204" charset="-122"/>
+                          <a:ea typeface="Microsoft YaHei" panose="020B0503020204020204" charset="-122"/>
                         </a:rPr>
                         <a:t>爱</a:t>
                       </a:r>
+                      <a:endParaRPr lang="en-US" altLang="en-US" sz="1400">
+                        <a:solidFill>
+                          <a:schemeClr val="bg1"/>
+                        </a:solidFill>
+                        <a:latin typeface="Microsoft YaHei" panose="020B0503020204020204" charset="-122"/>
+                        <a:ea typeface="Microsoft YaHei" panose="020B0503020204020204" charset="-122"/>
+                      </a:endParaRPr>
                     </a:p>
                   </a:txBody>
                   <a:tcPr anchor="ctr"/>
@@ -23502,20 +23787,22 @@
                           <a:solidFill>
                             <a:schemeClr val="bg1"/>
                           </a:solidFill>
-                          <a:latin typeface="微软雅黑" panose="020B0503020204020204" charset="-122"/>
-                          <a:ea typeface="微软雅黑" panose="020B0503020204020204" charset="-122"/>
+                          <a:latin typeface="Microsoft YaHei" panose="020B0503020204020204" charset="-122"/>
+                          <a:ea typeface="Microsoft YaHei" panose="020B0503020204020204" charset="-122"/>
                         </a:rPr>
                         <a:t>你</a:t>
                       </a:r>
+                      <a:endParaRPr lang="en-US" altLang="en-US" sz="1400">
+                        <a:solidFill>
+                          <a:schemeClr val="bg1"/>
+                        </a:solidFill>
+                        <a:latin typeface="Microsoft YaHei" panose="020B0503020204020204" charset="-122"/>
+                        <a:ea typeface="Microsoft YaHei" panose="020B0503020204020204" charset="-122"/>
+                      </a:endParaRPr>
                     </a:p>
                   </a:txBody>
                   <a:tcPr anchor="ctr"/>
                 </a:tc>
-                <a:extLst>
-                  <a:ext uri="{0D108BD9-81ED-4DB2-BD59-A6C34878D82A}">
-                    <a16:rowId xmlns:a16="http://schemas.microsoft.com/office/drawing/2014/main" val="10000"/>
-                  </a:ext>
-                </a:extLst>
               </a:tr>
               <a:tr h="540000">
                 <a:tc>
@@ -23531,11 +23818,18 @@
                           <a:solidFill>
                             <a:schemeClr val="bg1"/>
                           </a:solidFill>
-                          <a:latin typeface="微软雅黑" panose="020B0503020204020204" charset="-122"/>
-                          <a:ea typeface="微软雅黑" panose="020B0503020204020204" charset="-122"/>
+                          <a:latin typeface="Microsoft YaHei" panose="020B0503020204020204" charset="-122"/>
+                          <a:ea typeface="Microsoft YaHei" panose="020B0503020204020204" charset="-122"/>
                         </a:rPr>
                         <a:t>I</a:t>
                       </a:r>
+                      <a:endParaRPr lang="en-US" altLang="en-US" sz="1400" dirty="0">
+                        <a:solidFill>
+                          <a:schemeClr val="bg1"/>
+                        </a:solidFill>
+                        <a:latin typeface="Microsoft YaHei" panose="020B0503020204020204" charset="-122"/>
+                        <a:ea typeface="Microsoft YaHei" panose="020B0503020204020204" charset="-122"/>
+                      </a:endParaRPr>
                     </a:p>
                   </a:txBody>
                   <a:tcPr anchor="ctr"/>
@@ -23553,11 +23847,18 @@
                           <a:solidFill>
                             <a:schemeClr val="bg1"/>
                           </a:solidFill>
-                          <a:latin typeface="微软雅黑" panose="020B0503020204020204" charset="-122"/>
-                          <a:ea typeface="微软雅黑" panose="020B0503020204020204" charset="-122"/>
+                          <a:latin typeface="Microsoft YaHei" panose="020B0503020204020204" charset="-122"/>
+                          <a:ea typeface="Microsoft YaHei" panose="020B0503020204020204" charset="-122"/>
                         </a:rPr>
                         <a:t>.96</a:t>
                       </a:r>
+                      <a:endParaRPr lang="en-US" altLang="en-US" sz="1400" dirty="0">
+                        <a:solidFill>
+                          <a:schemeClr val="bg1"/>
+                        </a:solidFill>
+                        <a:latin typeface="Microsoft YaHei" panose="020B0503020204020204" charset="-122"/>
+                        <a:ea typeface="Microsoft YaHei" panose="020B0503020204020204" charset="-122"/>
+                      </a:endParaRPr>
                     </a:p>
                   </a:txBody>
                   <a:tcPr anchor="ctr">
@@ -23581,11 +23882,18 @@
                           <a:solidFill>
                             <a:schemeClr val="bg1"/>
                           </a:solidFill>
-                          <a:latin typeface="微软雅黑" panose="020B0503020204020204" charset="-122"/>
-                          <a:ea typeface="微软雅黑" panose="020B0503020204020204" charset="-122"/>
+                          <a:latin typeface="Microsoft YaHei" panose="020B0503020204020204" charset="-122"/>
+                          <a:ea typeface="Microsoft YaHei" panose="020B0503020204020204" charset="-122"/>
                         </a:rPr>
                         <a:t>.01</a:t>
                       </a:r>
+                      <a:endParaRPr lang="en-US" altLang="en-US" sz="1400" dirty="0">
+                        <a:solidFill>
+                          <a:schemeClr val="bg1"/>
+                        </a:solidFill>
+                        <a:latin typeface="Microsoft YaHei" panose="020B0503020204020204" charset="-122"/>
+                        <a:ea typeface="Microsoft YaHei" panose="020B0503020204020204" charset="-122"/>
+                      </a:endParaRPr>
                     </a:p>
                   </a:txBody>
                   <a:tcPr anchor="ctr">
@@ -23609,11 +23917,18 @@
                           <a:solidFill>
                             <a:schemeClr val="bg1"/>
                           </a:solidFill>
-                          <a:latin typeface="微软雅黑" panose="020B0503020204020204" charset="-122"/>
-                          <a:ea typeface="微软雅黑" panose="020B0503020204020204" charset="-122"/>
+                          <a:latin typeface="Microsoft YaHei" panose="020B0503020204020204" charset="-122"/>
+                          <a:ea typeface="Microsoft YaHei" panose="020B0503020204020204" charset="-122"/>
                         </a:rPr>
                         <a:t>.03</a:t>
                       </a:r>
+                      <a:endParaRPr lang="en-US" altLang="en-US" sz="1400" dirty="0">
+                        <a:solidFill>
+                          <a:schemeClr val="bg1"/>
+                        </a:solidFill>
+                        <a:latin typeface="Microsoft YaHei" panose="020B0503020204020204" charset="-122"/>
+                        <a:ea typeface="Microsoft YaHei" panose="020B0503020204020204" charset="-122"/>
+                      </a:endParaRPr>
                     </a:p>
                   </a:txBody>
                   <a:tcPr anchor="ctr">
@@ -23624,11 +23939,6 @@
                     </a:solidFill>
                   </a:tcPr>
                 </a:tc>
-                <a:extLst>
-                  <a:ext uri="{0D108BD9-81ED-4DB2-BD59-A6C34878D82A}">
-                    <a16:rowId xmlns:a16="http://schemas.microsoft.com/office/drawing/2014/main" val="10001"/>
-                  </a:ext>
-                </a:extLst>
               </a:tr>
               <a:tr h="540000">
                 <a:tc>
@@ -23644,11 +23954,18 @@
                           <a:solidFill>
                             <a:schemeClr val="bg1"/>
                           </a:solidFill>
-                          <a:latin typeface="微软雅黑" panose="020B0503020204020204" charset="-122"/>
-                          <a:ea typeface="微软雅黑" panose="020B0503020204020204" charset="-122"/>
+                          <a:latin typeface="Microsoft YaHei" panose="020B0503020204020204" charset="-122"/>
+                          <a:ea typeface="Microsoft YaHei" panose="020B0503020204020204" charset="-122"/>
                         </a:rPr>
                         <a:t>love</a:t>
                       </a:r>
+                      <a:endParaRPr lang="en-US" altLang="en-US" sz="1400">
+                        <a:solidFill>
+                          <a:schemeClr val="bg1"/>
+                        </a:solidFill>
+                        <a:latin typeface="Microsoft YaHei" panose="020B0503020204020204" charset="-122"/>
+                        <a:ea typeface="Microsoft YaHei" panose="020B0503020204020204" charset="-122"/>
+                      </a:endParaRPr>
                     </a:p>
                   </a:txBody>
                   <a:tcPr anchor="ctr"/>
@@ -23666,11 +23983,18 @@
                           <a:solidFill>
                             <a:schemeClr val="bg1"/>
                           </a:solidFill>
-                          <a:latin typeface="微软雅黑" panose="020B0503020204020204" charset="-122"/>
-                          <a:ea typeface="微软雅黑" panose="020B0503020204020204" charset="-122"/>
+                          <a:latin typeface="Microsoft YaHei" panose="020B0503020204020204" charset="-122"/>
+                          <a:ea typeface="Microsoft YaHei" panose="020B0503020204020204" charset="-122"/>
                         </a:rPr>
                         <a:t>.05</a:t>
                       </a:r>
+                      <a:endParaRPr lang="en-US" altLang="en-US" sz="1400" dirty="0">
+                        <a:solidFill>
+                          <a:schemeClr val="bg1"/>
+                        </a:solidFill>
+                        <a:latin typeface="Microsoft YaHei" panose="020B0503020204020204" charset="-122"/>
+                        <a:ea typeface="Microsoft YaHei" panose="020B0503020204020204" charset="-122"/>
+                      </a:endParaRPr>
                     </a:p>
                   </a:txBody>
                   <a:tcPr anchor="ctr">
@@ -23694,11 +24018,18 @@
                           <a:solidFill>
                             <a:schemeClr val="bg1"/>
                           </a:solidFill>
-                          <a:latin typeface="微软雅黑" panose="020B0503020204020204" charset="-122"/>
-                          <a:ea typeface="微软雅黑" panose="020B0503020204020204" charset="-122"/>
+                          <a:latin typeface="Microsoft YaHei" panose="020B0503020204020204" charset="-122"/>
+                          <a:ea typeface="Microsoft YaHei" panose="020B0503020204020204" charset="-122"/>
                         </a:rPr>
                         <a:t>.90</a:t>
                       </a:r>
+                      <a:endParaRPr lang="en-US" altLang="en-US" sz="1400" dirty="0">
+                        <a:solidFill>
+                          <a:schemeClr val="bg1"/>
+                        </a:solidFill>
+                        <a:latin typeface="Microsoft YaHei" panose="020B0503020204020204" charset="-122"/>
+                        <a:ea typeface="Microsoft YaHei" panose="020B0503020204020204" charset="-122"/>
+                      </a:endParaRPr>
                     </a:p>
                   </a:txBody>
                   <a:tcPr anchor="ctr">
@@ -23722,11 +24053,18 @@
                           <a:solidFill>
                             <a:schemeClr val="bg1"/>
                           </a:solidFill>
-                          <a:latin typeface="微软雅黑" panose="020B0503020204020204" charset="-122"/>
-                          <a:ea typeface="微软雅黑" panose="020B0503020204020204" charset="-122"/>
+                          <a:latin typeface="Microsoft YaHei" panose="020B0503020204020204" charset="-122"/>
+                          <a:ea typeface="Microsoft YaHei" panose="020B0503020204020204" charset="-122"/>
                         </a:rPr>
                         <a:t>.05</a:t>
                       </a:r>
+                      <a:endParaRPr lang="en-US" altLang="en-US" sz="1400" dirty="0">
+                        <a:solidFill>
+                          <a:schemeClr val="bg1"/>
+                        </a:solidFill>
+                        <a:latin typeface="Microsoft YaHei" panose="020B0503020204020204" charset="-122"/>
+                        <a:ea typeface="Microsoft YaHei" panose="020B0503020204020204" charset="-122"/>
+                      </a:endParaRPr>
                     </a:p>
                   </a:txBody>
                   <a:tcPr anchor="ctr">
@@ -23737,11 +24075,6 @@
                     </a:solidFill>
                   </a:tcPr>
                 </a:tc>
-                <a:extLst>
-                  <a:ext uri="{0D108BD9-81ED-4DB2-BD59-A6C34878D82A}">
-                    <a16:rowId xmlns:a16="http://schemas.microsoft.com/office/drawing/2014/main" val="10002"/>
-                  </a:ext>
-                </a:extLst>
               </a:tr>
               <a:tr h="540000">
                 <a:tc>
@@ -23757,11 +24090,18 @@
                           <a:solidFill>
                             <a:schemeClr val="bg1"/>
                           </a:solidFill>
-                          <a:latin typeface="微软雅黑" panose="020B0503020204020204" charset="-122"/>
-                          <a:ea typeface="微软雅黑" panose="020B0503020204020204" charset="-122"/>
+                          <a:latin typeface="Microsoft YaHei" panose="020B0503020204020204" charset="-122"/>
+                          <a:ea typeface="Microsoft YaHei" panose="020B0503020204020204" charset="-122"/>
                         </a:rPr>
                         <a:t>you</a:t>
                       </a:r>
+                      <a:endParaRPr lang="en-US" altLang="en-US" sz="1400">
+                        <a:solidFill>
+                          <a:schemeClr val="bg1"/>
+                        </a:solidFill>
+                        <a:latin typeface="Microsoft YaHei" panose="020B0503020204020204" charset="-122"/>
+                        <a:ea typeface="Microsoft YaHei" panose="020B0503020204020204" charset="-122"/>
+                      </a:endParaRPr>
                     </a:p>
                   </a:txBody>
                   <a:tcPr anchor="ctr"/>
@@ -23779,11 +24119,18 @@
                           <a:solidFill>
                             <a:schemeClr val="bg1"/>
                           </a:solidFill>
-                          <a:latin typeface="微软雅黑" panose="020B0503020204020204" charset="-122"/>
-                          <a:ea typeface="微软雅黑" panose="020B0503020204020204" charset="-122"/>
+                          <a:latin typeface="Microsoft YaHei" panose="020B0503020204020204" charset="-122"/>
+                          <a:ea typeface="Microsoft YaHei" panose="020B0503020204020204" charset="-122"/>
                         </a:rPr>
                         <a:t>.09</a:t>
                       </a:r>
+                      <a:endParaRPr lang="en-US" altLang="en-US" sz="1400" dirty="0">
+                        <a:solidFill>
+                          <a:schemeClr val="bg1"/>
+                        </a:solidFill>
+                        <a:latin typeface="Microsoft YaHei" panose="020B0503020204020204" charset="-122"/>
+                        <a:ea typeface="Microsoft YaHei" panose="020B0503020204020204" charset="-122"/>
+                      </a:endParaRPr>
                     </a:p>
                   </a:txBody>
                   <a:tcPr anchor="ctr">
@@ -23807,11 +24154,18 @@
                           <a:solidFill>
                             <a:schemeClr val="bg1"/>
                           </a:solidFill>
-                          <a:latin typeface="微软雅黑" panose="020B0503020204020204" charset="-122"/>
-                          <a:ea typeface="微软雅黑" panose="020B0503020204020204" charset="-122"/>
+                          <a:latin typeface="Microsoft YaHei" panose="020B0503020204020204" charset="-122"/>
+                          <a:ea typeface="Microsoft YaHei" panose="020B0503020204020204" charset="-122"/>
                         </a:rPr>
                         <a:t>.12</a:t>
                       </a:r>
+                      <a:endParaRPr lang="en-US" altLang="en-US" sz="1400" dirty="0">
+                        <a:solidFill>
+                          <a:schemeClr val="bg1"/>
+                        </a:solidFill>
+                        <a:latin typeface="Microsoft YaHei" panose="020B0503020204020204" charset="-122"/>
+                        <a:ea typeface="Microsoft YaHei" panose="020B0503020204020204" charset="-122"/>
+                      </a:endParaRPr>
                     </a:p>
                   </a:txBody>
                   <a:tcPr anchor="ctr">
@@ -23835,11 +24189,18 @@
                           <a:solidFill>
                             <a:schemeClr val="bg1"/>
                           </a:solidFill>
-                          <a:latin typeface="微软雅黑" panose="020B0503020204020204" charset="-122"/>
-                          <a:ea typeface="微软雅黑" panose="020B0503020204020204" charset="-122"/>
+                          <a:latin typeface="Microsoft YaHei" panose="020B0503020204020204" charset="-122"/>
+                          <a:ea typeface="Microsoft YaHei" panose="020B0503020204020204" charset="-122"/>
                         </a:rPr>
                         <a:t>.79</a:t>
                       </a:r>
+                      <a:endParaRPr lang="en-US" altLang="en-US" sz="1400" dirty="0">
+                        <a:solidFill>
+                          <a:schemeClr val="bg1"/>
+                        </a:solidFill>
+                        <a:latin typeface="Microsoft YaHei" panose="020B0503020204020204" charset="-122"/>
+                        <a:ea typeface="Microsoft YaHei" panose="020B0503020204020204" charset="-122"/>
+                      </a:endParaRPr>
                     </a:p>
                   </a:txBody>
                   <a:tcPr anchor="ctr">
@@ -23850,11 +24211,6 @@
                     </a:solidFill>
                   </a:tcPr>
                 </a:tc>
-                <a:extLst>
-                  <a:ext uri="{0D108BD9-81ED-4DB2-BD59-A6C34878D82A}">
-                    <a16:rowId xmlns:a16="http://schemas.microsoft.com/office/drawing/2014/main" val="10003"/>
-                  </a:ext>
-                </a:extLst>
               </a:tr>
             </a:tbl>
           </a:graphicData>
@@ -23884,34 +24240,10 @@
                 <a:tableStyleId>{2D5ABB26-0587-4C30-8999-92F81FD0307C}</a:tableStyleId>
               </a:tblPr>
               <a:tblGrid>
-                <a:gridCol w="778510">
-                  <a:extLst>
-                    <a:ext uri="{9D8B030D-6E8A-4147-A177-3AD203B41FA5}">
-                      <a16:colId xmlns:a16="http://schemas.microsoft.com/office/drawing/2014/main" val="20000"/>
-                    </a:ext>
-                  </a:extLst>
-                </a:gridCol>
-                <a:gridCol w="540000">
-                  <a:extLst>
-                    <a:ext uri="{9D8B030D-6E8A-4147-A177-3AD203B41FA5}">
-                      <a16:colId xmlns:a16="http://schemas.microsoft.com/office/drawing/2014/main" val="20001"/>
-                    </a:ext>
-                  </a:extLst>
-                </a:gridCol>
-                <a:gridCol w="540000">
-                  <a:extLst>
-                    <a:ext uri="{9D8B030D-6E8A-4147-A177-3AD203B41FA5}">
-                      <a16:colId xmlns:a16="http://schemas.microsoft.com/office/drawing/2014/main" val="20002"/>
-                    </a:ext>
-                  </a:extLst>
-                </a:gridCol>
-                <a:gridCol w="540000">
-                  <a:extLst>
-                    <a:ext uri="{9D8B030D-6E8A-4147-A177-3AD203B41FA5}">
-                      <a16:colId xmlns:a16="http://schemas.microsoft.com/office/drawing/2014/main" val="20003"/>
-                    </a:ext>
-                  </a:extLst>
-                </a:gridCol>
+                <a:gridCol w="778510"/>
+                <a:gridCol w="540000"/>
+                <a:gridCol w="540000"/>
+                <a:gridCol w="540000"/>
               </a:tblGrid>
               <a:tr h="540000">
                 <a:tc>
@@ -23926,8 +24258,8 @@
                         <a:solidFill>
                           <a:schemeClr val="bg1"/>
                         </a:solidFill>
-                        <a:latin typeface="微软雅黑" panose="020B0503020204020204" charset="-122"/>
-                        <a:ea typeface="微软雅黑" panose="020B0503020204020204" charset="-122"/>
+                        <a:latin typeface="Microsoft YaHei" panose="020B0503020204020204" charset="-122"/>
+                        <a:ea typeface="Microsoft YaHei" panose="020B0503020204020204" charset="-122"/>
                       </a:endParaRPr>
                     </a:p>
                   </a:txBody>
@@ -23965,11 +24297,18 @@
                           <a:solidFill>
                             <a:schemeClr val="bg1"/>
                           </a:solidFill>
-                          <a:latin typeface="微软雅黑" panose="020B0503020204020204" charset="-122"/>
-                          <a:ea typeface="微软雅黑" panose="020B0503020204020204" charset="-122"/>
+                          <a:latin typeface="Microsoft YaHei" panose="020B0503020204020204" charset="-122"/>
+                          <a:ea typeface="Microsoft YaHei" panose="020B0503020204020204" charset="-122"/>
                         </a:rPr>
                         <a:t>我</a:t>
                       </a:r>
+                      <a:endParaRPr lang="en-US" altLang="en-US" sz="1400">
+                        <a:solidFill>
+                          <a:schemeClr val="bg1"/>
+                        </a:solidFill>
+                        <a:latin typeface="Microsoft YaHei" panose="020B0503020204020204" charset="-122"/>
+                        <a:ea typeface="Microsoft YaHei" panose="020B0503020204020204" charset="-122"/>
+                      </a:endParaRPr>
                     </a:p>
                   </a:txBody>
                   <a:tcPr anchor="ctr">
@@ -24006,11 +24345,18 @@
                           <a:solidFill>
                             <a:schemeClr val="bg1"/>
                           </a:solidFill>
-                          <a:latin typeface="微软雅黑" panose="020B0503020204020204" charset="-122"/>
-                          <a:ea typeface="微软雅黑" panose="020B0503020204020204" charset="-122"/>
+                          <a:latin typeface="Microsoft YaHei" panose="020B0503020204020204" charset="-122"/>
+                          <a:ea typeface="Microsoft YaHei" panose="020B0503020204020204" charset="-122"/>
                         </a:rPr>
                         <a:t>爱</a:t>
                       </a:r>
+                      <a:endParaRPr lang="en-US" altLang="en-US" sz="1400">
+                        <a:solidFill>
+                          <a:schemeClr val="bg1"/>
+                        </a:solidFill>
+                        <a:latin typeface="Microsoft YaHei" panose="020B0503020204020204" charset="-122"/>
+                        <a:ea typeface="Microsoft YaHei" panose="020B0503020204020204" charset="-122"/>
+                      </a:endParaRPr>
                     </a:p>
                   </a:txBody>
                   <a:tcPr anchor="ctr">
@@ -24047,11 +24393,18 @@
                           <a:solidFill>
                             <a:schemeClr val="bg1"/>
                           </a:solidFill>
-                          <a:latin typeface="微软雅黑" panose="020B0503020204020204" charset="-122"/>
-                          <a:ea typeface="微软雅黑" panose="020B0503020204020204" charset="-122"/>
+                          <a:latin typeface="Microsoft YaHei" panose="020B0503020204020204" charset="-122"/>
+                          <a:ea typeface="Microsoft YaHei" panose="020B0503020204020204" charset="-122"/>
                         </a:rPr>
                         <a:t>你</a:t>
                       </a:r>
+                      <a:endParaRPr lang="en-US" altLang="en-US" sz="1400">
+                        <a:solidFill>
+                          <a:schemeClr val="bg1"/>
+                        </a:solidFill>
+                        <a:latin typeface="Microsoft YaHei" panose="020B0503020204020204" charset="-122"/>
+                        <a:ea typeface="Microsoft YaHei" panose="020B0503020204020204" charset="-122"/>
+                      </a:endParaRPr>
                     </a:p>
                   </a:txBody>
                   <a:tcPr anchor="ctr">
@@ -24075,11 +24428,6 @@
                     </a:lnBlToTr>
                   </a:tcPr>
                 </a:tc>
-                <a:extLst>
-                  <a:ext uri="{0D108BD9-81ED-4DB2-BD59-A6C34878D82A}">
-                    <a16:rowId xmlns:a16="http://schemas.microsoft.com/office/drawing/2014/main" val="10000"/>
-                  </a:ext>
-                </a:extLst>
               </a:tr>
               <a:tr h="540000">
                 <a:tc>
@@ -24095,11 +24443,18 @@
                           <a:solidFill>
                             <a:schemeClr val="bg1"/>
                           </a:solidFill>
-                          <a:latin typeface="微软雅黑" panose="020B0503020204020204" charset="-122"/>
-                          <a:ea typeface="微软雅黑" panose="020B0503020204020204" charset="-122"/>
+                          <a:latin typeface="Microsoft YaHei" panose="020B0503020204020204" charset="-122"/>
+                          <a:ea typeface="Microsoft YaHei" panose="020B0503020204020204" charset="-122"/>
                         </a:rPr>
                         <a:t>je</a:t>
                       </a:r>
+                      <a:endParaRPr lang="en-US" altLang="en-US" sz="1400" dirty="0">
+                        <a:solidFill>
+                          <a:schemeClr val="bg1"/>
+                        </a:solidFill>
+                        <a:latin typeface="Microsoft YaHei" panose="020B0503020204020204" charset="-122"/>
+                        <a:ea typeface="Microsoft YaHei" panose="020B0503020204020204" charset="-122"/>
+                      </a:endParaRPr>
                     </a:p>
                   </a:txBody>
                   <a:tcPr anchor="ctr">
@@ -24136,11 +24491,18 @@
                           <a:solidFill>
                             <a:schemeClr val="bg1"/>
                           </a:solidFill>
-                          <a:latin typeface="微软雅黑" panose="020B0503020204020204" charset="-122"/>
-                          <a:ea typeface="微软雅黑" panose="020B0503020204020204" charset="-122"/>
+                          <a:latin typeface="Microsoft YaHei" panose="020B0503020204020204" charset="-122"/>
+                          <a:ea typeface="Microsoft YaHei" panose="020B0503020204020204" charset="-122"/>
                         </a:rPr>
                         <a:t>.94</a:t>
                       </a:r>
+                      <a:endParaRPr lang="en-US" altLang="en-US" sz="1400" dirty="0">
+                        <a:solidFill>
+                          <a:schemeClr val="bg1"/>
+                        </a:solidFill>
+                        <a:latin typeface="Microsoft YaHei" panose="020B0503020204020204" charset="-122"/>
+                        <a:ea typeface="Microsoft YaHei" panose="020B0503020204020204" charset="-122"/>
+                      </a:endParaRPr>
                     </a:p>
                   </a:txBody>
                   <a:tcPr anchor="ctr">
@@ -24182,11 +24544,18 @@
                           <a:solidFill>
                             <a:schemeClr val="bg1"/>
                           </a:solidFill>
-                          <a:latin typeface="微软雅黑" panose="020B0503020204020204" charset="-122"/>
-                          <a:ea typeface="微软雅黑" panose="020B0503020204020204" charset="-122"/>
+                          <a:latin typeface="Microsoft YaHei" panose="020B0503020204020204" charset="-122"/>
+                          <a:ea typeface="Microsoft YaHei" panose="020B0503020204020204" charset="-122"/>
                         </a:rPr>
                         <a:t>.02</a:t>
                       </a:r>
+                      <a:endParaRPr lang="en-US" altLang="en-US" sz="1400" dirty="0">
+                        <a:solidFill>
+                          <a:schemeClr val="bg1"/>
+                        </a:solidFill>
+                        <a:latin typeface="Microsoft YaHei" panose="020B0503020204020204" charset="-122"/>
+                        <a:ea typeface="Microsoft YaHei" panose="020B0503020204020204" charset="-122"/>
+                      </a:endParaRPr>
                     </a:p>
                   </a:txBody>
                   <a:tcPr anchor="ctr">
@@ -24228,11 +24597,18 @@
                           <a:solidFill>
                             <a:schemeClr val="bg1"/>
                           </a:solidFill>
-                          <a:latin typeface="微软雅黑" panose="020B0503020204020204" charset="-122"/>
-                          <a:ea typeface="微软雅黑" panose="020B0503020204020204" charset="-122"/>
+                          <a:latin typeface="Microsoft YaHei" panose="020B0503020204020204" charset="-122"/>
+                          <a:ea typeface="Microsoft YaHei" panose="020B0503020204020204" charset="-122"/>
                         </a:rPr>
                         <a:t>.04</a:t>
                       </a:r>
+                      <a:endParaRPr lang="en-US" altLang="en-US" sz="1400" dirty="0">
+                        <a:solidFill>
+                          <a:schemeClr val="bg1"/>
+                        </a:solidFill>
+                        <a:latin typeface="Microsoft YaHei" panose="020B0503020204020204" charset="-122"/>
+                        <a:ea typeface="Microsoft YaHei" panose="020B0503020204020204" charset="-122"/>
+                      </a:endParaRPr>
                     </a:p>
                   </a:txBody>
                   <a:tcPr anchor="ctr">
@@ -24261,11 +24637,6 @@
                     </a:solidFill>
                   </a:tcPr>
                 </a:tc>
-                <a:extLst>
-                  <a:ext uri="{0D108BD9-81ED-4DB2-BD59-A6C34878D82A}">
-                    <a16:rowId xmlns:a16="http://schemas.microsoft.com/office/drawing/2014/main" val="10001"/>
-                  </a:ext>
-                </a:extLst>
               </a:tr>
               <a:tr h="540000">
                 <a:tc>
@@ -24281,11 +24652,18 @@
                           <a:solidFill>
                             <a:schemeClr val="bg1"/>
                           </a:solidFill>
-                          <a:latin typeface="微软雅黑" panose="020B0503020204020204" charset="-122"/>
-                          <a:ea typeface="微软雅黑" panose="020B0503020204020204" charset="-122"/>
+                          <a:latin typeface="Microsoft YaHei" panose="020B0503020204020204" charset="-122"/>
+                          <a:ea typeface="Microsoft YaHei" panose="020B0503020204020204" charset="-122"/>
                         </a:rPr>
                         <a:t>t'</a:t>
                       </a:r>
+                      <a:endParaRPr lang="en-US" altLang="en-US" sz="1400" dirty="0">
+                        <a:solidFill>
+                          <a:schemeClr val="bg1"/>
+                        </a:solidFill>
+                        <a:latin typeface="Microsoft YaHei" panose="020B0503020204020204" charset="-122"/>
+                        <a:ea typeface="Microsoft YaHei" panose="020B0503020204020204" charset="-122"/>
+                      </a:endParaRPr>
                     </a:p>
                   </a:txBody>
                   <a:tcPr anchor="ctr">
@@ -24322,11 +24700,18 @@
                           <a:solidFill>
                             <a:schemeClr val="bg1"/>
                           </a:solidFill>
-                          <a:latin typeface="微软雅黑" panose="020B0503020204020204" charset="-122"/>
-                          <a:ea typeface="微软雅黑" panose="020B0503020204020204" charset="-122"/>
+                          <a:latin typeface="Microsoft YaHei" panose="020B0503020204020204" charset="-122"/>
+                          <a:ea typeface="Microsoft YaHei" panose="020B0503020204020204" charset="-122"/>
                         </a:rPr>
                         <a:t>.11</a:t>
                       </a:r>
+                      <a:endParaRPr lang="en-US" altLang="en-US" sz="1400" dirty="0">
+                        <a:solidFill>
+                          <a:schemeClr val="bg1"/>
+                        </a:solidFill>
+                        <a:latin typeface="Microsoft YaHei" panose="020B0503020204020204" charset="-122"/>
+                        <a:ea typeface="Microsoft YaHei" panose="020B0503020204020204" charset="-122"/>
+                      </a:endParaRPr>
                     </a:p>
                   </a:txBody>
                   <a:tcPr anchor="ctr">
@@ -24368,11 +24753,18 @@
                           <a:solidFill>
                             <a:schemeClr val="bg1"/>
                           </a:solidFill>
-                          <a:latin typeface="微软雅黑" panose="020B0503020204020204" charset="-122"/>
-                          <a:ea typeface="微软雅黑" panose="020B0503020204020204" charset="-122"/>
+                          <a:latin typeface="Microsoft YaHei" panose="020B0503020204020204" charset="-122"/>
+                          <a:ea typeface="Microsoft YaHei" panose="020B0503020204020204" charset="-122"/>
                         </a:rPr>
                         <a:t>.01</a:t>
                       </a:r>
+                      <a:endParaRPr lang="en-US" altLang="en-US" sz="1400" dirty="0">
+                        <a:solidFill>
+                          <a:schemeClr val="bg1"/>
+                        </a:solidFill>
+                        <a:latin typeface="Microsoft YaHei" panose="020B0503020204020204" charset="-122"/>
+                        <a:ea typeface="Microsoft YaHei" panose="020B0503020204020204" charset="-122"/>
+                      </a:endParaRPr>
                     </a:p>
                   </a:txBody>
                   <a:tcPr anchor="ctr">
@@ -24414,11 +24806,18 @@
                           <a:solidFill>
                             <a:schemeClr val="bg1"/>
                           </a:solidFill>
-                          <a:latin typeface="微软雅黑" panose="020B0503020204020204" charset="-122"/>
-                          <a:ea typeface="微软雅黑" panose="020B0503020204020204" charset="-122"/>
+                          <a:latin typeface="Microsoft YaHei" panose="020B0503020204020204" charset="-122"/>
+                          <a:ea typeface="Microsoft YaHei" panose="020B0503020204020204" charset="-122"/>
                         </a:rPr>
                         <a:t>.88</a:t>
                       </a:r>
+                      <a:endParaRPr lang="en-US" altLang="en-US" sz="1400" dirty="0">
+                        <a:solidFill>
+                          <a:schemeClr val="bg1"/>
+                        </a:solidFill>
+                        <a:latin typeface="Microsoft YaHei" panose="020B0503020204020204" charset="-122"/>
+                        <a:ea typeface="Microsoft YaHei" panose="020B0503020204020204" charset="-122"/>
+                      </a:endParaRPr>
                     </a:p>
                   </a:txBody>
                   <a:tcPr anchor="ctr">
@@ -24447,11 +24846,6 @@
                     </a:solidFill>
                   </a:tcPr>
                 </a:tc>
-                <a:extLst>
-                  <a:ext uri="{0D108BD9-81ED-4DB2-BD59-A6C34878D82A}">
-                    <a16:rowId xmlns:a16="http://schemas.microsoft.com/office/drawing/2014/main" val="10002"/>
-                  </a:ext>
-                </a:extLst>
               </a:tr>
               <a:tr h="540000">
                 <a:tc>
@@ -24467,11 +24861,18 @@
                           <a:solidFill>
                             <a:schemeClr val="bg1"/>
                           </a:solidFill>
-                          <a:latin typeface="微软雅黑" panose="020B0503020204020204" charset="-122"/>
-                          <a:ea typeface="微软雅黑" panose="020B0503020204020204" charset="-122"/>
+                          <a:latin typeface="Microsoft YaHei" panose="020B0503020204020204" charset="-122"/>
+                          <a:ea typeface="Microsoft YaHei" panose="020B0503020204020204" charset="-122"/>
                         </a:rPr>
                         <a:t>aime</a:t>
                       </a:r>
+                      <a:endParaRPr lang="en-US" altLang="en-US" sz="1400">
+                        <a:solidFill>
+                          <a:schemeClr val="bg1"/>
+                        </a:solidFill>
+                        <a:latin typeface="Microsoft YaHei" panose="020B0503020204020204" charset="-122"/>
+                        <a:ea typeface="Microsoft YaHei" panose="020B0503020204020204" charset="-122"/>
+                      </a:endParaRPr>
                     </a:p>
                   </a:txBody>
                   <a:tcPr anchor="ctr">
@@ -24508,11 +24909,18 @@
                           <a:solidFill>
                             <a:schemeClr val="bg1"/>
                           </a:solidFill>
-                          <a:latin typeface="微软雅黑" panose="020B0503020204020204" charset="-122"/>
-                          <a:ea typeface="微软雅黑" panose="020B0503020204020204" charset="-122"/>
+                          <a:latin typeface="Microsoft YaHei" panose="020B0503020204020204" charset="-122"/>
+                          <a:ea typeface="Microsoft YaHei" panose="020B0503020204020204" charset="-122"/>
                         </a:rPr>
                         <a:t>.03</a:t>
                       </a:r>
+                      <a:endParaRPr lang="en-US" altLang="en-US" sz="1400" dirty="0">
+                        <a:solidFill>
+                          <a:schemeClr val="bg1"/>
+                        </a:solidFill>
+                        <a:latin typeface="Microsoft YaHei" panose="020B0503020204020204" charset="-122"/>
+                        <a:ea typeface="Microsoft YaHei" panose="020B0503020204020204" charset="-122"/>
+                      </a:endParaRPr>
                     </a:p>
                   </a:txBody>
                   <a:tcPr anchor="ctr">
@@ -24554,11 +24962,18 @@
                           <a:solidFill>
                             <a:schemeClr val="bg1"/>
                           </a:solidFill>
-                          <a:latin typeface="微软雅黑" panose="020B0503020204020204" charset="-122"/>
-                          <a:ea typeface="微软雅黑" panose="020B0503020204020204" charset="-122"/>
+                          <a:latin typeface="Microsoft YaHei" panose="020B0503020204020204" charset="-122"/>
+                          <a:ea typeface="Microsoft YaHei" panose="020B0503020204020204" charset="-122"/>
                         </a:rPr>
                         <a:t>.95</a:t>
                       </a:r>
+                      <a:endParaRPr lang="en-US" altLang="en-US" sz="1400" dirty="0">
+                        <a:solidFill>
+                          <a:schemeClr val="bg1"/>
+                        </a:solidFill>
+                        <a:latin typeface="Microsoft YaHei" panose="020B0503020204020204" charset="-122"/>
+                        <a:ea typeface="Microsoft YaHei" panose="020B0503020204020204" charset="-122"/>
+                      </a:endParaRPr>
                     </a:p>
                   </a:txBody>
                   <a:tcPr anchor="ctr">
@@ -24600,11 +25015,18 @@
                           <a:solidFill>
                             <a:schemeClr val="bg1"/>
                           </a:solidFill>
-                          <a:latin typeface="微软雅黑" panose="020B0503020204020204" charset="-122"/>
-                          <a:ea typeface="微软雅黑" panose="020B0503020204020204" charset="-122"/>
+                          <a:latin typeface="Microsoft YaHei" panose="020B0503020204020204" charset="-122"/>
+                          <a:ea typeface="Microsoft YaHei" panose="020B0503020204020204" charset="-122"/>
                         </a:rPr>
                         <a:t>.02</a:t>
                       </a:r>
+                      <a:endParaRPr lang="en-US" altLang="en-US" sz="1400" dirty="0">
+                        <a:solidFill>
+                          <a:schemeClr val="bg1"/>
+                        </a:solidFill>
+                        <a:latin typeface="Microsoft YaHei" panose="020B0503020204020204" charset="-122"/>
+                        <a:ea typeface="Microsoft YaHei" panose="020B0503020204020204" charset="-122"/>
+                      </a:endParaRPr>
                     </a:p>
                   </a:txBody>
                   <a:tcPr anchor="ctr">
@@ -24633,11 +25055,6 @@
                     </a:solidFill>
                   </a:tcPr>
                 </a:tc>
-                <a:extLst>
-                  <a:ext uri="{0D108BD9-81ED-4DB2-BD59-A6C34878D82A}">
-                    <a16:rowId xmlns:a16="http://schemas.microsoft.com/office/drawing/2014/main" val="10003"/>
-                  </a:ext>
-                </a:extLst>
               </a:tr>
             </a:tbl>
           </a:graphicData>
@@ -24697,12 +25114,21 @@
                   <a:srgbClr val="FFFFFF"/>
                 </a:solidFill>
                 <a:latin typeface="Noto Sans SC" panose="020B0200000000000000" charset="-122"/>
-                <a:ea typeface="宋体" panose="02010600030101010101" pitchFamily="2" charset="-122"/>
+                <a:ea typeface="SimSun" pitchFamily="2" charset="-122"/>
                 <a:cs typeface="Noto Sans SC" panose="020B0200000000000000" charset="-122"/>
                 <a:sym typeface="Noto Sans SC" panose="020B0200000000000000" charset="-122"/>
               </a:rPr>
               <a:t>中译法</a:t>
             </a:r>
+            <a:endParaRPr lang="zh-CN" sz="1600" i="0" u="none" strike="noStrike">
+              <a:solidFill>
+                <a:srgbClr val="FFFFFF"/>
+              </a:solidFill>
+              <a:latin typeface="Noto Sans SC" panose="020B0200000000000000" charset="-122"/>
+              <a:ea typeface="SimSun" pitchFamily="2" charset="-122"/>
+              <a:cs typeface="Noto Sans SC" panose="020B0200000000000000" charset="-122"/>
+              <a:sym typeface="Noto Sans SC" panose="020B0200000000000000" charset="-122"/>
+            </a:endParaRPr>
           </a:p>
         </p:txBody>
       </p:sp>
@@ -24760,12 +25186,21 @@
                   <a:schemeClr val="bg1"/>
                 </a:solidFill>
                 <a:latin typeface="Noto Sans SC" panose="020B0200000000000000" charset="-122"/>
-                <a:ea typeface="宋体" panose="02010600030101010101" pitchFamily="2" charset="-122"/>
+                <a:ea typeface="SimSun" pitchFamily="2" charset="-122"/>
                 <a:cs typeface="Noto Sans SC" panose="020B0200000000000000" charset="-122"/>
                 <a:sym typeface="+mn-ea"/>
               </a:rPr>
               <a:t>中译英</a:t>
             </a:r>
+            <a:endParaRPr lang="zh-CN" sz="1600" i="0" u="none" strike="noStrike">
+              <a:solidFill>
+                <a:schemeClr val="bg1"/>
+              </a:solidFill>
+              <a:latin typeface="Noto Sans SC" panose="020B0200000000000000" charset="-122"/>
+              <a:ea typeface="SimSun" pitchFamily="2" charset="-122"/>
+              <a:cs typeface="Noto Sans SC" panose="020B0200000000000000" charset="-122"/>
+              <a:sym typeface="+mn-ea"/>
+            </a:endParaRPr>
           </a:p>
         </p:txBody>
       </p:sp>
@@ -25163,6 +25598,7 @@
               <a:rPr lang="zh-CN" altLang="en-US"/>
               <a:t>结合注意力的自回归生成：一个例子</a:t>
             </a:r>
+            <a:endParaRPr lang="zh-CN" altLang="en-US"/>
           </a:p>
         </p:txBody>
       </p:sp>
@@ -25183,7 +25619,6 @@
           <a:p>
             <a:fld id="{49AE70B2-8BF9-45C0-BB95-33D1B9D3A854}" type="slidenum">
               <a:rPr lang="zh-CN" altLang="en-US" smtClean="0"/>
-              <a:t>7</a:t>
             </a:fld>
             <a:endParaRPr lang="en-US" altLang="zh-CN"/>
           </a:p>
@@ -25206,69 +25641,15 @@
                 <a:tableStyleId>{5C22544A-7EE6-4342-B048-85BDC9FD1C3A}</a:tableStyleId>
               </a:tblPr>
               <a:tblGrid>
-                <a:gridCol w="1013460">
-                  <a:extLst>
-                    <a:ext uri="{9D8B030D-6E8A-4147-A177-3AD203B41FA5}">
-                      <a16:colId xmlns:a16="http://schemas.microsoft.com/office/drawing/2014/main" val="20000"/>
-                    </a:ext>
-                  </a:extLst>
-                </a:gridCol>
-                <a:gridCol w="1013460">
-                  <a:extLst>
-                    <a:ext uri="{9D8B030D-6E8A-4147-A177-3AD203B41FA5}">
-                      <a16:colId xmlns:a16="http://schemas.microsoft.com/office/drawing/2014/main" val="20001"/>
-                    </a:ext>
-                  </a:extLst>
-                </a:gridCol>
-                <a:gridCol w="1013460">
-                  <a:extLst>
-                    <a:ext uri="{9D8B030D-6E8A-4147-A177-3AD203B41FA5}">
-                      <a16:colId xmlns:a16="http://schemas.microsoft.com/office/drawing/2014/main" val="20002"/>
-                    </a:ext>
-                  </a:extLst>
-                </a:gridCol>
-                <a:gridCol w="1013460">
-                  <a:extLst>
-                    <a:ext uri="{9D8B030D-6E8A-4147-A177-3AD203B41FA5}">
-                      <a16:colId xmlns:a16="http://schemas.microsoft.com/office/drawing/2014/main" val="20003"/>
-                    </a:ext>
-                  </a:extLst>
-                </a:gridCol>
-                <a:gridCol w="1013460">
-                  <a:extLst>
-                    <a:ext uri="{9D8B030D-6E8A-4147-A177-3AD203B41FA5}">
-                      <a16:colId xmlns:a16="http://schemas.microsoft.com/office/drawing/2014/main" val="20004"/>
-                    </a:ext>
-                  </a:extLst>
-                </a:gridCol>
-                <a:gridCol w="1013460">
-                  <a:extLst>
-                    <a:ext uri="{9D8B030D-6E8A-4147-A177-3AD203B41FA5}">
-                      <a16:colId xmlns:a16="http://schemas.microsoft.com/office/drawing/2014/main" val="20005"/>
-                    </a:ext>
-                  </a:extLst>
-                </a:gridCol>
-                <a:gridCol w="1013460">
-                  <a:extLst>
-                    <a:ext uri="{9D8B030D-6E8A-4147-A177-3AD203B41FA5}">
-                      <a16:colId xmlns:a16="http://schemas.microsoft.com/office/drawing/2014/main" val="20006"/>
-                    </a:ext>
-                  </a:extLst>
-                </a:gridCol>
-                <a:gridCol w="1013460">
-                  <a:extLst>
-                    <a:ext uri="{9D8B030D-6E8A-4147-A177-3AD203B41FA5}">
-                      <a16:colId xmlns:a16="http://schemas.microsoft.com/office/drawing/2014/main" val="20007"/>
-                    </a:ext>
-                  </a:extLst>
-                </a:gridCol>
-                <a:gridCol w="1013460">
-                  <a:extLst>
-                    <a:ext uri="{9D8B030D-6E8A-4147-A177-3AD203B41FA5}">
-                      <a16:colId xmlns:a16="http://schemas.microsoft.com/office/drawing/2014/main" val="20008"/>
-                    </a:ext>
-                  </a:extLst>
-                </a:gridCol>
+                <a:gridCol w="1013460"/>
+                <a:gridCol w="1013460"/>
+                <a:gridCol w="1013460"/>
+                <a:gridCol w="1013460"/>
+                <a:gridCol w="1013460"/>
+                <a:gridCol w="1013460"/>
+                <a:gridCol w="1013460"/>
+                <a:gridCol w="1013460"/>
+                <a:gridCol w="1013460"/>
               </a:tblGrid>
               <a:tr h="381000">
                 <a:tc>
@@ -25283,6 +25664,7 @@
                         <a:rPr lang="zh-CN" altLang="en-US"/>
                         <a:t>港科大</a:t>
                       </a:r>
+                      <a:endParaRPr lang="zh-CN" altLang="en-US"/>
                     </a:p>
                   </a:txBody>
                   <a:tcPr anchor="ctr">
@@ -25329,6 +25711,7 @@
                         <a:rPr lang="zh-CN" altLang="en-US"/>
                         <a:t>在</a:t>
                       </a:r>
+                      <a:endParaRPr lang="zh-CN" altLang="en-US"/>
                     </a:p>
                   </a:txBody>
                   <a:tcPr anchor="ctr">
@@ -25375,6 +25758,7 @@
                         <a:rPr lang="zh-CN" altLang="en-US"/>
                         <a:t>今年</a:t>
                       </a:r>
+                      <a:endParaRPr lang="zh-CN" altLang="en-US"/>
                     </a:p>
                   </a:txBody>
                   <a:tcPr anchor="ctr">
@@ -25421,6 +25805,7 @@
                         <a:rPr lang="zh-CN" altLang="en-US"/>
                         <a:t>排名</a:t>
                       </a:r>
+                      <a:endParaRPr lang="zh-CN" altLang="en-US"/>
                     </a:p>
                   </a:txBody>
                   <a:tcPr anchor="ctr">
@@ -25467,6 +25852,7 @@
                         <a:rPr lang="zh-CN" altLang="en-US"/>
                         <a:t>第</a:t>
                       </a:r>
+                      <a:endParaRPr lang="zh-CN" altLang="en-US"/>
                     </a:p>
                   </a:txBody>
                   <a:tcPr anchor="ctr">
@@ -25513,6 +25899,7 @@
                         <a:rPr lang="en-US" altLang="zh-CN"/>
                         <a:t>33</a:t>
                       </a:r>
+                      <a:endParaRPr lang="en-US" altLang="zh-CN"/>
                     </a:p>
                   </a:txBody>
                   <a:tcPr anchor="ctr">
@@ -25559,6 +25946,7 @@
                         <a:rPr lang="zh-CN" altLang="en-US"/>
                         <a:t>位</a:t>
                       </a:r>
+                      <a:endParaRPr lang="zh-CN" altLang="en-US"/>
                     </a:p>
                   </a:txBody>
                   <a:tcPr anchor="ctr">
@@ -25605,6 +25993,7 @@
                         <a:rPr lang="zh-CN" altLang="en-US"/>
                         <a:t>。</a:t>
                       </a:r>
+                      <a:endParaRPr lang="zh-CN" altLang="en-US"/>
                     </a:p>
                   </a:txBody>
                   <a:tcPr anchor="ctr">
@@ -25682,11 +26071,6 @@
                     <a:noFill/>
                   </a:tcPr>
                 </a:tc>
-                <a:extLst>
-                  <a:ext uri="{0D108BD9-81ED-4DB2-BD59-A6C34878D82A}">
-                    <a16:rowId xmlns:a16="http://schemas.microsoft.com/office/drawing/2014/main" val="10000"/>
-                  </a:ext>
-                </a:extLst>
               </a:tr>
             </a:tbl>
           </a:graphicData>
@@ -25709,34 +26093,10 @@
                 <a:tableStyleId>{5C22544A-7EE6-4342-B048-85BDC9FD1C3A}</a:tableStyleId>
               </a:tblPr>
               <a:tblGrid>
-                <a:gridCol w="1013460">
-                  <a:extLst>
-                    <a:ext uri="{9D8B030D-6E8A-4147-A177-3AD203B41FA5}">
-                      <a16:colId xmlns:a16="http://schemas.microsoft.com/office/drawing/2014/main" val="20000"/>
-                    </a:ext>
-                  </a:extLst>
-                </a:gridCol>
-                <a:gridCol w="1013460">
-                  <a:extLst>
-                    <a:ext uri="{9D8B030D-6E8A-4147-A177-3AD203B41FA5}">
-                      <a16:colId xmlns:a16="http://schemas.microsoft.com/office/drawing/2014/main" val="20001"/>
-                    </a:ext>
-                  </a:extLst>
-                </a:gridCol>
-                <a:gridCol w="1013460">
-                  <a:extLst>
-                    <a:ext uri="{9D8B030D-6E8A-4147-A177-3AD203B41FA5}">
-                      <a16:colId xmlns:a16="http://schemas.microsoft.com/office/drawing/2014/main" val="20002"/>
-                    </a:ext>
-                  </a:extLst>
-                </a:gridCol>
-                <a:gridCol w="1013460">
-                  <a:extLst>
-                    <a:ext uri="{9D8B030D-6E8A-4147-A177-3AD203B41FA5}">
-                      <a16:colId xmlns:a16="http://schemas.microsoft.com/office/drawing/2014/main" val="20003"/>
-                    </a:ext>
-                  </a:extLst>
-                </a:gridCol>
+                <a:gridCol w="1013460"/>
+                <a:gridCol w="1013460"/>
+                <a:gridCol w="1013460"/>
+                <a:gridCol w="1013460"/>
               </a:tblGrid>
               <a:tr h="381000">
                 <a:tc>
@@ -25751,6 +26111,7 @@
                         <a:rPr lang="zh-CN" altLang="en-US"/>
                         <a:t>港科大</a:t>
                       </a:r>
+                      <a:endParaRPr lang="zh-CN" altLang="en-US"/>
                     </a:p>
                   </a:txBody>
                   <a:tcPr anchor="ctr">
@@ -25797,6 +26158,7 @@
                         <a:rPr lang="zh-CN" altLang="en-US"/>
                         <a:t>在</a:t>
                       </a:r>
+                      <a:endParaRPr lang="zh-CN" altLang="en-US"/>
                     </a:p>
                   </a:txBody>
                   <a:tcPr anchor="ctr">
@@ -25843,6 +26205,7 @@
                         <a:rPr lang="zh-CN" altLang="en-US"/>
                         <a:t>今年</a:t>
                       </a:r>
+                      <a:endParaRPr lang="zh-CN" altLang="en-US"/>
                     </a:p>
                   </a:txBody>
                   <a:tcPr anchor="ctr">
@@ -25920,11 +26283,6 @@
                     <a:noFill/>
                   </a:tcPr>
                 </a:tc>
-                <a:extLst>
-                  <a:ext uri="{0D108BD9-81ED-4DB2-BD59-A6C34878D82A}">
-                    <a16:rowId xmlns:a16="http://schemas.microsoft.com/office/drawing/2014/main" val="10000"/>
-                  </a:ext>
-                </a:extLst>
               </a:tr>
             </a:tbl>
           </a:graphicData>
@@ -25947,41 +26305,11 @@
                 <a:tableStyleId>{5C22544A-7EE6-4342-B048-85BDC9FD1C3A}</a:tableStyleId>
               </a:tblPr>
               <a:tblGrid>
-                <a:gridCol w="1013460">
-                  <a:extLst>
-                    <a:ext uri="{9D8B030D-6E8A-4147-A177-3AD203B41FA5}">
-                      <a16:colId xmlns:a16="http://schemas.microsoft.com/office/drawing/2014/main" val="20000"/>
-                    </a:ext>
-                  </a:extLst>
-                </a:gridCol>
-                <a:gridCol w="1013460">
-                  <a:extLst>
-                    <a:ext uri="{9D8B030D-6E8A-4147-A177-3AD203B41FA5}">
-                      <a16:colId xmlns:a16="http://schemas.microsoft.com/office/drawing/2014/main" val="20001"/>
-                    </a:ext>
-                  </a:extLst>
-                </a:gridCol>
-                <a:gridCol w="1013460">
-                  <a:extLst>
-                    <a:ext uri="{9D8B030D-6E8A-4147-A177-3AD203B41FA5}">
-                      <a16:colId xmlns:a16="http://schemas.microsoft.com/office/drawing/2014/main" val="20002"/>
-                    </a:ext>
-                  </a:extLst>
-                </a:gridCol>
-                <a:gridCol w="1013460">
-                  <a:extLst>
-                    <a:ext uri="{9D8B030D-6E8A-4147-A177-3AD203B41FA5}">
-                      <a16:colId xmlns:a16="http://schemas.microsoft.com/office/drawing/2014/main" val="20003"/>
-                    </a:ext>
-                  </a:extLst>
-                </a:gridCol>
-                <a:gridCol w="1013460">
-                  <a:extLst>
-                    <a:ext uri="{9D8B030D-6E8A-4147-A177-3AD203B41FA5}">
-                      <a16:colId xmlns:a16="http://schemas.microsoft.com/office/drawing/2014/main" val="20004"/>
-                    </a:ext>
-                  </a:extLst>
-                </a:gridCol>
+                <a:gridCol w="1013460"/>
+                <a:gridCol w="1013460"/>
+                <a:gridCol w="1013460"/>
+                <a:gridCol w="1013460"/>
+                <a:gridCol w="1013460"/>
               </a:tblGrid>
               <a:tr h="381000">
                 <a:tc>
@@ -25996,6 +26324,7 @@
                         <a:rPr lang="zh-CN" altLang="en-US"/>
                         <a:t>港科大</a:t>
                       </a:r>
+                      <a:endParaRPr lang="zh-CN" altLang="en-US"/>
                     </a:p>
                   </a:txBody>
                   <a:tcPr anchor="ctr">
@@ -26042,6 +26371,7 @@
                         <a:rPr lang="zh-CN" altLang="en-US"/>
                         <a:t>在</a:t>
                       </a:r>
+                      <a:endParaRPr lang="zh-CN" altLang="en-US"/>
                     </a:p>
                   </a:txBody>
                   <a:tcPr anchor="ctr">
@@ -26088,6 +26418,7 @@
                         <a:rPr lang="zh-CN" altLang="en-US"/>
                         <a:t>今年</a:t>
                       </a:r>
+                      <a:endParaRPr lang="zh-CN" altLang="en-US"/>
                     </a:p>
                   </a:txBody>
                   <a:tcPr anchor="ctr">
@@ -26134,6 +26465,7 @@
                         <a:rPr lang="zh-CN" altLang="en-US"/>
                         <a:t>排名</a:t>
                       </a:r>
+                      <a:endParaRPr lang="zh-CN" altLang="en-US"/>
                     </a:p>
                   </a:txBody>
                   <a:tcPr anchor="ctr">
@@ -26211,11 +26543,6 @@
                     <a:noFill/>
                   </a:tcPr>
                 </a:tc>
-                <a:extLst>
-                  <a:ext uri="{0D108BD9-81ED-4DB2-BD59-A6C34878D82A}">
-                    <a16:rowId xmlns:a16="http://schemas.microsoft.com/office/drawing/2014/main" val="10000"/>
-                  </a:ext>
-                </a:extLst>
               </a:tr>
             </a:tbl>
           </a:graphicData>
@@ -26238,48 +26565,12 @@
                 <a:tableStyleId>{5C22544A-7EE6-4342-B048-85BDC9FD1C3A}</a:tableStyleId>
               </a:tblPr>
               <a:tblGrid>
-                <a:gridCol w="1013460">
-                  <a:extLst>
-                    <a:ext uri="{9D8B030D-6E8A-4147-A177-3AD203B41FA5}">
-                      <a16:colId xmlns:a16="http://schemas.microsoft.com/office/drawing/2014/main" val="20000"/>
-                    </a:ext>
-                  </a:extLst>
-                </a:gridCol>
-                <a:gridCol w="1013460">
-                  <a:extLst>
-                    <a:ext uri="{9D8B030D-6E8A-4147-A177-3AD203B41FA5}">
-                      <a16:colId xmlns:a16="http://schemas.microsoft.com/office/drawing/2014/main" val="20001"/>
-                    </a:ext>
-                  </a:extLst>
-                </a:gridCol>
-                <a:gridCol w="1013460">
-                  <a:extLst>
-                    <a:ext uri="{9D8B030D-6E8A-4147-A177-3AD203B41FA5}">
-                      <a16:colId xmlns:a16="http://schemas.microsoft.com/office/drawing/2014/main" val="20002"/>
-                    </a:ext>
-                  </a:extLst>
-                </a:gridCol>
-                <a:gridCol w="1013460">
-                  <a:extLst>
-                    <a:ext uri="{9D8B030D-6E8A-4147-A177-3AD203B41FA5}">
-                      <a16:colId xmlns:a16="http://schemas.microsoft.com/office/drawing/2014/main" val="20003"/>
-                    </a:ext>
-                  </a:extLst>
-                </a:gridCol>
-                <a:gridCol w="1013460">
-                  <a:extLst>
-                    <a:ext uri="{9D8B030D-6E8A-4147-A177-3AD203B41FA5}">
-                      <a16:colId xmlns:a16="http://schemas.microsoft.com/office/drawing/2014/main" val="20004"/>
-                    </a:ext>
-                  </a:extLst>
-                </a:gridCol>
-                <a:gridCol w="1013460">
-                  <a:extLst>
-                    <a:ext uri="{9D8B030D-6E8A-4147-A177-3AD203B41FA5}">
-                      <a16:colId xmlns:a16="http://schemas.microsoft.com/office/drawing/2014/main" val="20005"/>
-                    </a:ext>
-                  </a:extLst>
-                </a:gridCol>
+                <a:gridCol w="1013460"/>
+                <a:gridCol w="1013460"/>
+                <a:gridCol w="1013460"/>
+                <a:gridCol w="1013460"/>
+                <a:gridCol w="1013460"/>
+                <a:gridCol w="1013460"/>
               </a:tblGrid>
               <a:tr h="381000">
                 <a:tc>
@@ -26294,6 +26585,7 @@
                         <a:rPr lang="zh-CN" altLang="en-US"/>
                         <a:t>港科大</a:t>
                       </a:r>
+                      <a:endParaRPr lang="zh-CN" altLang="en-US"/>
                     </a:p>
                   </a:txBody>
                   <a:tcPr anchor="ctr">
@@ -26340,6 +26632,7 @@
                         <a:rPr lang="zh-CN" altLang="en-US"/>
                         <a:t>在</a:t>
                       </a:r>
+                      <a:endParaRPr lang="zh-CN" altLang="en-US"/>
                     </a:p>
                   </a:txBody>
                   <a:tcPr anchor="ctr">
@@ -26386,6 +26679,7 @@
                         <a:rPr lang="zh-CN" altLang="en-US"/>
                         <a:t>今年</a:t>
                       </a:r>
+                      <a:endParaRPr lang="zh-CN" altLang="en-US"/>
                     </a:p>
                   </a:txBody>
                   <a:tcPr anchor="ctr">
@@ -26432,6 +26726,7 @@
                         <a:rPr lang="zh-CN" altLang="en-US"/>
                         <a:t>排名</a:t>
                       </a:r>
+                      <a:endParaRPr lang="zh-CN" altLang="en-US"/>
                     </a:p>
                   </a:txBody>
                   <a:tcPr anchor="ctr">
@@ -26478,6 +26773,7 @@
                         <a:rPr lang="zh-CN" altLang="en-US"/>
                         <a:t>第</a:t>
                       </a:r>
+                      <a:endParaRPr lang="zh-CN" altLang="en-US"/>
                     </a:p>
                   </a:txBody>
                   <a:tcPr anchor="ctr">
@@ -26555,11 +26851,6 @@
                     <a:noFill/>
                   </a:tcPr>
                 </a:tc>
-                <a:extLst>
-                  <a:ext uri="{0D108BD9-81ED-4DB2-BD59-A6C34878D82A}">
-                    <a16:rowId xmlns:a16="http://schemas.microsoft.com/office/drawing/2014/main" val="10000"/>
-                  </a:ext>
-                </a:extLst>
               </a:tr>
             </a:tbl>
           </a:graphicData>
@@ -26582,55 +26873,13 @@
                 <a:tableStyleId>{5C22544A-7EE6-4342-B048-85BDC9FD1C3A}</a:tableStyleId>
               </a:tblPr>
               <a:tblGrid>
-                <a:gridCol w="1013460">
-                  <a:extLst>
-                    <a:ext uri="{9D8B030D-6E8A-4147-A177-3AD203B41FA5}">
-                      <a16:colId xmlns:a16="http://schemas.microsoft.com/office/drawing/2014/main" val="20000"/>
-                    </a:ext>
-                  </a:extLst>
-                </a:gridCol>
-                <a:gridCol w="1013460">
-                  <a:extLst>
-                    <a:ext uri="{9D8B030D-6E8A-4147-A177-3AD203B41FA5}">
-                      <a16:colId xmlns:a16="http://schemas.microsoft.com/office/drawing/2014/main" val="20001"/>
-                    </a:ext>
-                  </a:extLst>
-                </a:gridCol>
-                <a:gridCol w="1013460">
-                  <a:extLst>
-                    <a:ext uri="{9D8B030D-6E8A-4147-A177-3AD203B41FA5}">
-                      <a16:colId xmlns:a16="http://schemas.microsoft.com/office/drawing/2014/main" val="20002"/>
-                    </a:ext>
-                  </a:extLst>
-                </a:gridCol>
-                <a:gridCol w="1013460">
-                  <a:extLst>
-                    <a:ext uri="{9D8B030D-6E8A-4147-A177-3AD203B41FA5}">
-                      <a16:colId xmlns:a16="http://schemas.microsoft.com/office/drawing/2014/main" val="20003"/>
-                    </a:ext>
-                  </a:extLst>
-                </a:gridCol>
-                <a:gridCol w="1013460">
-                  <a:extLst>
-                    <a:ext uri="{9D8B030D-6E8A-4147-A177-3AD203B41FA5}">
-                      <a16:colId xmlns:a16="http://schemas.microsoft.com/office/drawing/2014/main" val="20004"/>
-                    </a:ext>
-                  </a:extLst>
-                </a:gridCol>
-                <a:gridCol w="1013460">
-                  <a:extLst>
-                    <a:ext uri="{9D8B030D-6E8A-4147-A177-3AD203B41FA5}">
-                      <a16:colId xmlns:a16="http://schemas.microsoft.com/office/drawing/2014/main" val="20005"/>
-                    </a:ext>
-                  </a:extLst>
-                </a:gridCol>
-                <a:gridCol w="1013460">
-                  <a:extLst>
-                    <a:ext uri="{9D8B030D-6E8A-4147-A177-3AD203B41FA5}">
-                      <a16:colId xmlns:a16="http://schemas.microsoft.com/office/drawing/2014/main" val="20006"/>
-                    </a:ext>
-                  </a:extLst>
-                </a:gridCol>
+                <a:gridCol w="1013460"/>
+                <a:gridCol w="1013460"/>
+                <a:gridCol w="1013460"/>
+                <a:gridCol w="1013460"/>
+                <a:gridCol w="1013460"/>
+                <a:gridCol w="1013460"/>
+                <a:gridCol w="1013460"/>
               </a:tblGrid>
               <a:tr h="381000">
                 <a:tc>
@@ -26645,6 +26894,7 @@
                         <a:rPr lang="zh-CN" altLang="en-US"/>
                         <a:t>港科大</a:t>
                       </a:r>
+                      <a:endParaRPr lang="zh-CN" altLang="en-US"/>
                     </a:p>
                   </a:txBody>
                   <a:tcPr anchor="ctr">
@@ -26691,6 +26941,7 @@
                         <a:rPr lang="zh-CN" altLang="en-US"/>
                         <a:t>在</a:t>
                       </a:r>
+                      <a:endParaRPr lang="zh-CN" altLang="en-US"/>
                     </a:p>
                   </a:txBody>
                   <a:tcPr anchor="ctr">
@@ -26737,6 +26988,7 @@
                         <a:rPr lang="zh-CN" altLang="en-US"/>
                         <a:t>今年</a:t>
                       </a:r>
+                      <a:endParaRPr lang="zh-CN" altLang="en-US"/>
                     </a:p>
                   </a:txBody>
                   <a:tcPr anchor="ctr">
@@ -26783,6 +27035,7 @@
                         <a:rPr lang="zh-CN" altLang="en-US"/>
                         <a:t>排名</a:t>
                       </a:r>
+                      <a:endParaRPr lang="zh-CN" altLang="en-US"/>
                     </a:p>
                   </a:txBody>
                   <a:tcPr anchor="ctr">
@@ -26829,6 +27082,7 @@
                         <a:rPr lang="zh-CN" altLang="en-US"/>
                         <a:t>第</a:t>
                       </a:r>
+                      <a:endParaRPr lang="zh-CN" altLang="en-US"/>
                     </a:p>
                   </a:txBody>
                   <a:tcPr anchor="ctr">
@@ -26875,6 +27129,7 @@
                         <a:rPr lang="en-US" altLang="zh-CN"/>
                         <a:t>33</a:t>
                       </a:r>
+                      <a:endParaRPr lang="en-US" altLang="zh-CN"/>
                     </a:p>
                   </a:txBody>
                   <a:tcPr anchor="ctr">
@@ -26952,11 +27207,6 @@
                     <a:noFill/>
                   </a:tcPr>
                 </a:tc>
-                <a:extLst>
-                  <a:ext uri="{0D108BD9-81ED-4DB2-BD59-A6C34878D82A}">
-                    <a16:rowId xmlns:a16="http://schemas.microsoft.com/office/drawing/2014/main" val="10000"/>
-                  </a:ext>
-                </a:extLst>
               </a:tr>
             </a:tbl>
           </a:graphicData>
@@ -26979,62 +27229,14 @@
                 <a:tableStyleId>{5C22544A-7EE6-4342-B048-85BDC9FD1C3A}</a:tableStyleId>
               </a:tblPr>
               <a:tblGrid>
-                <a:gridCol w="1013460">
-                  <a:extLst>
-                    <a:ext uri="{9D8B030D-6E8A-4147-A177-3AD203B41FA5}">
-                      <a16:colId xmlns:a16="http://schemas.microsoft.com/office/drawing/2014/main" val="20000"/>
-                    </a:ext>
-                  </a:extLst>
-                </a:gridCol>
-                <a:gridCol w="1013460">
-                  <a:extLst>
-                    <a:ext uri="{9D8B030D-6E8A-4147-A177-3AD203B41FA5}">
-                      <a16:colId xmlns:a16="http://schemas.microsoft.com/office/drawing/2014/main" val="20001"/>
-                    </a:ext>
-                  </a:extLst>
-                </a:gridCol>
-                <a:gridCol w="1013460">
-                  <a:extLst>
-                    <a:ext uri="{9D8B030D-6E8A-4147-A177-3AD203B41FA5}">
-                      <a16:colId xmlns:a16="http://schemas.microsoft.com/office/drawing/2014/main" val="20002"/>
-                    </a:ext>
-                  </a:extLst>
-                </a:gridCol>
-                <a:gridCol w="1013460">
-                  <a:extLst>
-                    <a:ext uri="{9D8B030D-6E8A-4147-A177-3AD203B41FA5}">
-                      <a16:colId xmlns:a16="http://schemas.microsoft.com/office/drawing/2014/main" val="20003"/>
-                    </a:ext>
-                  </a:extLst>
-                </a:gridCol>
-                <a:gridCol w="1013460">
-                  <a:extLst>
-                    <a:ext uri="{9D8B030D-6E8A-4147-A177-3AD203B41FA5}">
-                      <a16:colId xmlns:a16="http://schemas.microsoft.com/office/drawing/2014/main" val="20004"/>
-                    </a:ext>
-                  </a:extLst>
-                </a:gridCol>
-                <a:gridCol w="1013460">
-                  <a:extLst>
-                    <a:ext uri="{9D8B030D-6E8A-4147-A177-3AD203B41FA5}">
-                      <a16:colId xmlns:a16="http://schemas.microsoft.com/office/drawing/2014/main" val="20005"/>
-                    </a:ext>
-                  </a:extLst>
-                </a:gridCol>
-                <a:gridCol w="1013460">
-                  <a:extLst>
-                    <a:ext uri="{9D8B030D-6E8A-4147-A177-3AD203B41FA5}">
-                      <a16:colId xmlns:a16="http://schemas.microsoft.com/office/drawing/2014/main" val="20006"/>
-                    </a:ext>
-                  </a:extLst>
-                </a:gridCol>
-                <a:gridCol w="1013460">
-                  <a:extLst>
-                    <a:ext uri="{9D8B030D-6E8A-4147-A177-3AD203B41FA5}">
-                      <a16:colId xmlns:a16="http://schemas.microsoft.com/office/drawing/2014/main" val="20007"/>
-                    </a:ext>
-                  </a:extLst>
-                </a:gridCol>
+                <a:gridCol w="1013460"/>
+                <a:gridCol w="1013460"/>
+                <a:gridCol w="1013460"/>
+                <a:gridCol w="1013460"/>
+                <a:gridCol w="1013460"/>
+                <a:gridCol w="1013460"/>
+                <a:gridCol w="1013460"/>
+                <a:gridCol w="1013460"/>
               </a:tblGrid>
               <a:tr h="381000">
                 <a:tc>
@@ -27049,6 +27251,7 @@
                         <a:rPr lang="zh-CN" altLang="en-US"/>
                         <a:t>港科大</a:t>
                       </a:r>
+                      <a:endParaRPr lang="zh-CN" altLang="en-US"/>
                     </a:p>
                   </a:txBody>
                   <a:tcPr anchor="ctr">
@@ -27095,6 +27298,7 @@
                         <a:rPr lang="zh-CN" altLang="en-US"/>
                         <a:t>在</a:t>
                       </a:r>
+                      <a:endParaRPr lang="zh-CN" altLang="en-US"/>
                     </a:p>
                   </a:txBody>
                   <a:tcPr anchor="ctr">
@@ -27141,6 +27345,7 @@
                         <a:rPr lang="zh-CN" altLang="en-US"/>
                         <a:t>今年</a:t>
                       </a:r>
+                      <a:endParaRPr lang="zh-CN" altLang="en-US"/>
                     </a:p>
                   </a:txBody>
                   <a:tcPr anchor="ctr">
@@ -27187,6 +27392,7 @@
                         <a:rPr lang="zh-CN" altLang="en-US"/>
                         <a:t>排名</a:t>
                       </a:r>
+                      <a:endParaRPr lang="zh-CN" altLang="en-US"/>
                     </a:p>
                   </a:txBody>
                   <a:tcPr anchor="ctr">
@@ -27233,6 +27439,7 @@
                         <a:rPr lang="zh-CN" altLang="en-US"/>
                         <a:t>第</a:t>
                       </a:r>
+                      <a:endParaRPr lang="zh-CN" altLang="en-US"/>
                     </a:p>
                   </a:txBody>
                   <a:tcPr anchor="ctr">
@@ -27279,6 +27486,7 @@
                         <a:rPr lang="en-US" altLang="zh-CN"/>
                         <a:t>33</a:t>
                       </a:r>
+                      <a:endParaRPr lang="en-US" altLang="zh-CN"/>
                     </a:p>
                   </a:txBody>
                   <a:tcPr anchor="ctr">
@@ -27325,6 +27533,7 @@
                         <a:rPr lang="zh-CN" altLang="en-US"/>
                         <a:t>位</a:t>
                       </a:r>
+                      <a:endParaRPr lang="zh-CN" altLang="en-US"/>
                     </a:p>
                   </a:txBody>
                   <a:tcPr anchor="ctr">
@@ -27402,11 +27611,6 @@
                     <a:noFill/>
                   </a:tcPr>
                 </a:tc>
-                <a:extLst>
-                  <a:ext uri="{0D108BD9-81ED-4DB2-BD59-A6C34878D82A}">
-                    <a16:rowId xmlns:a16="http://schemas.microsoft.com/office/drawing/2014/main" val="10000"/>
-                  </a:ext>
-                </a:extLst>
               </a:tr>
             </a:tbl>
           </a:graphicData>
@@ -27749,6 +27953,11 @@
               </a:rPr>
               <a:t>排名</a:t>
             </a:r>
+            <a:endParaRPr lang="zh-CN" altLang="en-US" b="1">
+              <a:solidFill>
+                <a:srgbClr val="69F0AE"/>
+              </a:solidFill>
+            </a:endParaRPr>
           </a:p>
         </p:txBody>
       </p:sp>
@@ -27783,6 +27992,11 @@
               </a:rPr>
               <a:t>第</a:t>
             </a:r>
+            <a:endParaRPr lang="zh-CN" altLang="en-US" b="1">
+              <a:solidFill>
+                <a:srgbClr val="69F0AE"/>
+              </a:solidFill>
+            </a:endParaRPr>
           </a:p>
         </p:txBody>
       </p:sp>
@@ -27817,6 +28031,11 @@
               </a:rPr>
               <a:t>33</a:t>
             </a:r>
+            <a:endParaRPr lang="en-US" altLang="zh-CN" b="1">
+              <a:solidFill>
+                <a:srgbClr val="69F0AE"/>
+              </a:solidFill>
+            </a:endParaRPr>
           </a:p>
         </p:txBody>
       </p:sp>
@@ -27851,6 +28070,11 @@
               </a:rPr>
               <a:t>位</a:t>
             </a:r>
+            <a:endParaRPr lang="zh-CN" altLang="en-US" b="1">
+              <a:solidFill>
+                <a:srgbClr val="69F0AE"/>
+              </a:solidFill>
+            </a:endParaRPr>
           </a:p>
         </p:txBody>
       </p:sp>
@@ -27885,6 +28109,11 @@
               </a:rPr>
               <a:t>。</a:t>
             </a:r>
+            <a:endParaRPr lang="zh-CN" altLang="en-US" b="1">
+              <a:solidFill>
+                <a:srgbClr val="69F0AE"/>
+              </a:solidFill>
+            </a:endParaRPr>
           </a:p>
         </p:txBody>
       </p:sp>
@@ -27919,6 +28148,11 @@
               </a:rPr>
               <a:t>&lt;|end|&gt;</a:t>
             </a:r>
+            <a:endParaRPr lang="en-US" altLang="zh-CN" sz="1400" b="1">
+              <a:solidFill>
+                <a:srgbClr val="69F0AE"/>
+              </a:solidFill>
+            </a:endParaRPr>
           </a:p>
         </p:txBody>
       </p:sp>
@@ -28881,6 +29115,7 @@
               <a:rPr lang="zh-CN" altLang="en-US"/>
               <a:t>注意力机制：既是武器，也是枷锁</a:t>
             </a:r>
+            <a:endParaRPr lang="zh-CN" altLang="en-US"/>
           </a:p>
         </p:txBody>
       </p:sp>
@@ -28910,6 +29145,7 @@
                   <a:rPr lang="zh-CN" altLang="en-US" dirty="0"/>
                   <a:t>计算量“黑洞”</a:t>
                 </a:r>
+                <a:endParaRPr lang="zh-CN" altLang="en-US" dirty="0"/>
               </a:p>
               <a:p>
                 <a:pPr lvl="1"/>
@@ -29022,6 +29258,10 @@
                   </a:rPr>
                   <a:t>在训练的过程中尤其需要大量计算</a:t>
                 </a:r>
+                <a:endParaRPr lang="zh-CN" altLang="en-US" dirty="0">
+                  <a:latin typeface="DejaVu Math TeX Gyre" panose="02000503000000000000" charset="0"/>
+                  <a:cs typeface="DejaVu Math TeX Gyre" panose="02000503000000000000" charset="0"/>
+                </a:endParaRPr>
               </a:p>
               <a:p>
                 <a:pPr lvl="1"/>
@@ -29102,6 +29342,10 @@
                   </a:rPr>
                   <a:t>年时间</a:t>
                 </a:r>
+                <a:endParaRPr lang="zh-CN" altLang="en-US" dirty="0">
+                  <a:latin typeface="DejaVu Math TeX Gyre" panose="02000503000000000000" charset="0"/>
+                  <a:cs typeface="DejaVu Math TeX Gyre" panose="02000503000000000000" charset="0"/>
+                </a:endParaRPr>
               </a:p>
             </p:txBody>
           </p:sp>
@@ -29111,7 +29355,7 @@
             <p:nvSpPr>
               <p:cNvPr id="3" name="内容占位符 2"/>
               <p:cNvSpPr>
-                <a:spLocks noGrp="1" noRot="1" noChangeAspect="1" noMove="1" noResize="1" noEditPoints="1" noAdjustHandles="1" noChangeArrowheads="1" noChangeShapeType="1" noTextEdit="1"/>
+                <a:spLocks noRot="1" noChangeAspect="1" noMove="1" noResize="1" noEditPoints="1" noAdjustHandles="1" noChangeArrowheads="1" noChangeShapeType="1" noTextEdit="1"/>
               </p:cNvSpPr>
               <p:nvPr>
                 <p:ph idx="1"/>
@@ -29122,10 +29366,10 @@
                 <a:off x="762000" y="1825625"/>
                 <a:ext cx="5400000" cy="4351655"/>
               </a:xfrm>
-              <a:blipFill>
-                <a:blip r:embed="rId3"/>
+              <a:blipFill rotWithShape="1">
+                <a:blip r:embed="rId1"/>
                 <a:stretch>
-                  <a:fillRect l="-1016"/>
+                  <a:fillRect r="11"/>
                 </a:stretch>
               </a:blipFill>
             </p:spPr>
@@ -29161,7 +29405,6 @@
           <a:p>
             <a:fld id="{49AE70B2-8BF9-45C0-BB95-33D1B9D3A854}" type="slidenum">
               <a:rPr lang="zh-CN" altLang="en-US" smtClean="0"/>
-              <a:t>8</a:t>
             </a:fld>
             <a:endParaRPr lang="en-US" altLang="zh-CN"/>
           </a:p>
@@ -29184,76 +29427,16 @@
                 <a:tableStyleId>{5C22544A-7EE6-4342-B048-85BDC9FD1C3A}</a:tableStyleId>
               </a:tblPr>
               <a:tblGrid>
-                <a:gridCol w="432000">
-                  <a:extLst>
-                    <a:ext uri="{9D8B030D-6E8A-4147-A177-3AD203B41FA5}">
-                      <a16:colId xmlns:a16="http://schemas.microsoft.com/office/drawing/2014/main" val="20000"/>
-                    </a:ext>
-                  </a:extLst>
-                </a:gridCol>
-                <a:gridCol w="432000">
-                  <a:extLst>
-                    <a:ext uri="{9D8B030D-6E8A-4147-A177-3AD203B41FA5}">
-                      <a16:colId xmlns:a16="http://schemas.microsoft.com/office/drawing/2014/main" val="20001"/>
-                    </a:ext>
-                  </a:extLst>
-                </a:gridCol>
-                <a:gridCol w="432000">
-                  <a:extLst>
-                    <a:ext uri="{9D8B030D-6E8A-4147-A177-3AD203B41FA5}">
-                      <a16:colId xmlns:a16="http://schemas.microsoft.com/office/drawing/2014/main" val="20002"/>
-                    </a:ext>
-                  </a:extLst>
-                </a:gridCol>
-                <a:gridCol w="432000">
-                  <a:extLst>
-                    <a:ext uri="{9D8B030D-6E8A-4147-A177-3AD203B41FA5}">
-                      <a16:colId xmlns:a16="http://schemas.microsoft.com/office/drawing/2014/main" val="20003"/>
-                    </a:ext>
-                  </a:extLst>
-                </a:gridCol>
-                <a:gridCol w="432000">
-                  <a:extLst>
-                    <a:ext uri="{9D8B030D-6E8A-4147-A177-3AD203B41FA5}">
-                      <a16:colId xmlns:a16="http://schemas.microsoft.com/office/drawing/2014/main" val="20004"/>
-                    </a:ext>
-                  </a:extLst>
-                </a:gridCol>
-                <a:gridCol w="432000">
-                  <a:extLst>
-                    <a:ext uri="{9D8B030D-6E8A-4147-A177-3AD203B41FA5}">
-                      <a16:colId xmlns:a16="http://schemas.microsoft.com/office/drawing/2014/main" val="20005"/>
-                    </a:ext>
-                  </a:extLst>
-                </a:gridCol>
-                <a:gridCol w="432000">
-                  <a:extLst>
-                    <a:ext uri="{9D8B030D-6E8A-4147-A177-3AD203B41FA5}">
-                      <a16:colId xmlns:a16="http://schemas.microsoft.com/office/drawing/2014/main" val="20006"/>
-                    </a:ext>
-                  </a:extLst>
-                </a:gridCol>
-                <a:gridCol w="432000">
-                  <a:extLst>
-                    <a:ext uri="{9D8B030D-6E8A-4147-A177-3AD203B41FA5}">
-                      <a16:colId xmlns:a16="http://schemas.microsoft.com/office/drawing/2014/main" val="20007"/>
-                    </a:ext>
-                  </a:extLst>
-                </a:gridCol>
-                <a:gridCol w="432000">
-                  <a:extLst>
-                    <a:ext uri="{9D8B030D-6E8A-4147-A177-3AD203B41FA5}">
-                      <a16:colId xmlns:a16="http://schemas.microsoft.com/office/drawing/2014/main" val="20008"/>
-                    </a:ext>
-                  </a:extLst>
-                </a:gridCol>
-                <a:gridCol w="432000">
-                  <a:extLst>
-                    <a:ext uri="{9D8B030D-6E8A-4147-A177-3AD203B41FA5}">
-                      <a16:colId xmlns:a16="http://schemas.microsoft.com/office/drawing/2014/main" val="20009"/>
-                    </a:ext>
-                  </a:extLst>
-                </a:gridCol>
+                <a:gridCol w="432000"/>
+                <a:gridCol w="432000"/>
+                <a:gridCol w="432000"/>
+                <a:gridCol w="432000"/>
+                <a:gridCol w="432000"/>
+                <a:gridCol w="432000"/>
+                <a:gridCol w="432000"/>
+                <a:gridCol w="432000"/>
+                <a:gridCol w="432000"/>
+                <a:gridCol w="432000"/>
               </a:tblGrid>
               <a:tr h="432000">
                 <a:tc>
@@ -29315,6 +29498,11 @@
                         </a:rPr>
                         <a:t>港科大</a:t>
                       </a:r>
+                      <a:endParaRPr lang="zh-CN" altLang="en-US" sz="800" b="0">
+                        <a:solidFill>
+                          <a:schemeClr val="bg1"/>
+                        </a:solidFill>
+                      </a:endParaRPr>
                     </a:p>
                   </a:txBody>
                   <a:tcPr anchor="ctr">
@@ -29361,6 +29549,11 @@
                         </a:rPr>
                         <a:t>在</a:t>
                       </a:r>
+                      <a:endParaRPr lang="zh-CN" altLang="en-US" sz="800" b="0">
+                        <a:solidFill>
+                          <a:schemeClr val="bg1"/>
+                        </a:solidFill>
+                      </a:endParaRPr>
                     </a:p>
                   </a:txBody>
                   <a:tcPr anchor="ctr">
@@ -29407,6 +29600,11 @@
                         </a:rPr>
                         <a:t>今年</a:t>
                       </a:r>
+                      <a:endParaRPr lang="zh-CN" altLang="en-US" sz="800" b="0">
+                        <a:solidFill>
+                          <a:schemeClr val="bg1"/>
+                        </a:solidFill>
+                      </a:endParaRPr>
                     </a:p>
                   </a:txBody>
                   <a:tcPr anchor="ctr">
@@ -29453,6 +29651,11 @@
                         </a:rPr>
                         <a:t>排名</a:t>
                       </a:r>
+                      <a:endParaRPr lang="zh-CN" altLang="en-US" sz="800" b="0">
+                        <a:solidFill>
+                          <a:schemeClr val="bg1"/>
+                        </a:solidFill>
+                      </a:endParaRPr>
                     </a:p>
                   </a:txBody>
                   <a:tcPr anchor="ctr">
@@ -29499,6 +29702,11 @@
                         </a:rPr>
                         <a:t>第</a:t>
                       </a:r>
+                      <a:endParaRPr lang="zh-CN" altLang="en-US" sz="800" b="0">
+                        <a:solidFill>
+                          <a:schemeClr val="bg1"/>
+                        </a:solidFill>
+                      </a:endParaRPr>
                     </a:p>
                   </a:txBody>
                   <a:tcPr anchor="ctr">
@@ -29545,6 +29753,11 @@
                         </a:rPr>
                         <a:t>44</a:t>
                       </a:r>
+                      <a:endParaRPr lang="en-US" altLang="zh-CN" sz="800" b="0">
+                        <a:solidFill>
+                          <a:schemeClr val="bg1"/>
+                        </a:solidFill>
+                      </a:endParaRPr>
                     </a:p>
                   </a:txBody>
                   <a:tcPr anchor="ctr">
@@ -29591,6 +29804,11 @@
                         </a:rPr>
                         <a:t>位</a:t>
                       </a:r>
+                      <a:endParaRPr lang="zh-CN" altLang="en-US" sz="800" b="0">
+                        <a:solidFill>
+                          <a:schemeClr val="bg1"/>
+                        </a:solidFill>
+                      </a:endParaRPr>
                     </a:p>
                   </a:txBody>
                   <a:tcPr anchor="ctr">
@@ -29637,6 +29855,11 @@
                         </a:rPr>
                         <a:t>。</a:t>
                       </a:r>
+                      <a:endParaRPr lang="zh-CN" altLang="en-US" sz="800" b="0">
+                        <a:solidFill>
+                          <a:schemeClr val="bg1"/>
+                        </a:solidFill>
+                      </a:endParaRPr>
                     </a:p>
                   </a:txBody>
                   <a:tcPr anchor="ctr">
@@ -29683,6 +29906,11 @@
                         </a:rPr>
                         <a:t>&lt;|end&gt;</a:t>
                       </a:r>
+                      <a:endParaRPr lang="en-US" altLang="zh-CN" sz="800" b="0">
+                        <a:solidFill>
+                          <a:schemeClr val="bg1"/>
+                        </a:solidFill>
+                      </a:endParaRPr>
                     </a:p>
                   </a:txBody>
                   <a:tcPr anchor="ctr">
@@ -29713,11 +29941,6 @@
                     <a:noFill/>
                   </a:tcPr>
                 </a:tc>
-                <a:extLst>
-                  <a:ext uri="{0D108BD9-81ED-4DB2-BD59-A6C34878D82A}">
-                    <a16:rowId xmlns:a16="http://schemas.microsoft.com/office/drawing/2014/main" val="10000"/>
-                  </a:ext>
-                </a:extLst>
               </a:tr>
               <a:tr h="432000">
                 <a:tc>
@@ -29736,6 +29959,11 @@
                         </a:rPr>
                         <a:t>港科大</a:t>
                       </a:r>
+                      <a:endParaRPr lang="zh-CN" altLang="en-US" sz="800">
+                        <a:solidFill>
+                          <a:schemeClr val="bg1"/>
+                        </a:solidFill>
+                      </a:endParaRPr>
                     </a:p>
                   </a:txBody>
                   <a:tcPr anchor="ctr">
@@ -30157,11 +30385,6 @@
                     <a:noFill/>
                   </a:tcPr>
                 </a:tc>
-                <a:extLst>
-                  <a:ext uri="{0D108BD9-81ED-4DB2-BD59-A6C34878D82A}">
-                    <a16:rowId xmlns:a16="http://schemas.microsoft.com/office/drawing/2014/main" val="10001"/>
-                  </a:ext>
-                </a:extLst>
               </a:tr>
               <a:tr h="432000">
                 <a:tc>
@@ -30180,6 +30403,11 @@
                         </a:rPr>
                         <a:t>在</a:t>
                       </a:r>
+                      <a:endParaRPr lang="zh-CN" altLang="en-US" sz="800">
+                        <a:solidFill>
+                          <a:schemeClr val="bg1"/>
+                        </a:solidFill>
+                      </a:endParaRPr>
                     </a:p>
                   </a:txBody>
                   <a:tcPr anchor="ctr">
@@ -30605,11 +30833,6 @@
                     <a:noFill/>
                   </a:tcPr>
                 </a:tc>
-                <a:extLst>
-                  <a:ext uri="{0D108BD9-81ED-4DB2-BD59-A6C34878D82A}">
-                    <a16:rowId xmlns:a16="http://schemas.microsoft.com/office/drawing/2014/main" val="10002"/>
-                  </a:ext>
-                </a:extLst>
               </a:tr>
               <a:tr h="432000">
                 <a:tc>
@@ -30628,6 +30851,11 @@
                         </a:rPr>
                         <a:t>今年</a:t>
                       </a:r>
+                      <a:endParaRPr lang="zh-CN" altLang="en-US" sz="800">
+                        <a:solidFill>
+                          <a:schemeClr val="bg1"/>
+                        </a:solidFill>
+                      </a:endParaRPr>
                     </a:p>
                   </a:txBody>
                   <a:tcPr anchor="ctr">
@@ -31057,11 +31285,6 @@
                     <a:noFill/>
                   </a:tcPr>
                 </a:tc>
-                <a:extLst>
-                  <a:ext uri="{0D108BD9-81ED-4DB2-BD59-A6C34878D82A}">
-                    <a16:rowId xmlns:a16="http://schemas.microsoft.com/office/drawing/2014/main" val="10003"/>
-                  </a:ext>
-                </a:extLst>
               </a:tr>
               <a:tr h="432000">
                 <a:tc>
@@ -31080,6 +31303,11 @@
                         </a:rPr>
                         <a:t>排名</a:t>
                       </a:r>
+                      <a:endParaRPr lang="zh-CN" altLang="en-US" sz="800">
+                        <a:solidFill>
+                          <a:schemeClr val="bg1"/>
+                        </a:solidFill>
+                      </a:endParaRPr>
                     </a:p>
                   </a:txBody>
                   <a:tcPr anchor="ctr">
@@ -31513,11 +31741,6 @@
                     <a:noFill/>
                   </a:tcPr>
                 </a:tc>
-                <a:extLst>
-                  <a:ext uri="{0D108BD9-81ED-4DB2-BD59-A6C34878D82A}">
-                    <a16:rowId xmlns:a16="http://schemas.microsoft.com/office/drawing/2014/main" val="10004"/>
-                  </a:ext>
-                </a:extLst>
               </a:tr>
               <a:tr h="432000">
                 <a:tc>
@@ -31536,6 +31759,11 @@
                         </a:rPr>
                         <a:t>第</a:t>
                       </a:r>
+                      <a:endParaRPr lang="zh-CN" altLang="en-US" sz="800">
+                        <a:solidFill>
+                          <a:schemeClr val="bg1"/>
+                        </a:solidFill>
+                      </a:endParaRPr>
                     </a:p>
                   </a:txBody>
                   <a:tcPr anchor="ctr">
@@ -31973,11 +32201,6 @@
                     <a:noFill/>
                   </a:tcPr>
                 </a:tc>
-                <a:extLst>
-                  <a:ext uri="{0D108BD9-81ED-4DB2-BD59-A6C34878D82A}">
-                    <a16:rowId xmlns:a16="http://schemas.microsoft.com/office/drawing/2014/main" val="10005"/>
-                  </a:ext>
-                </a:extLst>
               </a:tr>
               <a:tr h="432000">
                 <a:tc>
@@ -31996,6 +32219,11 @@
                         </a:rPr>
                         <a:t>44</a:t>
                       </a:r>
+                      <a:endParaRPr lang="en-US" altLang="zh-CN" sz="800">
+                        <a:solidFill>
+                          <a:schemeClr val="bg1"/>
+                        </a:solidFill>
+                      </a:endParaRPr>
                     </a:p>
                   </a:txBody>
                   <a:tcPr anchor="ctr">
@@ -32437,11 +32665,6 @@
                     <a:noFill/>
                   </a:tcPr>
                 </a:tc>
-                <a:extLst>
-                  <a:ext uri="{0D108BD9-81ED-4DB2-BD59-A6C34878D82A}">
-                    <a16:rowId xmlns:a16="http://schemas.microsoft.com/office/drawing/2014/main" val="10006"/>
-                  </a:ext>
-                </a:extLst>
               </a:tr>
               <a:tr h="432000">
                 <a:tc>
@@ -32460,6 +32683,11 @@
                         </a:rPr>
                         <a:t>位</a:t>
                       </a:r>
+                      <a:endParaRPr lang="zh-CN" altLang="en-US" sz="800">
+                        <a:solidFill>
+                          <a:schemeClr val="bg1"/>
+                        </a:solidFill>
+                      </a:endParaRPr>
                     </a:p>
                   </a:txBody>
                   <a:tcPr anchor="ctr">
@@ -32905,11 +33133,6 @@
                     <a:noFill/>
                   </a:tcPr>
                 </a:tc>
-                <a:extLst>
-                  <a:ext uri="{0D108BD9-81ED-4DB2-BD59-A6C34878D82A}">
-                    <a16:rowId xmlns:a16="http://schemas.microsoft.com/office/drawing/2014/main" val="10007"/>
-                  </a:ext>
-                </a:extLst>
               </a:tr>
               <a:tr h="432000">
                 <a:tc>
@@ -32928,6 +33151,11 @@
                         </a:rPr>
                         <a:t>。</a:t>
                       </a:r>
+                      <a:endParaRPr lang="zh-CN" altLang="en-US" sz="800">
+                        <a:solidFill>
+                          <a:schemeClr val="bg1"/>
+                        </a:solidFill>
+                      </a:endParaRPr>
                     </a:p>
                   </a:txBody>
                   <a:tcPr anchor="ctr">
@@ -33377,11 +33605,6 @@
                     <a:noFill/>
                   </a:tcPr>
                 </a:tc>
-                <a:extLst>
-                  <a:ext uri="{0D108BD9-81ED-4DB2-BD59-A6C34878D82A}">
-                    <a16:rowId xmlns:a16="http://schemas.microsoft.com/office/drawing/2014/main" val="10008"/>
-                  </a:ext>
-                </a:extLst>
               </a:tr>
               <a:tr h="432000">
                 <a:tc>
@@ -33400,6 +33623,11 @@
                         </a:rPr>
                         <a:t>&lt;|end|&gt;</a:t>
                       </a:r>
+                      <a:endParaRPr lang="en-US" altLang="zh-CN" sz="800">
+                        <a:solidFill>
+                          <a:schemeClr val="bg1"/>
+                        </a:solidFill>
+                      </a:endParaRPr>
                     </a:p>
                   </a:txBody>
                   <a:tcPr anchor="ctr">
@@ -33853,11 +34081,6 @@
                     </a:solidFill>
                   </a:tcPr>
                 </a:tc>
-                <a:extLst>
-                  <a:ext uri="{0D108BD9-81ED-4DB2-BD59-A6C34878D82A}">
-                    <a16:rowId xmlns:a16="http://schemas.microsoft.com/office/drawing/2014/main" val="10009"/>
-                  </a:ext>
-                </a:extLst>
               </a:tr>
             </a:tbl>
           </a:graphicData>
@@ -34220,6 +34443,7 @@
               <a:rPr lang="zh-CN" altLang="en-US"/>
               <a:t>注意力机制：既是武器，也是枷锁</a:t>
             </a:r>
+            <a:endParaRPr lang="zh-CN" altLang="en-US"/>
           </a:p>
         </p:txBody>
       </p:sp>
@@ -34247,6 +34471,7 @@
               <a:rPr lang="zh-CN" altLang="en-US"/>
               <a:t>上下文长度受限</a:t>
             </a:r>
+            <a:endParaRPr lang="zh-CN" altLang="en-US"/>
           </a:p>
           <a:p>
             <a:pPr lvl="1"/>
@@ -34258,6 +34483,7 @@
               <a:rPr lang="en-US" altLang="zh-CN"/>
               <a:t> 1M Token</a:t>
             </a:r>
+            <a:endParaRPr lang="en-US" altLang="zh-CN"/>
           </a:p>
           <a:p>
             <a:pPr lvl="1"/>
@@ -34289,6 +34515,7 @@
               <a:rPr lang="zh-CN" altLang="en-US"/>
               <a:t>很容易用满，尤其是：</a:t>
             </a:r>
+            <a:endParaRPr lang="zh-CN" altLang="en-US"/>
           </a:p>
           <a:p>
             <a:pPr lvl="2"/>
@@ -34296,6 +34523,7 @@
               <a:rPr lang="zh-CN" altLang="en-US"/>
               <a:t>开启思考模式</a:t>
             </a:r>
+            <a:endParaRPr lang="zh-CN" altLang="en-US"/>
           </a:p>
           <a:p>
             <a:pPr lvl="2"/>
@@ -34303,6 +34531,7 @@
               <a:rPr lang="zh-CN" altLang="en-US"/>
               <a:t>需要连续上下文</a:t>
             </a:r>
+            <a:endParaRPr lang="zh-CN" altLang="en-US"/>
           </a:p>
           <a:p>
             <a:pPr lvl="2"/>
@@ -34310,6 +34539,7 @@
               <a:rPr lang="zh-CN" altLang="en-US"/>
               <a:t>多轮对话</a:t>
             </a:r>
+            <a:endParaRPr lang="zh-CN" altLang="en-US"/>
           </a:p>
           <a:p>
             <a:pPr lvl="2"/>
@@ -34317,6 +34547,7 @@
               <a:rPr lang="zh-CN" altLang="en-US"/>
               <a:t>例如：智能体工作流</a:t>
             </a:r>
+            <a:endParaRPr lang="zh-CN" altLang="en-US"/>
           </a:p>
         </p:txBody>
       </p:sp>
@@ -34337,7 +34568,6 @@
           <a:p>
             <a:fld id="{49AE70B2-8BF9-45C0-BB95-33D1B9D3A854}" type="slidenum">
               <a:rPr lang="zh-CN" altLang="en-US" smtClean="0"/>
-              <a:t>9</a:t>
             </a:fld>
             <a:endParaRPr lang="en-US" altLang="zh-CN"/>
           </a:p>
@@ -34358,20 +34588,8 @@
             <a:tbl>
               <a:tblPr/>
               <a:tblGrid>
-                <a:gridCol w="3062605">
-                  <a:extLst>
-                    <a:ext uri="{9D8B030D-6E8A-4147-A177-3AD203B41FA5}">
-                      <a16:colId xmlns:a16="http://schemas.microsoft.com/office/drawing/2014/main" val="20000"/>
-                    </a:ext>
-                  </a:extLst>
-                </a:gridCol>
-                <a:gridCol w="1143635">
-                  <a:extLst>
-                    <a:ext uri="{9D8B030D-6E8A-4147-A177-3AD203B41FA5}">
-                      <a16:colId xmlns:a16="http://schemas.microsoft.com/office/drawing/2014/main" val="20001"/>
-                    </a:ext>
-                  </a:extLst>
-                </a:gridCol>
+                <a:gridCol w="3062605"/>
+                <a:gridCol w="1143635"/>
               </a:tblGrid>
               <a:tr h="290195">
                 <a:tc>
@@ -34387,6 +34605,11 @@
                         </a:rPr>
                         <a:t>模型名称</a:t>
                       </a:r>
+                      <a:endParaRPr lang="zh-CN" altLang="en-US" sz="1100" b="1">
+                        <a:solidFill>
+                          <a:schemeClr val="bg1"/>
+                        </a:solidFill>
+                      </a:endParaRPr>
                     </a:p>
                   </a:txBody>
                   <a:tcPr marL="0" marR="0" marT="0" marB="0" anchor="ctr">
@@ -34424,6 +34647,11 @@
                         </a:rPr>
                         <a:t>最大上下文长度</a:t>
                       </a:r>
+                      <a:endParaRPr lang="zh-CN" altLang="en-US" sz="1100" b="1">
+                        <a:solidFill>
+                          <a:schemeClr val="bg1"/>
+                        </a:solidFill>
+                      </a:endParaRPr>
                     </a:p>
                   </a:txBody>
                   <a:tcPr marL="0" marR="0" marT="0" marB="0" anchor="ctr">
@@ -34448,11 +34676,6 @@
                     <a:noFill/>
                   </a:tcPr>
                 </a:tc>
-                <a:extLst>
-                  <a:ext uri="{0D108BD9-81ED-4DB2-BD59-A6C34878D82A}">
-                    <a16:rowId xmlns:a16="http://schemas.microsoft.com/office/drawing/2014/main" val="10000"/>
-                  </a:ext>
-                </a:extLst>
               </a:tr>
               <a:tr h="290195">
                 <a:tc>
@@ -34468,6 +34691,11 @@
                         </a:rPr>
                         <a:t>Llama 4 Scout</a:t>
                       </a:r>
+                      <a:endParaRPr lang="en-US" altLang="zh-CN" sz="1100">
+                        <a:solidFill>
+                          <a:schemeClr val="bg1"/>
+                        </a:solidFill>
+                      </a:endParaRPr>
                     </a:p>
                   </a:txBody>
                   <a:tcPr marL="0" marR="0" marT="0" marB="0" anchor="ctr">
@@ -34503,6 +34731,11 @@
                         </a:rPr>
                         <a:t>10M</a:t>
                       </a:r>
+                      <a:endParaRPr lang="en-US" altLang="zh-CN" sz="1100">
+                        <a:solidFill>
+                          <a:schemeClr val="bg1"/>
+                        </a:solidFill>
+                      </a:endParaRPr>
                     </a:p>
                   </a:txBody>
                   <a:tcPr marL="0" marR="0" marT="0" marB="0" anchor="ctr">
@@ -34524,11 +34757,6 @@
                     <a:noFill/>
                   </a:tcPr>
                 </a:tc>
-                <a:extLst>
-                  <a:ext uri="{0D108BD9-81ED-4DB2-BD59-A6C34878D82A}">
-                    <a16:rowId xmlns:a16="http://schemas.microsoft.com/office/drawing/2014/main" val="10001"/>
-                  </a:ext>
-                </a:extLst>
               </a:tr>
               <a:tr h="290195">
                 <a:tc>
@@ -34544,6 +34772,11 @@
                         </a:rPr>
                         <a:t>Gemini 3.1 Pro</a:t>
                       </a:r>
+                      <a:endParaRPr lang="en-US" altLang="zh-CN" sz="1100">
+                        <a:solidFill>
+                          <a:schemeClr val="bg1"/>
+                        </a:solidFill>
+                      </a:endParaRPr>
                     </a:p>
                   </a:txBody>
                   <a:tcPr marL="0" marR="0" marT="0" marB="0" anchor="ctr">
@@ -34576,6 +34809,11 @@
                         </a:rPr>
                         <a:t>2M</a:t>
                       </a:r>
+                      <a:endParaRPr lang="en-US" altLang="zh-CN" sz="1100">
+                        <a:solidFill>
+                          <a:schemeClr val="bg1"/>
+                        </a:solidFill>
+                      </a:endParaRPr>
                     </a:p>
                   </a:txBody>
                   <a:tcPr marL="0" marR="0" marT="0" marB="0" anchor="ctr">
@@ -34594,11 +34832,6 @@
                     <a:noFill/>
                   </a:tcPr>
                 </a:tc>
-                <a:extLst>
-                  <a:ext uri="{0D108BD9-81ED-4DB2-BD59-A6C34878D82A}">
-                    <a16:rowId xmlns:a16="http://schemas.microsoft.com/office/drawing/2014/main" val="10002"/>
-                  </a:ext>
-                </a:extLst>
               </a:tr>
               <a:tr h="290195">
                 <a:tc>
@@ -34614,6 +34847,11 @@
                         </a:rPr>
                         <a:t>GPT-5.4 / GPT-5.6 Sol</a:t>
                       </a:r>
+                      <a:endParaRPr lang="en-US" altLang="zh-CN" sz="1100">
+                        <a:solidFill>
+                          <a:schemeClr val="bg1"/>
+                        </a:solidFill>
+                      </a:endParaRPr>
                     </a:p>
                   </a:txBody>
                   <a:tcPr marL="0" marR="0" marT="0" marB="0" anchor="ctr">
@@ -34646,6 +34884,11 @@
                         </a:rPr>
                         <a:t>1.05M</a:t>
                       </a:r>
+                      <a:endParaRPr lang="en-US" altLang="zh-CN" sz="1100">
+                        <a:solidFill>
+                          <a:schemeClr val="bg1"/>
+                        </a:solidFill>
+                      </a:endParaRPr>
                     </a:p>
                   </a:txBody>
                   <a:tcPr marL="0" marR="0" marT="0" marB="0" anchor="ctr">
@@ -34664,11 +34907,6 @@
                     <a:noFill/>
                   </a:tcPr>
                 </a:tc>
-                <a:extLst>
-                  <a:ext uri="{0D108BD9-81ED-4DB2-BD59-A6C34878D82A}">
-                    <a16:rowId xmlns:a16="http://schemas.microsoft.com/office/drawing/2014/main" val="10003"/>
-                  </a:ext>
-                </a:extLst>
               </a:tr>
               <a:tr h="290195">
                 <a:tc>
@@ -34684,6 +34922,11 @@
                         </a:rPr>
                         <a:t>Claude Opus 4.7 / 4.8 / Sonnet 4.6</a:t>
                       </a:r>
+                      <a:endParaRPr lang="en-US" altLang="zh-CN" sz="1100">
+                        <a:solidFill>
+                          <a:schemeClr val="bg1"/>
+                        </a:solidFill>
+                      </a:endParaRPr>
                     </a:p>
                   </a:txBody>
                   <a:tcPr marL="0" marR="0" marT="0" marB="0" anchor="ctr">
@@ -34716,6 +34959,11 @@
                         </a:rPr>
                         <a:t>1M</a:t>
                       </a:r>
+                      <a:endParaRPr lang="en-US" altLang="zh-CN" sz="1100">
+                        <a:solidFill>
+                          <a:schemeClr val="bg1"/>
+                        </a:solidFill>
+                      </a:endParaRPr>
                     </a:p>
                   </a:txBody>
                   <a:tcPr marL="0" marR="0" marT="0" marB="0" anchor="ctr">
@@ -34734,11 +34982,6 @@
                     <a:noFill/>
                   </a:tcPr>
                 </a:tc>
-                <a:extLst>
-                  <a:ext uri="{0D108BD9-81ED-4DB2-BD59-A6C34878D82A}">
-                    <a16:rowId xmlns:a16="http://schemas.microsoft.com/office/drawing/2014/main" val="10004"/>
-                  </a:ext>
-                </a:extLst>
               </a:tr>
               <a:tr h="290195">
                 <a:tc>
@@ -34754,6 +34997,11 @@
                         </a:rPr>
                         <a:t>Claude Fable 5 / Mythos 5</a:t>
                       </a:r>
+                      <a:endParaRPr lang="en-US" altLang="zh-CN" sz="1100">
+                        <a:solidFill>
+                          <a:schemeClr val="bg1"/>
+                        </a:solidFill>
+                      </a:endParaRPr>
                     </a:p>
                   </a:txBody>
                   <a:tcPr marL="0" marR="0" marT="0" marB="0" anchor="ctr">
@@ -34786,6 +35034,11 @@
                         </a:rPr>
                         <a:t>1M+</a:t>
                       </a:r>
+                      <a:endParaRPr lang="en-US" altLang="zh-CN" sz="1100">
+                        <a:solidFill>
+                          <a:schemeClr val="bg1"/>
+                        </a:solidFill>
+                      </a:endParaRPr>
                     </a:p>
                   </a:txBody>
                   <a:tcPr marL="0" marR="0" marT="0" marB="0" anchor="ctr">
@@ -34804,11 +35057,6 @@
                     <a:noFill/>
                   </a:tcPr>
                 </a:tc>
-                <a:extLst>
-                  <a:ext uri="{0D108BD9-81ED-4DB2-BD59-A6C34878D82A}">
-                    <a16:rowId xmlns:a16="http://schemas.microsoft.com/office/drawing/2014/main" val="10005"/>
-                  </a:ext>
-                </a:extLst>
               </a:tr>
               <a:tr h="290195">
                 <a:tc>
@@ -34824,6 +35072,11 @@
                         </a:rPr>
                         <a:t>DeepSeek V4 (Pro/Flash)</a:t>
                       </a:r>
+                      <a:endParaRPr lang="en-US" altLang="zh-CN" sz="1100">
+                        <a:solidFill>
+                          <a:schemeClr val="bg1"/>
+                        </a:solidFill>
+                      </a:endParaRPr>
                     </a:p>
                   </a:txBody>
                   <a:tcPr marL="0" marR="0" marT="0" marB="0" anchor="ctr">
@@ -34856,6 +35109,11 @@
                         </a:rPr>
                         <a:t>1M</a:t>
                       </a:r>
+                      <a:endParaRPr lang="en-US" altLang="zh-CN" sz="1100">
+                        <a:solidFill>
+                          <a:schemeClr val="bg1"/>
+                        </a:solidFill>
+                      </a:endParaRPr>
                     </a:p>
                   </a:txBody>
                   <a:tcPr marL="0" marR="0" marT="0" marB="0" anchor="ctr">
@@ -34874,11 +35132,6 @@
                     <a:noFill/>
                   </a:tcPr>
                 </a:tc>
-                <a:extLst>
-                  <a:ext uri="{0D108BD9-81ED-4DB2-BD59-A6C34878D82A}">
-                    <a16:rowId xmlns:a16="http://schemas.microsoft.com/office/drawing/2014/main" val="10006"/>
-                  </a:ext>
-                </a:extLst>
               </a:tr>
               <a:tr h="290195">
                 <a:tc>
@@ -34894,6 +35147,11 @@
                         </a:rPr>
                         <a:t>Gemini 3.1 Flash</a:t>
                       </a:r>
+                      <a:endParaRPr lang="en-US" altLang="zh-CN" sz="1100">
+                        <a:solidFill>
+                          <a:schemeClr val="bg1"/>
+                        </a:solidFill>
+                      </a:endParaRPr>
                     </a:p>
                   </a:txBody>
                   <a:tcPr marL="0" marR="0" marT="0" marB="0" anchor="ctr">
@@ -34926,6 +35184,11 @@
                         </a:rPr>
                         <a:t>1M</a:t>
                       </a:r>
+                      <a:endParaRPr lang="en-US" altLang="zh-CN" sz="1100">
+                        <a:solidFill>
+                          <a:schemeClr val="bg1"/>
+                        </a:solidFill>
+                      </a:endParaRPr>
                     </a:p>
                   </a:txBody>
                   <a:tcPr marL="0" marR="0" marT="0" marB="0" anchor="ctr">
@@ -34944,11 +35207,6 @@
                     <a:noFill/>
                   </a:tcPr>
                 </a:tc>
-                <a:extLst>
-                  <a:ext uri="{0D108BD9-81ED-4DB2-BD59-A6C34878D82A}">
-                    <a16:rowId xmlns:a16="http://schemas.microsoft.com/office/drawing/2014/main" val="10007"/>
-                  </a:ext>
-                </a:extLst>
               </a:tr>
               <a:tr h="290195">
                 <a:tc>
@@ -34972,6 +35230,11 @@
                         </a:rPr>
                         <a:t>标准版</a:t>
                       </a:r>
+                      <a:endParaRPr lang="zh-CN" altLang="en-US" sz="1100">
+                        <a:solidFill>
+                          <a:schemeClr val="bg1"/>
+                        </a:solidFill>
+                      </a:endParaRPr>
                     </a:p>
                   </a:txBody>
                   <a:tcPr marL="0" marR="0" marT="0" marB="0" anchor="ctr">
@@ -35004,6 +35267,11 @@
                         </a:rPr>
                         <a:t>1M</a:t>
                       </a:r>
+                      <a:endParaRPr lang="en-US" altLang="zh-CN" sz="1100">
+                        <a:solidFill>
+                          <a:schemeClr val="bg1"/>
+                        </a:solidFill>
+                      </a:endParaRPr>
                     </a:p>
                   </a:txBody>
                   <a:tcPr marL="0" marR="0" marT="0" marB="0" anchor="ctr">
@@ -35022,11 +35290,6 @@
                     <a:noFill/>
                   </a:tcPr>
                 </a:tc>
-                <a:extLst>
-                  <a:ext uri="{0D108BD9-81ED-4DB2-BD59-A6C34878D82A}">
-                    <a16:rowId xmlns:a16="http://schemas.microsoft.com/office/drawing/2014/main" val="10008"/>
-                  </a:ext>
-                </a:extLst>
               </a:tr>
               <a:tr h="290195">
                 <a:tc>
@@ -35042,6 +35305,11 @@
                         </a:rPr>
                         <a:t>Grok 4.3</a:t>
                       </a:r>
+                      <a:endParaRPr lang="en-US" altLang="zh-CN" sz="1100">
+                        <a:solidFill>
+                          <a:schemeClr val="bg1"/>
+                        </a:solidFill>
+                      </a:endParaRPr>
                     </a:p>
                   </a:txBody>
                   <a:tcPr marL="0" marR="0" marT="0" marB="0" anchor="ctr">
@@ -35074,6 +35342,11 @@
                         </a:rPr>
                         <a:t>1M</a:t>
                       </a:r>
+                      <a:endParaRPr lang="en-US" altLang="zh-CN" sz="1100">
+                        <a:solidFill>
+                          <a:schemeClr val="bg1"/>
+                        </a:solidFill>
+                      </a:endParaRPr>
                     </a:p>
                   </a:txBody>
                   <a:tcPr marL="0" marR="0" marT="0" marB="0" anchor="ctr">
@@ -35092,11 +35365,6 @@
                     <a:noFill/>
                   </a:tcPr>
                 </a:tc>
-                <a:extLst>
-                  <a:ext uri="{0D108BD9-81ED-4DB2-BD59-A6C34878D82A}">
-                    <a16:rowId xmlns:a16="http://schemas.microsoft.com/office/drawing/2014/main" val="10009"/>
-                  </a:ext>
-                </a:extLst>
               </a:tr>
               <a:tr h="290195">
                 <a:tc>
@@ -35112,6 +35380,11 @@
                         </a:rPr>
                         <a:t>MiniMax M3</a:t>
                       </a:r>
+                      <a:endParaRPr lang="en-US" altLang="zh-CN" sz="1100">
+                        <a:solidFill>
+                          <a:schemeClr val="bg1"/>
+                        </a:solidFill>
+                      </a:endParaRPr>
                     </a:p>
                   </a:txBody>
                   <a:tcPr marL="0" marR="0" marT="0" marB="0" anchor="ctr">
@@ -35144,6 +35417,11 @@
                         </a:rPr>
                         <a:t>1M</a:t>
                       </a:r>
+                      <a:endParaRPr lang="en-US" altLang="zh-CN" sz="1100">
+                        <a:solidFill>
+                          <a:schemeClr val="bg1"/>
+                        </a:solidFill>
+                      </a:endParaRPr>
                     </a:p>
                   </a:txBody>
                   <a:tcPr marL="0" marR="0" marT="0" marB="0" anchor="ctr">
@@ -35162,11 +35440,6 @@
                     <a:noFill/>
                   </a:tcPr>
                 </a:tc>
-                <a:extLst>
-                  <a:ext uri="{0D108BD9-81ED-4DB2-BD59-A6C34878D82A}">
-                    <a16:rowId xmlns:a16="http://schemas.microsoft.com/office/drawing/2014/main" val="10010"/>
-                  </a:ext>
-                </a:extLst>
               </a:tr>
               <a:tr h="290195">
                 <a:tc>
@@ -35182,6 +35455,11 @@
                         </a:rPr>
                         <a:t>Qwen 3.7 Max / 3.8 Max</a:t>
                       </a:r>
+                      <a:endParaRPr lang="en-US" altLang="zh-CN" sz="1100">
+                        <a:solidFill>
+                          <a:schemeClr val="bg1"/>
+                        </a:solidFill>
+                      </a:endParaRPr>
                     </a:p>
                   </a:txBody>
                   <a:tcPr marL="0" marR="0" marT="0" marB="0" anchor="ctr">
@@ -35214,6 +35492,11 @@
                         </a:rPr>
                         <a:t>1M</a:t>
                       </a:r>
+                      <a:endParaRPr lang="en-US" altLang="zh-CN" sz="1100">
+                        <a:solidFill>
+                          <a:schemeClr val="bg1"/>
+                        </a:solidFill>
+                      </a:endParaRPr>
                     </a:p>
                   </a:txBody>
                   <a:tcPr marL="0" marR="0" marT="0" marB="0" anchor="ctr">
@@ -35232,11 +35515,6 @@
                     <a:noFill/>
                   </a:tcPr>
                 </a:tc>
-                <a:extLst>
-                  <a:ext uri="{0D108BD9-81ED-4DB2-BD59-A6C34878D82A}">
-                    <a16:rowId xmlns:a16="http://schemas.microsoft.com/office/drawing/2014/main" val="10011"/>
-                  </a:ext>
-                </a:extLst>
               </a:tr>
               <a:tr h="290195">
                 <a:tc>
@@ -35252,6 +35530,11 @@
                         </a:rPr>
                         <a:t>GPT-5.4-mini / GPT-5.2-Codex</a:t>
                       </a:r>
+                      <a:endParaRPr lang="en-US" altLang="zh-CN" sz="1100">
+                        <a:solidFill>
+                          <a:schemeClr val="bg1"/>
+                        </a:solidFill>
+                      </a:endParaRPr>
                     </a:p>
                   </a:txBody>
                   <a:tcPr marL="0" marR="0" marT="0" marB="0" anchor="ctr">
@@ -35284,6 +35567,11 @@
                         </a:rPr>
                         <a:t>400K</a:t>
                       </a:r>
+                      <a:endParaRPr lang="en-US" altLang="zh-CN" sz="1100">
+                        <a:solidFill>
+                          <a:schemeClr val="bg1"/>
+                        </a:solidFill>
+                      </a:endParaRPr>
                     </a:p>
                   </a:txBody>
                   <a:tcPr marL="0" marR="0" marT="0" marB="0" anchor="ctr">
@@ -35302,11 +35590,6 @@
                     <a:noFill/>
                   </a:tcPr>
                 </a:tc>
-                <a:extLst>
-                  <a:ext uri="{0D108BD9-81ED-4DB2-BD59-A6C34878D82A}">
-                    <a16:rowId xmlns:a16="http://schemas.microsoft.com/office/drawing/2014/main" val="10012"/>
-                  </a:ext>
-                </a:extLst>
               </a:tr>
               <a:tr h="290195">
                 <a:tc>
@@ -35322,6 +35605,11 @@
                         </a:rPr>
                         <a:t>Kimi K2.6</a:t>
                       </a:r>
+                      <a:endParaRPr lang="en-US" altLang="zh-CN" sz="1100">
+                        <a:solidFill>
+                          <a:schemeClr val="bg1"/>
+                        </a:solidFill>
+                      </a:endParaRPr>
                     </a:p>
                   </a:txBody>
                   <a:tcPr marL="0" marR="0" marT="0" marB="0" anchor="ctr">
@@ -35354,6 +35642,11 @@
                         </a:rPr>
                         <a:t>262K</a:t>
                       </a:r>
+                      <a:endParaRPr lang="en-US" altLang="zh-CN" sz="1100">
+                        <a:solidFill>
+                          <a:schemeClr val="bg1"/>
+                        </a:solidFill>
+                      </a:endParaRPr>
                     </a:p>
                   </a:txBody>
                   <a:tcPr marL="0" marR="0" marT="0" marB="0" anchor="ctr">
@@ -35372,11 +35665,6 @@
                     <a:noFill/>
                   </a:tcPr>
                 </a:tc>
-                <a:extLst>
-                  <a:ext uri="{0D108BD9-81ED-4DB2-BD59-A6C34878D82A}">
-                    <a16:rowId xmlns:a16="http://schemas.microsoft.com/office/drawing/2014/main" val="10013"/>
-                  </a:ext>
-                </a:extLst>
               </a:tr>
               <a:tr h="290195">
                 <a:tc>
@@ -35408,6 +35696,11 @@
                         </a:rPr>
                         <a:t>)</a:t>
                       </a:r>
+                      <a:endParaRPr lang="en-US" altLang="zh-CN" sz="1100">
+                        <a:solidFill>
+                          <a:schemeClr val="bg1"/>
+                        </a:solidFill>
+                      </a:endParaRPr>
                     </a:p>
                   </a:txBody>
                   <a:tcPr marL="0" marR="0" marT="0" marB="0" anchor="ctr">
@@ -35443,6 +35736,11 @@
                         </a:rPr>
                         <a:t>200K</a:t>
                       </a:r>
+                      <a:endParaRPr lang="en-US" altLang="zh-CN" sz="1100">
+                        <a:solidFill>
+                          <a:schemeClr val="bg1"/>
+                        </a:solidFill>
+                      </a:endParaRPr>
                     </a:p>
                   </a:txBody>
                   <a:tcPr marL="0" marR="0" marT="0" marB="0" anchor="ctr">
@@ -35464,11 +35762,6 @@
                     <a:noFill/>
                   </a:tcPr>
                 </a:tc>
-                <a:extLst>
-                  <a:ext uri="{0D108BD9-81ED-4DB2-BD59-A6C34878D82A}">
-                    <a16:rowId xmlns:a16="http://schemas.microsoft.com/office/drawing/2014/main" val="10014"/>
-                  </a:ext>
-                </a:extLst>
               </a:tr>
             </a:tbl>
           </a:graphicData>
@@ -36291,8 +36584,6 @@
       </a:bgFillStyleLst>
     </a:fmtScheme>
   </a:themeElements>
-  <a:objectDefaults/>
-  <a:extraClrSchemeLst/>
   <a:extLst>
     <a:ext uri="{05A4C25C-085E-4340-85A3-A5531E510DB2}">
       <thm15:themeFamily xmlns:thm15="http://schemas.microsoft.com/office/thememl/2012/main" name="Office Theme" id="{62F939B6-93AF-4DB8-9C6B-D6C7DFDC589F}" vid="{4A3C46E8-61CC-4603-A589-7422A47A8E4A}"/>
@@ -36544,8 +36835,6 @@
       </a:bgFillStyleLst>
     </a:fmtScheme>
   </a:themeElements>
-  <a:objectDefaults/>
-  <a:extraClrSchemeLst/>
   <a:extLst>
     <a:ext uri="{05A4C25C-085E-4340-85A3-A5531E510DB2}">
       <thm15:themeFamily xmlns:thm15="http://schemas.microsoft.com/office/thememl/2012/main" name="Office Theme" id="{62F939B6-93AF-4DB8-9C6B-D6C7DFDC589F}" vid="{4A3C46E8-61CC-4603-A589-7422A47A8E4A}"/>
@@ -36797,8 +37086,6 @@
       </a:bgFillStyleLst>
     </a:fmtScheme>
   </a:themeElements>
-  <a:objectDefaults/>
-  <a:extraClrSchemeLst/>
   <a:extLst>
     <a:ext uri="{05A4C25C-085E-4340-85A3-A5531E510DB2}">
       <thm15:themeFamily xmlns:thm15="http://schemas.microsoft.com/office/thememl/2012/main" name="Office Theme" id="{62F939B6-93AF-4DB8-9C6B-D6C7DFDC589F}" vid="{4A3C46E8-61CC-4603-A589-7422A47A8E4A}"/>
